--- a/output/wordlabs-pend-3day.pptx
+++ b/output/wordlabs-pend-3day.pptx
@@ -4240,7 +4240,7 @@
                 <a:ea typeface="Calibri" pitchFamily="34" charset="-122"/>
                 <a:cs typeface="Calibri" pitchFamily="34" charset="-120"/>
               </a:rPr>
-              <a:t>"to hang, hang down"</a:t>
+              <a:t>"hang, hang down, weigh"</a:t>
             </a:r>
             <a:endParaRPr lang="en-US" sz="2200" dirty="0"/>
           </a:p>
@@ -5288,7 +5288,7 @@
                 <a:ea typeface="Calibri" pitchFamily="34" charset="-122"/>
                 <a:cs typeface="Calibri" pitchFamily="34" charset="-120"/>
               </a:rPr>
-              <a:t>Word Labs  •  wordlabs.app  •  Root: 'pend' = to hang, hang down</a:t>
+              <a:t>Word Labs  •  wordlabs.app  •  Root: 'pend' = hang, hang down, weigh</a:t>
             </a:r>
             <a:endParaRPr lang="en-US" sz="800" dirty="0"/>
           </a:p>
@@ -5928,7 +5928,7 @@
                 <a:ea typeface="Calibri" pitchFamily="34" charset="-122"/>
                 <a:cs typeface="Calibri" pitchFamily="34" charset="-120"/>
               </a:rPr>
-              <a:t>Word Labs  •  wordlabs.app  •  Root: 'pend' = to hang, hang down</a:t>
+              <a:t>Word Labs  •  wordlabs.app  •  Root: 'pend' = hang, hang down, weigh</a:t>
             </a:r>
             <a:endParaRPr lang="en-US" sz="800" dirty="0"/>
           </a:p>
@@ -6040,7 +6040,7 @@
                 <a:ea typeface="Calibri" pitchFamily="34" charset="-122"/>
                 <a:cs typeface="Calibri" pitchFamily="34" charset="-120"/>
               </a:rPr>
-              <a:t>The decision was still </a:t>
+              <a:t>She wore a beautiful </a:t>
             </a:r>
             <a:pPr algn="l" indent="0" marL="0">
               <a:buNone/>
@@ -6057,7 +6057,7 @@
                 <a:ea typeface="Calibri" pitchFamily="34" charset="-122"/>
                 <a:cs typeface="Calibri" pitchFamily="34" charset="-120"/>
               </a:rPr>
-              <a:t>pending</a:t>
+              <a:t>pendant</a:t>
             </a:r>
             <a:pPr algn="l" indent="0" marL="0">
               <a:buNone/>
@@ -6071,7 +6071,7 @@
                 <a:ea typeface="Calibri" pitchFamily="34" charset="-122"/>
                 <a:cs typeface="Calibri" pitchFamily="34" charset="-120"/>
               </a:rPr>
-              <a:t>, so we had to </a:t>
+              <a:t> around her neck, and the result of the competition was still </a:t>
             </a:r>
             <a:pPr algn="l" indent="0" marL="0">
               <a:buNone/>
@@ -6088,7 +6088,7 @@
                 <a:ea typeface="Calibri" pitchFamily="34" charset="-122"/>
                 <a:cs typeface="Calibri" pitchFamily="34" charset="-120"/>
               </a:rPr>
-              <a:t>depend</a:t>
+              <a:t>pending</a:t>
             </a:r>
             <a:pPr algn="l" indent="0" marL="0">
               <a:buNone/>
@@ -6102,7 +6102,7 @@
                 <a:ea typeface="Calibri" pitchFamily="34" charset="-122"/>
                 <a:cs typeface="Calibri" pitchFamily="34" charset="-120"/>
               </a:rPr>
-              <a:t> on our teacher for an answer.</a:t>
+              <a:t>.</a:t>
             </a:r>
             <a:endParaRPr lang="en-US" sz="1800" dirty="0"/>
           </a:p>
@@ -6257,7 +6257,7 @@
                 <a:ea typeface="Trebuchet MS" pitchFamily="34" charset="-122"/>
                 <a:cs typeface="Trebuchet MS" pitchFamily="34" charset="-120"/>
               </a:rPr>
-              <a:t>pending</a:t>
+              <a:t>pendant</a:t>
             </a:r>
             <a:endParaRPr lang="en-US" sz="1400" dirty="0"/>
           </a:p>
@@ -6385,7 +6385,7 @@
                 <a:ea typeface="Trebuchet MS" pitchFamily="34" charset="-122"/>
                 <a:cs typeface="Trebuchet MS" pitchFamily="34" charset="-120"/>
               </a:rPr>
-              <a:t>depend</a:t>
+              <a:t>pending</a:t>
             </a:r>
             <a:endParaRPr lang="en-US" sz="1400" dirty="0"/>
           </a:p>
@@ -6716,7 +6716,7 @@
                 <a:ea typeface="Calibri" pitchFamily="34" charset="-122"/>
                 <a:cs typeface="Calibri" pitchFamily="34" charset="-120"/>
               </a:rPr>
-              <a:t>Word Labs  •  wordlabs.app  •  Root: 'pend' = to hang, hang down</a:t>
+              <a:t>Word Labs  •  wordlabs.app  •  Root: 'pend' = hang, hang down, weigh</a:t>
             </a:r>
             <a:endParaRPr lang="en-US" sz="800" dirty="0"/>
           </a:p>
@@ -6855,7 +6855,7 @@
                 <a:ea typeface="Trebuchet MS" pitchFamily="34" charset="-122"/>
                 <a:cs typeface="Trebuchet MS" pitchFamily="34" charset="-120"/>
               </a:rPr>
-              <a:t>pending</a:t>
+              <a:t>pendant</a:t>
             </a:r>
             <a:endParaRPr lang="en-US" sz="2800" dirty="0"/>
           </a:p>
@@ -7543,7 +7543,7 @@
                 <a:ea typeface="Calibri" pitchFamily="34" charset="-122"/>
                 <a:cs typeface="Calibri" pitchFamily="34" charset="-120"/>
               </a:rPr>
-              <a:t>Word Labs  •  wordlabs.app  •  Root: 'pend' = to hang, hang down</a:t>
+              <a:t>Word Labs  •  wordlabs.app  •  Root: 'pend' = hang, hang down, weigh</a:t>
             </a:r>
             <a:endParaRPr lang="en-US" sz="800" dirty="0"/>
           </a:p>
@@ -7682,7 +7682,7 @@
                 <a:ea typeface="Trebuchet MS" pitchFamily="34" charset="-122"/>
                 <a:cs typeface="Trebuchet MS" pitchFamily="34" charset="-120"/>
               </a:rPr>
-              <a:t>pending</a:t>
+              <a:t>pendant</a:t>
             </a:r>
             <a:endParaRPr lang="en-US" sz="2800" dirty="0"/>
           </a:p>
@@ -7860,7 +7860,7 @@
                 <a:ea typeface="Calibri" pitchFamily="34" charset="-122"/>
                 <a:cs typeface="Calibri" pitchFamily="34" charset="-120"/>
               </a:rPr>
-              <a:t>to hang</a:t>
+              <a:t>hang</a:t>
             </a:r>
             <a:endParaRPr lang="en-US" sz="850" dirty="0"/>
           </a:p>
@@ -7933,7 +7933,7 @@
                 <a:ea typeface="Trebuchet MS" pitchFamily="34" charset="-122"/>
                 <a:cs typeface="Trebuchet MS" pitchFamily="34" charset="-120"/>
               </a:rPr>
-              <a:t>ing</a:t>
+              <a:t>ant</a:t>
             </a:r>
             <a:endParaRPr lang="en-US" sz="1300" dirty="0"/>
           </a:p>
@@ -7972,7 +7972,7 @@
                 <a:ea typeface="Calibri" pitchFamily="34" charset="-122"/>
                 <a:cs typeface="Calibri" pitchFamily="34" charset="-120"/>
               </a:rPr>
-              <a:t>ongoing action or state</a:t>
+              <a:t>a thing that does the action</a:t>
             </a:r>
             <a:endParaRPr lang="en-US" sz="850" dirty="0"/>
           </a:p>
@@ -8528,7 +8528,7 @@
                 <a:ea typeface="Calibri" pitchFamily="34" charset="-122"/>
                 <a:cs typeface="Calibri" pitchFamily="34" charset="-120"/>
               </a:rPr>
-              <a:t>Word Labs  •  wordlabs.app  •  Root: 'pend' = to hang, hang down</a:t>
+              <a:t>Word Labs  •  wordlabs.app  •  Root: 'pend' = hang, hang down, weigh</a:t>
             </a:r>
             <a:endParaRPr lang="en-US" sz="800" dirty="0"/>
           </a:p>
@@ -8667,7 +8667,7 @@
                 <a:ea typeface="Trebuchet MS" pitchFamily="34" charset="-122"/>
                 <a:cs typeface="Trebuchet MS" pitchFamily="34" charset="-120"/>
               </a:rPr>
-              <a:t>pending</a:t>
+              <a:t>pendant</a:t>
             </a:r>
             <a:endParaRPr lang="en-US" sz="2800" dirty="0"/>
           </a:p>
@@ -8845,7 +8845,7 @@
                 <a:ea typeface="Calibri" pitchFamily="34" charset="-122"/>
                 <a:cs typeface="Calibri" pitchFamily="34" charset="-120"/>
               </a:rPr>
-              <a:t>to hang</a:t>
+              <a:t>hang</a:t>
             </a:r>
             <a:endParaRPr lang="en-US" sz="850" dirty="0"/>
           </a:p>
@@ -8918,7 +8918,7 @@
                 <a:ea typeface="Trebuchet MS" pitchFamily="34" charset="-122"/>
                 <a:cs typeface="Trebuchet MS" pitchFamily="34" charset="-120"/>
               </a:rPr>
-              <a:t>ing</a:t>
+              <a:t>ant</a:t>
             </a:r>
             <a:endParaRPr lang="en-US" sz="1300" dirty="0"/>
           </a:p>
@@ -8957,7 +8957,7 @@
                 <a:ea typeface="Calibri" pitchFamily="34" charset="-122"/>
                 <a:cs typeface="Calibri" pitchFamily="34" charset="-120"/>
               </a:rPr>
-              <a:t>ongoing action or state</a:t>
+              <a:t>a thing that does the action</a:t>
             </a:r>
             <a:endParaRPr lang="en-US" sz="850" dirty="0"/>
           </a:p>
@@ -9116,7 +9116,7 @@
                 <a:ea typeface="Trebuchet MS" pitchFamily="34" charset="-122"/>
                 <a:cs typeface="Trebuchet MS" pitchFamily="34" charset="-120"/>
               </a:rPr>
-              <a:t>pend</a:t>
+              <a:t>pen</a:t>
             </a:r>
             <a:endParaRPr lang="en-US" sz="1400" dirty="0"/>
           </a:p>
@@ -9221,7 +9221,7 @@
                 <a:ea typeface="Trebuchet MS" pitchFamily="34" charset="-122"/>
                 <a:cs typeface="Trebuchet MS" pitchFamily="34" charset="-120"/>
               </a:rPr>
-              <a:t>ing</a:t>
+              <a:t>dant</a:t>
             </a:r>
             <a:endParaRPr lang="en-US" sz="1400" dirty="0"/>
           </a:p>
@@ -9645,7 +9645,7 @@
                 <a:ea typeface="Calibri" pitchFamily="34" charset="-122"/>
                 <a:cs typeface="Calibri" pitchFamily="34" charset="-120"/>
               </a:rPr>
-              <a:t>Word Labs  •  wordlabs.app  •  Root: 'pend' = to hang, hang down</a:t>
+              <a:t>Word Labs  •  wordlabs.app  •  Root: 'pend' = hang, hang down, weigh</a:t>
             </a:r>
             <a:endParaRPr lang="en-US" sz="800" dirty="0"/>
           </a:p>
@@ -9784,7 +9784,7 @@
                 <a:ea typeface="Trebuchet MS" pitchFamily="34" charset="-122"/>
                 <a:cs typeface="Trebuchet MS" pitchFamily="34" charset="-120"/>
               </a:rPr>
-              <a:t>pending</a:t>
+              <a:t>pendant</a:t>
             </a:r>
             <a:endParaRPr lang="en-US" sz="2800" dirty="0"/>
           </a:p>
@@ -9962,7 +9962,7 @@
                 <a:ea typeface="Calibri" pitchFamily="34" charset="-122"/>
                 <a:cs typeface="Calibri" pitchFamily="34" charset="-120"/>
               </a:rPr>
-              <a:t>to hang</a:t>
+              <a:t>hang</a:t>
             </a:r>
             <a:endParaRPr lang="en-US" sz="850" dirty="0"/>
           </a:p>
@@ -10035,7 +10035,7 @@
                 <a:ea typeface="Trebuchet MS" pitchFamily="34" charset="-122"/>
                 <a:cs typeface="Trebuchet MS" pitchFamily="34" charset="-120"/>
               </a:rPr>
-              <a:t>ing</a:t>
+              <a:t>ant</a:t>
             </a:r>
             <a:endParaRPr lang="en-US" sz="1300" dirty="0"/>
           </a:p>
@@ -10074,7 +10074,7 @@
                 <a:ea typeface="Calibri" pitchFamily="34" charset="-122"/>
                 <a:cs typeface="Calibri" pitchFamily="34" charset="-120"/>
               </a:rPr>
-              <a:t>ongoing action or state</a:t>
+              <a:t>a thing that does the action</a:t>
             </a:r>
             <a:endParaRPr lang="en-US" sz="850" dirty="0"/>
           </a:p>
@@ -10233,7 +10233,7 @@
                 <a:ea typeface="Trebuchet MS" pitchFamily="34" charset="-122"/>
                 <a:cs typeface="Trebuchet MS" pitchFamily="34" charset="-120"/>
               </a:rPr>
-              <a:t>pend</a:t>
+              <a:t>pen</a:t>
             </a:r>
             <a:endParaRPr lang="en-US" sz="1400" dirty="0"/>
           </a:p>
@@ -10338,7 +10338,7 @@
                 <a:ea typeface="Trebuchet MS" pitchFamily="34" charset="-122"/>
                 <a:cs typeface="Trebuchet MS" pitchFamily="34" charset="-120"/>
               </a:rPr>
-              <a:t>ing</a:t>
+              <a:t>dant</a:t>
             </a:r>
             <a:endParaRPr lang="en-US" sz="1400" dirty="0"/>
           </a:p>
@@ -10445,7 +10445,7 @@
         </p:nvSpPr>
         <p:spPr>
           <a:xfrm>
-            <a:off x="2427732" y="4169664"/>
+            <a:off x="2254649" y="4169664"/>
             <a:ext cx="685800" cy="475488"/>
           </a:xfrm>
           <a:prstGeom prst="rect">
@@ -10472,7 +10472,7 @@
         </p:nvSpPr>
         <p:spPr>
           <a:xfrm>
-            <a:off x="2427732" y="4169664"/>
+            <a:off x="2254649" y="4169664"/>
             <a:ext cx="685800" cy="475488"/>
           </a:xfrm>
           <a:prstGeom prst="rect">
@@ -10511,7 +10511,7 @@
         </p:nvSpPr>
         <p:spPr>
           <a:xfrm>
-            <a:off x="3639312" y="4169664"/>
+            <a:off x="3293146" y="4169664"/>
             <a:ext cx="685800" cy="475488"/>
           </a:xfrm>
           <a:prstGeom prst="rect">
@@ -10538,7 +10538,7 @@
         </p:nvSpPr>
         <p:spPr>
           <a:xfrm>
-            <a:off x="3639312" y="4169664"/>
+            <a:off x="3293146" y="4169664"/>
             <a:ext cx="685800" cy="475488"/>
           </a:xfrm>
           <a:prstGeom prst="rect">
@@ -10577,7 +10577,7 @@
         </p:nvSpPr>
         <p:spPr>
           <a:xfrm>
-            <a:off x="4850892" y="4169664"/>
+            <a:off x="4331643" y="4169664"/>
             <a:ext cx="685800" cy="475488"/>
           </a:xfrm>
           <a:prstGeom prst="rect">
@@ -10604,7 +10604,7 @@
         </p:nvSpPr>
         <p:spPr>
           <a:xfrm>
-            <a:off x="4850892" y="4169664"/>
+            <a:off x="4331643" y="4169664"/>
             <a:ext cx="685800" cy="475488"/>
           </a:xfrm>
           <a:prstGeom prst="rect">
@@ -10629,7 +10629,7 @@
                 <a:ea typeface="Trebuchet MS" pitchFamily="34" charset="-122"/>
                 <a:cs typeface="Trebuchet MS" pitchFamily="34" charset="-120"/>
               </a:rPr>
-              <a:t>nd</a:t>
+              <a:t>n</a:t>
             </a:r>
             <a:endParaRPr lang="en-US" sz="900" dirty="0"/>
           </a:p>
@@ -10643,7 +10643,7 @@
         </p:nvSpPr>
         <p:spPr>
           <a:xfrm>
-            <a:off x="6062472" y="4169664"/>
+            <a:off x="5370141" y="4169664"/>
             <a:ext cx="685800" cy="475488"/>
           </a:xfrm>
           <a:prstGeom prst="rect">
@@ -10670,7 +10670,7 @@
         </p:nvSpPr>
         <p:spPr>
           <a:xfrm>
-            <a:off x="6062472" y="4169664"/>
+            <a:off x="5370141" y="4169664"/>
             <a:ext cx="685800" cy="475488"/>
           </a:xfrm>
           <a:prstGeom prst="rect">
@@ -10695,7 +10695,7 @@
                 <a:ea typeface="Trebuchet MS" pitchFamily="34" charset="-122"/>
                 <a:cs typeface="Trebuchet MS" pitchFamily="34" charset="-120"/>
               </a:rPr>
-              <a:t>i</a:t>
+              <a:t>d</a:t>
             </a:r>
             <a:endParaRPr lang="en-US" sz="900" dirty="0"/>
           </a:p>
@@ -10709,7 +10709,7 @@
         </p:nvSpPr>
         <p:spPr>
           <a:xfrm>
-            <a:off x="7274052" y="4169664"/>
+            <a:off x="6408638" y="4169664"/>
             <a:ext cx="685800" cy="475488"/>
           </a:xfrm>
           <a:prstGeom prst="rect">
@@ -10736,7 +10736,7 @@
         </p:nvSpPr>
         <p:spPr>
           <a:xfrm>
-            <a:off x="7274052" y="4169664"/>
+            <a:off x="6408638" y="4169664"/>
             <a:ext cx="685800" cy="475488"/>
           </a:xfrm>
           <a:prstGeom prst="rect">
@@ -10761,7 +10761,73 @@
                 <a:ea typeface="Trebuchet MS" pitchFamily="34" charset="-122"/>
                 <a:cs typeface="Trebuchet MS" pitchFamily="34" charset="-120"/>
               </a:rPr>
-              <a:t>ng</a:t>
+              <a:t>a</a:t>
+            </a:r>
+            <a:endParaRPr lang="en-US" sz="900" dirty="0"/>
+          </a:p>
+        </p:txBody>
+      </p:sp>
+      <p:sp>
+        <p:nvSpPr>
+          <p:cNvPr id="43" name="Shape 41"/>
+          <p:cNvSpPr/>
+          <p:nvPr/>
+        </p:nvSpPr>
+        <p:spPr>
+          <a:xfrm>
+            <a:off x="7447135" y="4169664"/>
+            <a:ext cx="685800" cy="475488"/>
+          </a:xfrm>
+          <a:prstGeom prst="rect">
+            <a:avLst>
+              <a:gd name="adj" fmla="val 7692"/>
+            </a:avLst>
+          </a:prstGeom>
+          <a:solidFill>
+            <a:srgbClr val="FFFFFF"/>
+          </a:solidFill>
+          <a:ln w="12700">
+            <a:solidFill>
+              <a:srgbClr val="DB2777"/>
+            </a:solidFill>
+            <a:prstDash val="solid"/>
+          </a:ln>
+        </p:spPr>
+      </p:sp>
+      <p:sp>
+        <p:nvSpPr>
+          <p:cNvPr id="44" name="Text 42"/>
+          <p:cNvSpPr/>
+          <p:nvPr/>
+        </p:nvSpPr>
+        <p:spPr>
+          <a:xfrm>
+            <a:off x="7447135" y="4169664"/>
+            <a:ext cx="685800" cy="475488"/>
+          </a:xfrm>
+          <a:prstGeom prst="rect">
+            <a:avLst/>
+          </a:prstGeom>
+          <a:noFill/>
+          <a:ln/>
+        </p:spPr>
+        <p:txBody>
+          <a:bodyPr wrap="square" lIns="0" tIns="0" rIns="0" bIns="0" rtlCol="0" anchor="ctr"/>
+          <a:lstStyle/>
+          <a:p>
+            <a:pPr algn="ctr" indent="0" marL="0">
+              <a:buNone/>
+            </a:pPr>
+            <a:r>
+              <a:rPr lang="en-US" sz="900" b="1" dirty="0">
+                <a:solidFill>
+                  <a:srgbClr val="9D174D"/>
+                </a:solidFill>
+                <a:latin typeface="Trebuchet MS" pitchFamily="34" charset="0"/>
+                <a:ea typeface="Trebuchet MS" pitchFamily="34" charset="-122"/>
+                <a:cs typeface="Trebuchet MS" pitchFamily="34" charset="-120"/>
+              </a:rPr>
+              <a:t>nt</a:t>
             </a:r>
             <a:endParaRPr lang="en-US" sz="900" dirty="0"/>
           </a:p>
@@ -11053,7 +11119,7 @@
                 <a:ea typeface="Calibri" pitchFamily="34" charset="-122"/>
                 <a:cs typeface="Calibri" pitchFamily="34" charset="-120"/>
               </a:rPr>
-              <a:t>Word Labs  •  wordlabs.app  •  Root: 'pend' = to hang, hang down</a:t>
+              <a:t>Word Labs  •  wordlabs.app  •  Root: 'pend' = hang, hang down, weigh</a:t>
             </a:r>
             <a:endParaRPr lang="en-US" sz="800" dirty="0"/>
           </a:p>
@@ -11192,7 +11258,7 @@
                 <a:ea typeface="Trebuchet MS" pitchFamily="34" charset="-122"/>
                 <a:cs typeface="Trebuchet MS" pitchFamily="34" charset="-120"/>
               </a:rPr>
-              <a:t>depend</a:t>
+              <a:t>pending</a:t>
             </a:r>
             <a:endParaRPr lang="en-US" sz="2800" dirty="0"/>
           </a:p>
@@ -11880,7 +11946,7 @@
                 <a:ea typeface="Calibri" pitchFamily="34" charset="-122"/>
                 <a:cs typeface="Calibri" pitchFamily="34" charset="-120"/>
               </a:rPr>
-              <a:t>Word Labs  •  wordlabs.app  •  Root: 'pend' = to hang, hang down</a:t>
+              <a:t>Word Labs  •  wordlabs.app  •  Root: 'pend' = hang, hang down, weigh</a:t>
             </a:r>
             <a:endParaRPr lang="en-US" sz="800" dirty="0"/>
           </a:p>
@@ -12019,7 +12085,7 @@
                 <a:ea typeface="Trebuchet MS" pitchFamily="34" charset="-122"/>
                 <a:cs typeface="Trebuchet MS" pitchFamily="34" charset="-120"/>
               </a:rPr>
-              <a:t>depend</a:t>
+              <a:t>pending</a:t>
             </a:r>
             <a:endParaRPr lang="en-US" sz="2800" dirty="0"/>
           </a:p>
@@ -12108,11 +12174,11 @@
             </a:avLst>
           </a:prstGeom>
           <a:solidFill>
-            <a:srgbClr val="DDD6FE"/>
+            <a:srgbClr val="CCFBF1"/>
           </a:solidFill>
           <a:ln w="19050">
             <a:solidFill>
-              <a:srgbClr val="7C3AED"/>
+              <a:srgbClr val="0D9488"/>
             </a:solidFill>
             <a:prstDash val="solid"/>
           </a:ln>
@@ -12152,13 +12218,13 @@
             <a:r>
               <a:rPr lang="en-US" sz="1300" b="1" dirty="0">
                 <a:solidFill>
-                  <a:srgbClr val="4C1D95"/>
+                  <a:srgbClr val="0F766E"/>
                 </a:solidFill>
                 <a:latin typeface="Trebuchet MS" pitchFamily="34" charset="0"/>
                 <a:ea typeface="Trebuchet MS" pitchFamily="34" charset="-122"/>
                 <a:cs typeface="Trebuchet MS" pitchFamily="34" charset="-120"/>
               </a:rPr>
-              <a:t>de</a:t>
+              <a:t>pend</a:t>
             </a:r>
             <a:endParaRPr lang="en-US" sz="1300" dirty="0"/>
           </a:p>
@@ -12197,7 +12263,7 @@
                 <a:ea typeface="Calibri" pitchFamily="34" charset="-122"/>
                 <a:cs typeface="Calibri" pitchFamily="34" charset="-120"/>
               </a:rPr>
-              <a:t>down, from</a:t>
+              <a:t>hang</a:t>
             </a:r>
             <a:endParaRPr lang="en-US" sz="850" dirty="0"/>
           </a:p>
@@ -12220,11 +12286,11 @@
             </a:avLst>
           </a:prstGeom>
           <a:solidFill>
-            <a:srgbClr val="CCFBF1"/>
+            <a:srgbClr val="FCE7F3"/>
           </a:solidFill>
           <a:ln w="19050">
             <a:solidFill>
-              <a:srgbClr val="0D9488"/>
+              <a:srgbClr val="DB2777"/>
             </a:solidFill>
             <a:prstDash val="solid"/>
           </a:ln>
@@ -12264,13 +12330,13 @@
             <a:r>
               <a:rPr lang="en-US" sz="1300" b="1" dirty="0">
                 <a:solidFill>
-                  <a:srgbClr val="0F766E"/>
+                  <a:srgbClr val="9D174D"/>
                 </a:solidFill>
                 <a:latin typeface="Trebuchet MS" pitchFamily="34" charset="0"/>
                 <a:ea typeface="Trebuchet MS" pitchFamily="34" charset="-122"/>
                 <a:cs typeface="Trebuchet MS" pitchFamily="34" charset="-120"/>
               </a:rPr>
-              <a:t>pend</a:t>
+              <a:t>ing</a:t>
             </a:r>
             <a:endParaRPr lang="en-US" sz="1300" dirty="0"/>
           </a:p>
@@ -12309,7 +12375,7 @@
                 <a:ea typeface="Calibri" pitchFamily="34" charset="-122"/>
                 <a:cs typeface="Calibri" pitchFamily="34" charset="-120"/>
               </a:rPr>
-              <a:t>to hang</a:t>
+              <a:t>ongoing state or action</a:t>
             </a:r>
             <a:endParaRPr lang="en-US" sz="850" dirty="0"/>
           </a:p>
@@ -12865,7 +12931,7 @@
                 <a:ea typeface="Calibri" pitchFamily="34" charset="-122"/>
                 <a:cs typeface="Calibri" pitchFamily="34" charset="-120"/>
               </a:rPr>
-              <a:t>Word Labs  •  wordlabs.app  •  Root: 'pend' = to hang, hang down</a:t>
+              <a:t>Word Labs  •  wordlabs.app  •  Root: 'pend' = hang, hang down, weigh</a:t>
             </a:r>
             <a:endParaRPr lang="en-US" sz="800" dirty="0"/>
           </a:p>
@@ -13004,7 +13070,7 @@
                 <a:ea typeface="Trebuchet MS" pitchFamily="34" charset="-122"/>
                 <a:cs typeface="Trebuchet MS" pitchFamily="34" charset="-120"/>
               </a:rPr>
-              <a:t>depend</a:t>
+              <a:t>pending</a:t>
             </a:r>
             <a:endParaRPr lang="en-US" sz="2800" dirty="0"/>
           </a:p>
@@ -13093,11 +13159,11 @@
             </a:avLst>
           </a:prstGeom>
           <a:solidFill>
-            <a:srgbClr val="DDD6FE"/>
+            <a:srgbClr val="CCFBF1"/>
           </a:solidFill>
           <a:ln w="19050">
             <a:solidFill>
-              <a:srgbClr val="7C3AED"/>
+              <a:srgbClr val="0D9488"/>
             </a:solidFill>
             <a:prstDash val="solid"/>
           </a:ln>
@@ -13137,13 +13203,13 @@
             <a:r>
               <a:rPr lang="en-US" sz="1300" b="1" dirty="0">
                 <a:solidFill>
-                  <a:srgbClr val="4C1D95"/>
+                  <a:srgbClr val="0F766E"/>
                 </a:solidFill>
                 <a:latin typeface="Trebuchet MS" pitchFamily="34" charset="0"/>
                 <a:ea typeface="Trebuchet MS" pitchFamily="34" charset="-122"/>
                 <a:cs typeface="Trebuchet MS" pitchFamily="34" charset="-120"/>
               </a:rPr>
-              <a:t>de</a:t>
+              <a:t>pend</a:t>
             </a:r>
             <a:endParaRPr lang="en-US" sz="1300" dirty="0"/>
           </a:p>
@@ -13182,7 +13248,7 @@
                 <a:ea typeface="Calibri" pitchFamily="34" charset="-122"/>
                 <a:cs typeface="Calibri" pitchFamily="34" charset="-120"/>
               </a:rPr>
-              <a:t>down, from</a:t>
+              <a:t>hang</a:t>
             </a:r>
             <a:endParaRPr lang="en-US" sz="850" dirty="0"/>
           </a:p>
@@ -13205,11 +13271,11 @@
             </a:avLst>
           </a:prstGeom>
           <a:solidFill>
-            <a:srgbClr val="CCFBF1"/>
+            <a:srgbClr val="FCE7F3"/>
           </a:solidFill>
           <a:ln w="19050">
             <a:solidFill>
-              <a:srgbClr val="0D9488"/>
+              <a:srgbClr val="DB2777"/>
             </a:solidFill>
             <a:prstDash val="solid"/>
           </a:ln>
@@ -13249,13 +13315,13 @@
             <a:r>
               <a:rPr lang="en-US" sz="1300" b="1" dirty="0">
                 <a:solidFill>
-                  <a:srgbClr val="0F766E"/>
+                  <a:srgbClr val="9D174D"/>
                 </a:solidFill>
                 <a:latin typeface="Trebuchet MS" pitchFamily="34" charset="0"/>
                 <a:ea typeface="Trebuchet MS" pitchFamily="34" charset="-122"/>
                 <a:cs typeface="Trebuchet MS" pitchFamily="34" charset="-120"/>
               </a:rPr>
-              <a:t>pend</a:t>
+              <a:t>ing</a:t>
             </a:r>
             <a:endParaRPr lang="en-US" sz="1300" dirty="0"/>
           </a:p>
@@ -13294,7 +13360,7 @@
                 <a:ea typeface="Calibri" pitchFamily="34" charset="-122"/>
                 <a:cs typeface="Calibri" pitchFamily="34" charset="-120"/>
               </a:rPr>
-              <a:t>to hang</a:t>
+              <a:t>ongoing state or action</a:t>
             </a:r>
             <a:endParaRPr lang="en-US" sz="850" dirty="0"/>
           </a:p>
@@ -13453,7 +13519,7 @@
                 <a:ea typeface="Trebuchet MS" pitchFamily="34" charset="-122"/>
                 <a:cs typeface="Trebuchet MS" pitchFamily="34" charset="-120"/>
               </a:rPr>
-              <a:t>de</a:t>
+              <a:t>pen</a:t>
             </a:r>
             <a:endParaRPr lang="en-US" sz="1400" dirty="0"/>
           </a:p>
@@ -13558,7 +13624,7 @@
                 <a:ea typeface="Trebuchet MS" pitchFamily="34" charset="-122"/>
                 <a:cs typeface="Trebuchet MS" pitchFamily="34" charset="-120"/>
               </a:rPr>
-              <a:t>pend</a:t>
+              <a:t>ding</a:t>
             </a:r>
             <a:endParaRPr lang="en-US" sz="1400" dirty="0"/>
           </a:p>
@@ -13891,7 +13957,7 @@
                 <a:ea typeface="Calibri" pitchFamily="34" charset="-122"/>
                 <a:cs typeface="Calibri" pitchFamily="34" charset="-120"/>
               </a:rPr>
-              <a:t>Root 'pend' — to hang, hang down</a:t>
+              <a:t>Root 'pend' — hang, hang down, weigh</a:t>
             </a:r>
             <a:endParaRPr lang="en-US" sz="1600" dirty="0"/>
           </a:p>
@@ -14247,7 +14313,7 @@
                 <a:ea typeface="Calibri" pitchFamily="34" charset="-122"/>
                 <a:cs typeface="Calibri" pitchFamily="34" charset="-120"/>
               </a:rPr>
-              <a:t>Word Labs  •  wordlabs.app  •  Root: 'pend' = to hang, hang down</a:t>
+              <a:t>Word Labs  •  wordlabs.app  •  Root: 'pend' = hang, hang down, weigh</a:t>
             </a:r>
             <a:endParaRPr lang="en-US" sz="800" dirty="0"/>
           </a:p>
@@ -14386,7 +14452,7 @@
                 <a:ea typeface="Trebuchet MS" pitchFamily="34" charset="-122"/>
                 <a:cs typeface="Trebuchet MS" pitchFamily="34" charset="-120"/>
               </a:rPr>
-              <a:t>depend</a:t>
+              <a:t>pending</a:t>
             </a:r>
             <a:endParaRPr lang="en-US" sz="2800" dirty="0"/>
           </a:p>
@@ -14475,11 +14541,11 @@
             </a:avLst>
           </a:prstGeom>
           <a:solidFill>
-            <a:srgbClr val="DDD6FE"/>
+            <a:srgbClr val="CCFBF1"/>
           </a:solidFill>
           <a:ln w="19050">
             <a:solidFill>
-              <a:srgbClr val="7C3AED"/>
+              <a:srgbClr val="0D9488"/>
             </a:solidFill>
             <a:prstDash val="solid"/>
           </a:ln>
@@ -14519,13 +14585,13 @@
             <a:r>
               <a:rPr lang="en-US" sz="1300" b="1" dirty="0">
                 <a:solidFill>
-                  <a:srgbClr val="4C1D95"/>
+                  <a:srgbClr val="0F766E"/>
                 </a:solidFill>
                 <a:latin typeface="Trebuchet MS" pitchFamily="34" charset="0"/>
                 <a:ea typeface="Trebuchet MS" pitchFamily="34" charset="-122"/>
                 <a:cs typeface="Trebuchet MS" pitchFamily="34" charset="-120"/>
               </a:rPr>
-              <a:t>de</a:t>
+              <a:t>pend</a:t>
             </a:r>
             <a:endParaRPr lang="en-US" sz="1300" dirty="0"/>
           </a:p>
@@ -14564,7 +14630,7 @@
                 <a:ea typeface="Calibri" pitchFamily="34" charset="-122"/>
                 <a:cs typeface="Calibri" pitchFamily="34" charset="-120"/>
               </a:rPr>
-              <a:t>down, from</a:t>
+              <a:t>hang</a:t>
             </a:r>
             <a:endParaRPr lang="en-US" sz="850" dirty="0"/>
           </a:p>
@@ -14587,11 +14653,11 @@
             </a:avLst>
           </a:prstGeom>
           <a:solidFill>
-            <a:srgbClr val="CCFBF1"/>
+            <a:srgbClr val="FCE7F3"/>
           </a:solidFill>
           <a:ln w="19050">
             <a:solidFill>
-              <a:srgbClr val="0D9488"/>
+              <a:srgbClr val="DB2777"/>
             </a:solidFill>
             <a:prstDash val="solid"/>
           </a:ln>
@@ -14631,13 +14697,13 @@
             <a:r>
               <a:rPr lang="en-US" sz="1300" b="1" dirty="0">
                 <a:solidFill>
-                  <a:srgbClr val="0F766E"/>
+                  <a:srgbClr val="9D174D"/>
                 </a:solidFill>
                 <a:latin typeface="Trebuchet MS" pitchFamily="34" charset="0"/>
                 <a:ea typeface="Trebuchet MS" pitchFamily="34" charset="-122"/>
                 <a:cs typeface="Trebuchet MS" pitchFamily="34" charset="-120"/>
               </a:rPr>
-              <a:t>pend</a:t>
+              <a:t>ing</a:t>
             </a:r>
             <a:endParaRPr lang="en-US" sz="1300" dirty="0"/>
           </a:p>
@@ -14676,7 +14742,7 @@
                 <a:ea typeface="Calibri" pitchFamily="34" charset="-122"/>
                 <a:cs typeface="Calibri" pitchFamily="34" charset="-120"/>
               </a:rPr>
-              <a:t>to hang</a:t>
+              <a:t>ongoing state or action</a:t>
             </a:r>
             <a:endParaRPr lang="en-US" sz="850" dirty="0"/>
           </a:p>
@@ -14835,7 +14901,7 @@
                 <a:ea typeface="Trebuchet MS" pitchFamily="34" charset="-122"/>
                 <a:cs typeface="Trebuchet MS" pitchFamily="34" charset="-120"/>
               </a:rPr>
-              <a:t>de</a:t>
+              <a:t>pen</a:t>
             </a:r>
             <a:endParaRPr lang="en-US" sz="1400" dirty="0"/>
           </a:p>
@@ -14940,7 +15006,7 @@
                 <a:ea typeface="Trebuchet MS" pitchFamily="34" charset="-122"/>
                 <a:cs typeface="Trebuchet MS" pitchFamily="34" charset="-120"/>
               </a:rPr>
-              <a:t>pend</a:t>
+              <a:t>ding</a:t>
             </a:r>
             <a:endParaRPr lang="en-US" sz="1400" dirty="0"/>
           </a:p>
@@ -15099,7 +15165,7 @@
                 <a:ea typeface="Trebuchet MS" pitchFamily="34" charset="-122"/>
                 <a:cs typeface="Trebuchet MS" pitchFamily="34" charset="-120"/>
               </a:rPr>
-              <a:t>d</a:t>
+              <a:t>p</a:t>
             </a:r>
             <a:endParaRPr lang="en-US" sz="900" dirty="0"/>
           </a:p>
@@ -15231,7 +15297,7 @@
                 <a:ea typeface="Trebuchet MS" pitchFamily="34" charset="-122"/>
                 <a:cs typeface="Trebuchet MS" pitchFamily="34" charset="-120"/>
               </a:rPr>
-              <a:t>p</a:t>
+              <a:t>n</a:t>
             </a:r>
             <a:endParaRPr lang="en-US" sz="900" dirty="0"/>
           </a:p>
@@ -15297,7 +15363,7 @@
                 <a:ea typeface="Trebuchet MS" pitchFamily="34" charset="-122"/>
                 <a:cs typeface="Trebuchet MS" pitchFamily="34" charset="-120"/>
               </a:rPr>
-              <a:t>e</a:t>
+              <a:t>d</a:t>
             </a:r>
             <a:endParaRPr lang="en-US" sz="900" dirty="0"/>
           </a:p>
@@ -15363,7 +15429,7 @@
                 <a:ea typeface="Trebuchet MS" pitchFamily="34" charset="-122"/>
                 <a:cs typeface="Trebuchet MS" pitchFamily="34" charset="-120"/>
               </a:rPr>
-              <a:t>nd</a:t>
+              <a:t>ing</a:t>
             </a:r>
             <a:endParaRPr lang="en-US" sz="900" dirty="0"/>
           </a:p>
@@ -15937,7 +16003,7 @@
                 <a:ea typeface="Calibri" pitchFamily="34" charset="-122"/>
                 <a:cs typeface="Calibri" pitchFamily="34" charset="-120"/>
               </a:rPr>
-              <a:t>Word Labs  •  wordlabs.app  •  Root: 'pend' = to hang, hang down</a:t>
+              <a:t>Word Labs  •  wordlabs.app  •  Root: 'pend' = hang, hang down, weigh</a:t>
             </a:r>
             <a:endParaRPr lang="en-US" sz="800" dirty="0"/>
           </a:p>
@@ -16271,7 +16337,7 @@
                 <a:ea typeface="Trebuchet MS" pitchFamily="34" charset="-122"/>
                 <a:cs typeface="Trebuchet MS" pitchFamily="34" charset="-120"/>
               </a:rPr>
-              <a:t>2</a:t>
+              <a:t>1</a:t>
             </a:r>
             <a:pPr algn="ctr" indent="0" marL="0">
               <a:buNone/>
@@ -16285,7 +16351,7 @@
                 <a:ea typeface="Trebuchet MS" pitchFamily="34" charset="-122"/>
                 <a:cs typeface="Trebuchet MS" pitchFamily="34" charset="-120"/>
               </a:rPr>
-              <a:t>  punctuation marks</a:t>
+              <a:t>  punctuation mark</a:t>
             </a:r>
             <a:endParaRPr lang="en-US" sz="2800" dirty="0"/>
           </a:p>
@@ -16577,7 +16643,7 @@
                 <a:ea typeface="Calibri" pitchFamily="34" charset="-122"/>
                 <a:cs typeface="Calibri" pitchFamily="34" charset="-120"/>
               </a:rPr>
-              <a:t>Word Labs  •  wordlabs.app  •  Root: 'pend' = to hang, hang down</a:t>
+              <a:t>Word Labs  •  wordlabs.app  •  Root: 'pend' = hang, hang down, weigh</a:t>
             </a:r>
             <a:endParaRPr lang="en-US" sz="800" dirty="0"/>
           </a:p>
@@ -16689,7 +16755,7 @@
                 <a:ea typeface="Calibri" pitchFamily="34" charset="-122"/>
                 <a:cs typeface="Calibri" pitchFamily="34" charset="-120"/>
               </a:rPr>
-              <a:t>The </a:t>
+              <a:t>The students had to </a:t>
             </a:r>
             <a:pPr algn="l" indent="0" marL="0">
               <a:buNone/>
@@ -16706,7 +16772,7 @@
                 <a:ea typeface="Calibri" pitchFamily="34" charset="-122"/>
                 <a:cs typeface="Calibri" pitchFamily="34" charset="-120"/>
               </a:rPr>
-              <a:t>impending</a:t>
+              <a:t>depend</a:t>
             </a:r>
             <a:pPr algn="l" indent="0" marL="0">
               <a:buNone/>
@@ -16720,7 +16786,7 @@
                 <a:ea typeface="Calibri" pitchFamily="34" charset="-122"/>
                 <a:cs typeface="Calibri" pitchFamily="34" charset="-120"/>
               </a:rPr>
-              <a:t> storm made us </a:t>
+              <a:t> on each other, but the </a:t>
             </a:r>
             <a:pPr algn="l" indent="0" marL="0">
               <a:buNone/>
@@ -16737,7 +16803,7 @@
                 <a:ea typeface="Calibri" pitchFamily="34" charset="-122"/>
                 <a:cs typeface="Calibri" pitchFamily="34" charset="-120"/>
               </a:rPr>
-              <a:t>dependent</a:t>
+              <a:t>independent</a:t>
             </a:r>
             <a:pPr algn="l" indent="0" marL="0">
               <a:buNone/>
@@ -16751,7 +16817,7 @@
                 <a:ea typeface="Calibri" pitchFamily="34" charset="-122"/>
                 <a:cs typeface="Calibri" pitchFamily="34" charset="-120"/>
               </a:rPr>
-              <a:t> on our torches, so Mum decided to </a:t>
+              <a:t> thinker chose to </a:t>
             </a:r>
             <a:pPr algn="l" indent="0" marL="0">
               <a:buNone/>
@@ -16768,7 +16834,7 @@
                 <a:ea typeface="Calibri" pitchFamily="34" charset="-122"/>
                 <a:cs typeface="Calibri" pitchFamily="34" charset="-120"/>
               </a:rPr>
-              <a:t>append</a:t>
+              <a:t>suspend</a:t>
             </a:r>
             <a:pPr algn="l" indent="0" marL="0">
               <a:buNone/>
@@ -16782,7 +16848,7 @@
                 <a:ea typeface="Calibri" pitchFamily="34" charset="-122"/>
                 <a:cs typeface="Calibri" pitchFamily="34" charset="-120"/>
               </a:rPr>
-              <a:t> extra batteries to the shopping list.</a:t>
+              <a:t> her judgement until she had all the facts.</a:t>
             </a:r>
             <a:endParaRPr lang="en-US" sz="1800" dirty="0"/>
           </a:p>
@@ -16937,7 +17003,7 @@
                 <a:ea typeface="Trebuchet MS" pitchFamily="34" charset="-122"/>
                 <a:cs typeface="Trebuchet MS" pitchFamily="34" charset="-120"/>
               </a:rPr>
-              <a:t>impending</a:t>
+              <a:t>depend</a:t>
             </a:r>
             <a:endParaRPr lang="en-US" sz="1400" dirty="0"/>
           </a:p>
@@ -17065,7 +17131,7 @@
                 <a:ea typeface="Trebuchet MS" pitchFamily="34" charset="-122"/>
                 <a:cs typeface="Trebuchet MS" pitchFamily="34" charset="-120"/>
               </a:rPr>
-              <a:t>dependent</a:t>
+              <a:t>independent</a:t>
             </a:r>
             <a:endParaRPr lang="en-US" sz="1400" dirty="0"/>
           </a:p>
@@ -17193,7 +17259,7 @@
                 <a:ea typeface="Trebuchet MS" pitchFamily="34" charset="-122"/>
                 <a:cs typeface="Trebuchet MS" pitchFamily="34" charset="-120"/>
               </a:rPr>
-              <a:t>append</a:t>
+              <a:t>suspend</a:t>
             </a:r>
             <a:endParaRPr lang="en-US" sz="1400" dirty="0"/>
           </a:p>
@@ -17524,7 +17590,7 @@
                 <a:ea typeface="Calibri" pitchFamily="34" charset="-122"/>
                 <a:cs typeface="Calibri" pitchFamily="34" charset="-120"/>
               </a:rPr>
-              <a:t>Word Labs  •  wordlabs.app  •  Root: 'pend' = to hang, hang down</a:t>
+              <a:t>Word Labs  •  wordlabs.app  •  Root: 'pend' = hang, hang down, weigh</a:t>
             </a:r>
             <a:endParaRPr lang="en-US" sz="800" dirty="0"/>
           </a:p>
@@ -17663,7 +17729,7 @@
                 <a:ea typeface="Trebuchet MS" pitchFamily="34" charset="-122"/>
                 <a:cs typeface="Trebuchet MS" pitchFamily="34" charset="-120"/>
               </a:rPr>
-              <a:t>impending</a:t>
+              <a:t>depend</a:t>
             </a:r>
             <a:endParaRPr lang="en-US" sz="2800" dirty="0"/>
           </a:p>
@@ -18351,7 +18417,7 @@
                 <a:ea typeface="Calibri" pitchFamily="34" charset="-122"/>
                 <a:cs typeface="Calibri" pitchFamily="34" charset="-120"/>
               </a:rPr>
-              <a:t>Word Labs  •  wordlabs.app  •  Root: 'pend' = to hang, hang down</a:t>
+              <a:t>Word Labs  •  wordlabs.app  •  Root: 'pend' = hang, hang down, weigh</a:t>
             </a:r>
             <a:endParaRPr lang="en-US" sz="800" dirty="0"/>
           </a:p>
@@ -18490,7 +18556,7 @@
                 <a:ea typeface="Trebuchet MS" pitchFamily="34" charset="-122"/>
                 <a:cs typeface="Trebuchet MS" pitchFamily="34" charset="-120"/>
               </a:rPr>
-              <a:t>impending</a:t>
+              <a:t>depend</a:t>
             </a:r>
             <a:endParaRPr lang="en-US" sz="2800" dirty="0"/>
           </a:p>
@@ -18570,7 +18636,7 @@
         </p:nvSpPr>
         <p:spPr>
           <a:xfrm>
-            <a:off x="2221992" y="2258568"/>
+            <a:off x="2938272" y="2258568"/>
             <a:ext cx="1828800" cy="292608"/>
           </a:xfrm>
           <a:prstGeom prst="rect">
@@ -18604,7 +18670,7 @@
         </p:nvSpPr>
         <p:spPr>
           <a:xfrm>
-            <a:off x="2221992" y="2258568"/>
+            <a:off x="2938272" y="2258568"/>
             <a:ext cx="1828800" cy="292608"/>
           </a:xfrm>
           <a:prstGeom prst="rect">
@@ -18629,7 +18695,7 @@
                 <a:ea typeface="Trebuchet MS" pitchFamily="34" charset="-122"/>
                 <a:cs typeface="Trebuchet MS" pitchFamily="34" charset="-120"/>
               </a:rPr>
-              <a:t>im</a:t>
+              <a:t>de</a:t>
             </a:r>
             <a:endParaRPr lang="en-US" sz="1300" dirty="0"/>
           </a:p>
@@ -18643,7 +18709,7 @@
         </p:nvSpPr>
         <p:spPr>
           <a:xfrm>
-            <a:off x="2221992" y="2569464"/>
+            <a:off x="2938272" y="2569464"/>
             <a:ext cx="1828800" cy="201168"/>
           </a:xfrm>
           <a:prstGeom prst="rect">
@@ -18668,7 +18734,7 @@
                 <a:ea typeface="Calibri" pitchFamily="34" charset="-122"/>
                 <a:cs typeface="Calibri" pitchFamily="34" charset="-120"/>
               </a:rPr>
-              <a:t>into, upon</a:t>
+              <a:t>down, from</a:t>
             </a:r>
             <a:endParaRPr lang="en-US" sz="850" dirty="0"/>
           </a:p>
@@ -18676,52 +18742,13 @@
       </p:sp>
       <p:sp>
         <p:nvSpPr>
-          <p:cNvPr id="19" name="Text 17"/>
-          <p:cNvSpPr/>
-          <p:nvPr/>
-        </p:nvSpPr>
-        <p:spPr>
-          <a:xfrm>
-            <a:off x="2221992" y="2752344"/>
-            <a:ext cx="1828800" cy="182880"/>
-          </a:xfrm>
-          <a:prstGeom prst="rect">
-            <a:avLst/>
-          </a:prstGeom>
-          <a:noFill/>
-          <a:ln/>
-        </p:spPr>
-        <p:txBody>
-          <a:bodyPr wrap="square" lIns="0" tIns="0" rIns="0" bIns="0" rtlCol="0" anchor="t"/>
-          <a:lstStyle/>
-          <a:p>
-            <a:pPr algn="ctr" indent="0" marL="0">
-              <a:buNone/>
-            </a:pPr>
-            <a:r>
-              <a:rPr lang="en-US" sz="700" i="1" dirty="0">
-                <a:solidFill>
-                  <a:srgbClr val="94A3B8"/>
-                </a:solidFill>
-                <a:latin typeface="Calibri" pitchFamily="34" charset="0"/>
-                <a:ea typeface="Calibri" pitchFamily="34" charset="-122"/>
-                <a:cs typeface="Calibri" pitchFamily="34" charset="-120"/>
-              </a:rPr>
-              <a:t>in → im before 'p'</a:t>
-            </a:r>
-            <a:endParaRPr lang="en-US" sz="700" dirty="0"/>
-          </a:p>
-        </p:txBody>
-      </p:sp>
-      <p:sp>
-        <p:nvSpPr>
-          <p:cNvPr id="20" name="Shape 18"/>
-          <p:cNvSpPr/>
-          <p:nvPr/>
-        </p:nvSpPr>
-        <p:spPr>
-          <a:xfrm>
-            <a:off x="4370832" y="2258568"/>
+          <p:cNvPr id="19" name="Shape 17"/>
+          <p:cNvSpPr/>
+          <p:nvPr/>
+        </p:nvSpPr>
+        <p:spPr>
+          <a:xfrm>
+            <a:off x="5803392" y="2258568"/>
             <a:ext cx="1828800" cy="292608"/>
           </a:xfrm>
           <a:prstGeom prst="rect">
@@ -18749,13 +18776,13 @@
       </p:sp>
       <p:sp>
         <p:nvSpPr>
-          <p:cNvPr id="21" name="Text 19"/>
-          <p:cNvSpPr/>
-          <p:nvPr/>
-        </p:nvSpPr>
-        <p:spPr>
-          <a:xfrm>
-            <a:off x="4370832" y="2258568"/>
+          <p:cNvPr id="20" name="Text 18"/>
+          <p:cNvSpPr/>
+          <p:nvPr/>
+        </p:nvSpPr>
+        <p:spPr>
+          <a:xfrm>
+            <a:off x="5803392" y="2258568"/>
             <a:ext cx="1828800" cy="292608"/>
           </a:xfrm>
           <a:prstGeom prst="rect">
@@ -18788,13 +18815,13 @@
       </p:sp>
       <p:sp>
         <p:nvSpPr>
-          <p:cNvPr id="22" name="Text 20"/>
-          <p:cNvSpPr/>
-          <p:nvPr/>
-        </p:nvSpPr>
-        <p:spPr>
-          <a:xfrm>
-            <a:off x="4370832" y="2569464"/>
+          <p:cNvPr id="21" name="Text 19"/>
+          <p:cNvSpPr/>
+          <p:nvPr/>
+        </p:nvSpPr>
+        <p:spPr>
+          <a:xfrm>
+            <a:off x="5803392" y="2569464"/>
             <a:ext cx="1828800" cy="201168"/>
           </a:xfrm>
           <a:prstGeom prst="rect">
@@ -18819,7 +18846,7 @@
                 <a:ea typeface="Calibri" pitchFamily="34" charset="-122"/>
                 <a:cs typeface="Calibri" pitchFamily="34" charset="-120"/>
               </a:rPr>
-              <a:t>to hang</a:t>
+              <a:t>hang</a:t>
             </a:r>
             <a:endParaRPr lang="en-US" sz="850" dirty="0"/>
           </a:p>
@@ -18827,76 +18854,96 @@
       </p:sp>
       <p:sp>
         <p:nvSpPr>
-          <p:cNvPr id="23" name="Shape 21"/>
-          <p:cNvSpPr/>
-          <p:nvPr/>
-        </p:nvSpPr>
-        <p:spPr>
-          <a:xfrm>
-            <a:off x="6519672" y="2258568"/>
-            <a:ext cx="1828800" cy="292608"/>
+          <p:cNvPr id="22" name="Shape 20"/>
+          <p:cNvSpPr/>
+          <p:nvPr/>
+        </p:nvSpPr>
+        <p:spPr>
+          <a:xfrm>
+            <a:off x="365760" y="3273552"/>
+            <a:ext cx="1371600" cy="658368"/>
           </a:xfrm>
           <a:prstGeom prst="rect">
             <a:avLst>
-              <a:gd name="adj" fmla="val 25000"/>
+              <a:gd name="adj" fmla="val 8333"/>
             </a:avLst>
           </a:prstGeom>
           <a:solidFill>
-            <a:srgbClr val="FCE7F3"/>
-          </a:solidFill>
-          <a:ln w="19050">
-            <a:solidFill>
-              <a:srgbClr val="DB2777"/>
-            </a:solidFill>
-            <a:prstDash val="solid"/>
-          </a:ln>
-          <a:effectLst>
-            <a:outerShdw sx="100000" sy="100000" kx="0" ky="0" algn="bl" rotWithShape="0" blurRad="101600" dist="38100" dir="8100000">
-              <a:srgbClr val="000000">
-                <a:alpha val="12000"/>
-              </a:srgbClr>
-            </a:outerShdw>
-          </a:effectLst>
-        </p:spPr>
-      </p:sp>
-      <p:sp>
-        <p:nvSpPr>
-          <p:cNvPr id="24" name="Text 22"/>
-          <p:cNvSpPr/>
-          <p:nvPr/>
-        </p:nvSpPr>
-        <p:spPr>
-          <a:xfrm>
-            <a:off x="6519672" y="2258568"/>
-            <a:ext cx="1828800" cy="292608"/>
-          </a:xfrm>
-          <a:prstGeom prst="rect">
-            <a:avLst/>
-          </a:prstGeom>
-          <a:noFill/>
-          <a:ln/>
-        </p:spPr>
-        <p:txBody>
-          <a:bodyPr wrap="square" lIns="0" tIns="0" rIns="0" bIns="0" rtlCol="0" anchor="ctr"/>
-          <a:lstStyle/>
-          <a:p>
-            <a:pPr algn="ctr" indent="0" marL="0">
-              <a:buNone/>
-            </a:pPr>
-            <a:r>
-              <a:rPr lang="en-US" sz="1300" b="1" dirty="0">
-                <a:solidFill>
-                  <a:srgbClr val="9D174D"/>
+            <a:srgbClr val="E2E8F0"/>
+          </a:solidFill>
+          <a:ln w="12700">
+            <a:solidFill>
+              <a:srgbClr val="E2E8F0"/>
+            </a:solidFill>
+            <a:prstDash val="solid"/>
+          </a:ln>
+        </p:spPr>
+      </p:sp>
+      <p:sp>
+        <p:nvSpPr>
+          <p:cNvPr id="23" name="Text 21"/>
+          <p:cNvSpPr/>
+          <p:nvPr/>
+        </p:nvSpPr>
+        <p:spPr>
+          <a:xfrm>
+            <a:off x="365760" y="3273552"/>
+            <a:ext cx="1371600" cy="658368"/>
+          </a:xfrm>
+          <a:prstGeom prst="rect">
+            <a:avLst/>
+          </a:prstGeom>
+          <a:noFill/>
+          <a:ln/>
+        </p:spPr>
+        <p:txBody>
+          <a:bodyPr wrap="square" lIns="0" tIns="0" rIns="0" bIns="0" rtlCol="0" anchor="ctr"/>
+          <a:lstStyle/>
+          <a:p>
+            <a:pPr algn="ctr" indent="0" marL="0">
+              <a:buNone/>
+            </a:pPr>
+            <a:r>
+              <a:rPr lang="en-US" sz="1100" b="1" dirty="0">
+                <a:solidFill>
+                  <a:srgbClr val="475569"/>
                 </a:solidFill>
                 <a:latin typeface="Trebuchet MS" pitchFamily="34" charset="0"/>
                 <a:ea typeface="Trebuchet MS" pitchFamily="34" charset="-122"/>
                 <a:cs typeface="Trebuchet MS" pitchFamily="34" charset="-120"/>
               </a:rPr>
-              <a:t>ing</a:t>
-            </a:r>
-            <a:endParaRPr lang="en-US" sz="1300" dirty="0"/>
-          </a:p>
-        </p:txBody>
+              <a:t>Syllables</a:t>
+            </a:r>
+            <a:endParaRPr lang="en-US" sz="1100" dirty="0"/>
+          </a:p>
+        </p:txBody>
+      </p:sp>
+      <p:sp>
+        <p:nvSpPr>
+          <p:cNvPr id="24" name="Shape 22"/>
+          <p:cNvSpPr/>
+          <p:nvPr/>
+        </p:nvSpPr>
+        <p:spPr>
+          <a:xfrm>
+            <a:off x="1874520" y="3273552"/>
+            <a:ext cx="6903720" cy="658368"/>
+          </a:xfrm>
+          <a:prstGeom prst="rect">
+            <a:avLst>
+              <a:gd name="adj" fmla="val 8333"/>
+            </a:avLst>
+          </a:prstGeom>
+          <a:solidFill>
+            <a:srgbClr val="F8FAFC"/>
+          </a:solidFill>
+          <a:ln w="12700">
+            <a:solidFill>
+              <a:srgbClr val="E2E8F0"/>
+            </a:solidFill>
+            <a:prstDash val="dash"/>
+          </a:ln>
+        </p:spPr>
       </p:sp>
       <p:sp>
         <p:nvSpPr>
@@ -18906,34 +18953,34 @@
         </p:nvSpPr>
         <p:spPr>
           <a:xfrm>
-            <a:off x="6519672" y="2569464"/>
-            <a:ext cx="1828800" cy="201168"/>
-          </a:xfrm>
-          <a:prstGeom prst="rect">
-            <a:avLst/>
-          </a:prstGeom>
-          <a:noFill/>
-          <a:ln/>
-        </p:spPr>
-        <p:txBody>
-          <a:bodyPr wrap="square" lIns="0" tIns="0" rIns="0" bIns="0" rtlCol="0" anchor="t"/>
-          <a:lstStyle/>
-          <a:p>
-            <a:pPr algn="ctr" indent="0" marL="0">
-              <a:buNone/>
-            </a:pPr>
-            <a:r>
-              <a:rPr lang="en-US" sz="850" dirty="0">
-                <a:solidFill>
-                  <a:srgbClr val="475569"/>
+            <a:off x="1874520" y="3273552"/>
+            <a:ext cx="6903720" cy="658368"/>
+          </a:xfrm>
+          <a:prstGeom prst="rect">
+            <a:avLst/>
+          </a:prstGeom>
+          <a:noFill/>
+          <a:ln/>
+        </p:spPr>
+        <p:txBody>
+          <a:bodyPr wrap="square" rtlCol="0" anchor="ctr"/>
+          <a:lstStyle/>
+          <a:p>
+            <a:pPr algn="ctr" indent="0" marL="0">
+              <a:buNone/>
+            </a:pPr>
+            <a:r>
+              <a:rPr lang="en-US" sz="1100" i="1" dirty="0">
+                <a:solidFill>
+                  <a:srgbClr val="CBD5E1"/>
                 </a:solidFill>
                 <a:latin typeface="Calibri" pitchFamily="34" charset="0"/>
                 <a:ea typeface="Calibri" pitchFamily="34" charset="-122"/>
                 <a:cs typeface="Calibri" pitchFamily="34" charset="-120"/>
               </a:rPr>
-              <a:t>ongoing action or state</a:t>
-            </a:r>
-            <a:endParaRPr lang="en-US" sz="850" dirty="0"/>
+              <a:t>Write here...</a:t>
+            </a:r>
+            <a:endParaRPr lang="en-US" sz="1100" dirty="0"/>
           </a:p>
         </p:txBody>
       </p:sp>
@@ -18945,12 +18992,12 @@
         </p:nvSpPr>
         <p:spPr>
           <a:xfrm>
-            <a:off x="365760" y="3273552"/>
-            <a:ext cx="1371600" cy="658368"/>
+            <a:off x="365760" y="4096512"/>
+            <a:ext cx="1371600" cy="804672"/>
           </a:xfrm>
           <a:prstGeom prst="rect">
             <a:avLst>
-              <a:gd name="adj" fmla="val 8333"/>
+              <a:gd name="adj" fmla="val 6818"/>
             </a:avLst>
           </a:prstGeom>
           <a:solidFill>
@@ -18972,8 +19019,8 @@
         </p:nvSpPr>
         <p:spPr>
           <a:xfrm>
-            <a:off x="365760" y="3273552"/>
-            <a:ext cx="1371600" cy="658368"/>
+            <a:off x="365760" y="4096512"/>
+            <a:ext cx="1371600" cy="804672"/>
           </a:xfrm>
           <a:prstGeom prst="rect">
             <a:avLst/>
@@ -18997,7 +19044,7 @@
                 <a:ea typeface="Trebuchet MS" pitchFamily="34" charset="-122"/>
                 <a:cs typeface="Trebuchet MS" pitchFamily="34" charset="-120"/>
               </a:rPr>
-              <a:t>Syllables</a:t>
+              <a:t>Phonemes</a:t>
             </a:r>
             <a:endParaRPr lang="en-US" sz="1100" dirty="0"/>
           </a:p>
@@ -19011,74 +19058,8 @@
         </p:nvSpPr>
         <p:spPr>
           <a:xfrm>
-            <a:off x="1874520" y="3273552"/>
-            <a:ext cx="6903720" cy="658368"/>
-          </a:xfrm>
-          <a:prstGeom prst="rect">
-            <a:avLst>
-              <a:gd name="adj" fmla="val 8333"/>
-            </a:avLst>
-          </a:prstGeom>
-          <a:solidFill>
-            <a:srgbClr val="F8FAFC"/>
-          </a:solidFill>
-          <a:ln w="12700">
-            <a:solidFill>
-              <a:srgbClr val="E2E8F0"/>
-            </a:solidFill>
-            <a:prstDash val="dash"/>
-          </a:ln>
-        </p:spPr>
-      </p:sp>
-      <p:sp>
-        <p:nvSpPr>
-          <p:cNvPr id="29" name="Text 27"/>
-          <p:cNvSpPr/>
-          <p:nvPr/>
-        </p:nvSpPr>
-        <p:spPr>
-          <a:xfrm>
-            <a:off x="1874520" y="3273552"/>
-            <a:ext cx="6903720" cy="658368"/>
-          </a:xfrm>
-          <a:prstGeom prst="rect">
-            <a:avLst/>
-          </a:prstGeom>
-          <a:noFill/>
-          <a:ln/>
-        </p:spPr>
-        <p:txBody>
-          <a:bodyPr wrap="square" rtlCol="0" anchor="ctr"/>
-          <a:lstStyle/>
-          <a:p>
-            <a:pPr algn="ctr" indent="0" marL="0">
-              <a:buNone/>
-            </a:pPr>
-            <a:r>
-              <a:rPr lang="en-US" sz="1100" i="1" dirty="0">
-                <a:solidFill>
-                  <a:srgbClr val="CBD5E1"/>
-                </a:solidFill>
-                <a:latin typeface="Calibri" pitchFamily="34" charset="0"/>
-                <a:ea typeface="Calibri" pitchFamily="34" charset="-122"/>
-                <a:cs typeface="Calibri" pitchFamily="34" charset="-120"/>
-              </a:rPr>
-              <a:t>Write here...</a:t>
-            </a:r>
-            <a:endParaRPr lang="en-US" sz="1100" dirty="0"/>
-          </a:p>
-        </p:txBody>
-      </p:sp>
-      <p:sp>
-        <p:nvSpPr>
-          <p:cNvPr id="30" name="Shape 28"/>
-          <p:cNvSpPr/>
-          <p:nvPr/>
-        </p:nvSpPr>
-        <p:spPr>
-          <a:xfrm>
-            <a:off x="365760" y="4096512"/>
-            <a:ext cx="1371600" cy="804672"/>
+            <a:off x="1874520" y="4096512"/>
+            <a:ext cx="6903720" cy="804672"/>
           </a:xfrm>
           <a:prstGeom prst="rect">
             <a:avLst>
@@ -19086,85 +19067,19 @@
             </a:avLst>
           </a:prstGeom>
           <a:solidFill>
-            <a:srgbClr val="E2E8F0"/>
+            <a:srgbClr val="F8FAFC"/>
           </a:solidFill>
           <a:ln w="12700">
             <a:solidFill>
               <a:srgbClr val="E2E8F0"/>
             </a:solidFill>
-            <a:prstDash val="solid"/>
-          </a:ln>
-        </p:spPr>
-      </p:sp>
-      <p:sp>
-        <p:nvSpPr>
-          <p:cNvPr id="31" name="Text 29"/>
-          <p:cNvSpPr/>
-          <p:nvPr/>
-        </p:nvSpPr>
-        <p:spPr>
-          <a:xfrm>
-            <a:off x="365760" y="4096512"/>
-            <a:ext cx="1371600" cy="804672"/>
-          </a:xfrm>
-          <a:prstGeom prst="rect">
-            <a:avLst/>
-          </a:prstGeom>
-          <a:noFill/>
-          <a:ln/>
-        </p:spPr>
-        <p:txBody>
-          <a:bodyPr wrap="square" lIns="0" tIns="0" rIns="0" bIns="0" rtlCol="0" anchor="ctr"/>
-          <a:lstStyle/>
-          <a:p>
-            <a:pPr algn="ctr" indent="0" marL="0">
-              <a:buNone/>
-            </a:pPr>
-            <a:r>
-              <a:rPr lang="en-US" sz="1100" b="1" dirty="0">
-                <a:solidFill>
-                  <a:srgbClr val="475569"/>
-                </a:solidFill>
-                <a:latin typeface="Trebuchet MS" pitchFamily="34" charset="0"/>
-                <a:ea typeface="Trebuchet MS" pitchFamily="34" charset="-122"/>
-                <a:cs typeface="Trebuchet MS" pitchFamily="34" charset="-120"/>
-              </a:rPr>
-              <a:t>Phonemes</a:t>
-            </a:r>
-            <a:endParaRPr lang="en-US" sz="1100" dirty="0"/>
-          </a:p>
-        </p:txBody>
-      </p:sp>
-      <p:sp>
-        <p:nvSpPr>
-          <p:cNvPr id="32" name="Shape 30"/>
-          <p:cNvSpPr/>
-          <p:nvPr/>
-        </p:nvSpPr>
-        <p:spPr>
-          <a:xfrm>
-            <a:off x="1874520" y="4096512"/>
-            <a:ext cx="6903720" cy="804672"/>
-          </a:xfrm>
-          <a:prstGeom prst="rect">
-            <a:avLst>
-              <a:gd name="adj" fmla="val 6818"/>
-            </a:avLst>
-          </a:prstGeom>
-          <a:solidFill>
-            <a:srgbClr val="F8FAFC"/>
-          </a:solidFill>
-          <a:ln w="12700">
-            <a:solidFill>
-              <a:srgbClr val="E2E8F0"/>
-            </a:solidFill>
             <a:prstDash val="dash"/>
           </a:ln>
         </p:spPr>
       </p:sp>
       <p:sp>
         <p:nvSpPr>
-          <p:cNvPr id="33" name="Text 31"/>
+          <p:cNvPr id="29" name="Text 27"/>
           <p:cNvSpPr/>
           <p:nvPr/>
         </p:nvSpPr>
@@ -19487,7 +19402,7 @@
                 <a:ea typeface="Calibri" pitchFamily="34" charset="-122"/>
                 <a:cs typeface="Calibri" pitchFamily="34" charset="-120"/>
               </a:rPr>
-              <a:t>Word Labs  •  wordlabs.app  •  Root: 'pend' = to hang, hang down</a:t>
+              <a:t>Word Labs  •  wordlabs.app  •  Root: 'pend' = hang, hang down, weigh</a:t>
             </a:r>
             <a:endParaRPr lang="en-US" sz="800" dirty="0"/>
           </a:p>
@@ -19626,7 +19541,7 @@
                 <a:ea typeface="Trebuchet MS" pitchFamily="34" charset="-122"/>
                 <a:cs typeface="Trebuchet MS" pitchFamily="34" charset="-120"/>
               </a:rPr>
-              <a:t>impending</a:t>
+              <a:t>depend</a:t>
             </a:r>
             <a:endParaRPr lang="en-US" sz="2800" dirty="0"/>
           </a:p>
@@ -19706,7 +19621,7 @@
         </p:nvSpPr>
         <p:spPr>
           <a:xfrm>
-            <a:off x="2221992" y="2258568"/>
+            <a:off x="2938272" y="2258568"/>
             <a:ext cx="1828800" cy="292608"/>
           </a:xfrm>
           <a:prstGeom prst="rect">
@@ -19740,7 +19655,7 @@
         </p:nvSpPr>
         <p:spPr>
           <a:xfrm>
-            <a:off x="2221992" y="2258568"/>
+            <a:off x="2938272" y="2258568"/>
             <a:ext cx="1828800" cy="292608"/>
           </a:xfrm>
           <a:prstGeom prst="rect">
@@ -19765,7 +19680,7 @@
                 <a:ea typeface="Trebuchet MS" pitchFamily="34" charset="-122"/>
                 <a:cs typeface="Trebuchet MS" pitchFamily="34" charset="-120"/>
               </a:rPr>
-              <a:t>im</a:t>
+              <a:t>de</a:t>
             </a:r>
             <a:endParaRPr lang="en-US" sz="1300" dirty="0"/>
           </a:p>
@@ -19779,7 +19694,7 @@
         </p:nvSpPr>
         <p:spPr>
           <a:xfrm>
-            <a:off x="2221992" y="2569464"/>
+            <a:off x="2938272" y="2569464"/>
             <a:ext cx="1828800" cy="201168"/>
           </a:xfrm>
           <a:prstGeom prst="rect">
@@ -19804,7 +19719,7 @@
                 <a:ea typeface="Calibri" pitchFamily="34" charset="-122"/>
                 <a:cs typeface="Calibri" pitchFamily="34" charset="-120"/>
               </a:rPr>
-              <a:t>into, upon</a:t>
+              <a:t>down, from</a:t>
             </a:r>
             <a:endParaRPr lang="en-US" sz="850" dirty="0"/>
           </a:p>
@@ -19812,52 +19727,13 @@
       </p:sp>
       <p:sp>
         <p:nvSpPr>
-          <p:cNvPr id="19" name="Text 17"/>
-          <p:cNvSpPr/>
-          <p:nvPr/>
-        </p:nvSpPr>
-        <p:spPr>
-          <a:xfrm>
-            <a:off x="2221992" y="2752344"/>
-            <a:ext cx="1828800" cy="182880"/>
-          </a:xfrm>
-          <a:prstGeom prst="rect">
-            <a:avLst/>
-          </a:prstGeom>
-          <a:noFill/>
-          <a:ln/>
-        </p:spPr>
-        <p:txBody>
-          <a:bodyPr wrap="square" lIns="0" tIns="0" rIns="0" bIns="0" rtlCol="0" anchor="t"/>
-          <a:lstStyle/>
-          <a:p>
-            <a:pPr algn="ctr" indent="0" marL="0">
-              <a:buNone/>
-            </a:pPr>
-            <a:r>
-              <a:rPr lang="en-US" sz="700" i="1" dirty="0">
-                <a:solidFill>
-                  <a:srgbClr val="94A3B8"/>
-                </a:solidFill>
-                <a:latin typeface="Calibri" pitchFamily="34" charset="0"/>
-                <a:ea typeface="Calibri" pitchFamily="34" charset="-122"/>
-                <a:cs typeface="Calibri" pitchFamily="34" charset="-120"/>
-              </a:rPr>
-              <a:t>in → im before 'p'</a:t>
-            </a:r>
-            <a:endParaRPr lang="en-US" sz="700" dirty="0"/>
-          </a:p>
-        </p:txBody>
-      </p:sp>
-      <p:sp>
-        <p:nvSpPr>
-          <p:cNvPr id="20" name="Shape 18"/>
-          <p:cNvSpPr/>
-          <p:nvPr/>
-        </p:nvSpPr>
-        <p:spPr>
-          <a:xfrm>
-            <a:off x="4370832" y="2258568"/>
+          <p:cNvPr id="19" name="Shape 17"/>
+          <p:cNvSpPr/>
+          <p:nvPr/>
+        </p:nvSpPr>
+        <p:spPr>
+          <a:xfrm>
+            <a:off x="5803392" y="2258568"/>
             <a:ext cx="1828800" cy="292608"/>
           </a:xfrm>
           <a:prstGeom prst="rect">
@@ -19885,13 +19761,13 @@
       </p:sp>
       <p:sp>
         <p:nvSpPr>
-          <p:cNvPr id="21" name="Text 19"/>
-          <p:cNvSpPr/>
-          <p:nvPr/>
-        </p:nvSpPr>
-        <p:spPr>
-          <a:xfrm>
-            <a:off x="4370832" y="2258568"/>
+          <p:cNvPr id="20" name="Text 18"/>
+          <p:cNvSpPr/>
+          <p:nvPr/>
+        </p:nvSpPr>
+        <p:spPr>
+          <a:xfrm>
+            <a:off x="5803392" y="2258568"/>
             <a:ext cx="1828800" cy="292608"/>
           </a:xfrm>
           <a:prstGeom prst="rect">
@@ -19924,13 +19800,13 @@
       </p:sp>
       <p:sp>
         <p:nvSpPr>
-          <p:cNvPr id="22" name="Text 20"/>
-          <p:cNvSpPr/>
-          <p:nvPr/>
-        </p:nvSpPr>
-        <p:spPr>
-          <a:xfrm>
-            <a:off x="4370832" y="2569464"/>
+          <p:cNvPr id="21" name="Text 19"/>
+          <p:cNvSpPr/>
+          <p:nvPr/>
+        </p:nvSpPr>
+        <p:spPr>
+          <a:xfrm>
+            <a:off x="5803392" y="2569464"/>
             <a:ext cx="1828800" cy="201168"/>
           </a:xfrm>
           <a:prstGeom prst="rect">
@@ -19955,7 +19831,7 @@
                 <a:ea typeface="Calibri" pitchFamily="34" charset="-122"/>
                 <a:cs typeface="Calibri" pitchFamily="34" charset="-120"/>
               </a:rPr>
-              <a:t>to hang</a:t>
+              <a:t>hang</a:t>
             </a:r>
             <a:endParaRPr lang="en-US" sz="850" dirty="0"/>
           </a:p>
@@ -19963,126 +19839,80 @@
       </p:sp>
       <p:sp>
         <p:nvSpPr>
-          <p:cNvPr id="23" name="Shape 21"/>
-          <p:cNvSpPr/>
-          <p:nvPr/>
-        </p:nvSpPr>
-        <p:spPr>
-          <a:xfrm>
-            <a:off x="6519672" y="2258568"/>
-            <a:ext cx="1828800" cy="292608"/>
+          <p:cNvPr id="22" name="Shape 20"/>
+          <p:cNvSpPr/>
+          <p:nvPr/>
+        </p:nvSpPr>
+        <p:spPr>
+          <a:xfrm>
+            <a:off x="365760" y="3273552"/>
+            <a:ext cx="1371600" cy="658368"/>
           </a:xfrm>
           <a:prstGeom prst="rect">
             <a:avLst>
-              <a:gd name="adj" fmla="val 25000"/>
+              <a:gd name="adj" fmla="val 8333"/>
             </a:avLst>
           </a:prstGeom>
           <a:solidFill>
-            <a:srgbClr val="FCE7F3"/>
-          </a:solidFill>
-          <a:ln w="19050">
-            <a:solidFill>
-              <a:srgbClr val="DB2777"/>
-            </a:solidFill>
-            <a:prstDash val="solid"/>
-          </a:ln>
-          <a:effectLst>
-            <a:outerShdw sx="100000" sy="100000" kx="0" ky="0" algn="bl" rotWithShape="0" blurRad="101600" dist="38100" dir="8100000">
-              <a:srgbClr val="000000">
-                <a:alpha val="12000"/>
-              </a:srgbClr>
-            </a:outerShdw>
-          </a:effectLst>
-        </p:spPr>
-      </p:sp>
-      <p:sp>
-        <p:nvSpPr>
-          <p:cNvPr id="24" name="Text 22"/>
-          <p:cNvSpPr/>
-          <p:nvPr/>
-        </p:nvSpPr>
-        <p:spPr>
-          <a:xfrm>
-            <a:off x="6519672" y="2258568"/>
-            <a:ext cx="1828800" cy="292608"/>
-          </a:xfrm>
-          <a:prstGeom prst="rect">
-            <a:avLst/>
-          </a:prstGeom>
-          <a:noFill/>
-          <a:ln/>
-        </p:spPr>
-        <p:txBody>
-          <a:bodyPr wrap="square" lIns="0" tIns="0" rIns="0" bIns="0" rtlCol="0" anchor="ctr"/>
-          <a:lstStyle/>
-          <a:p>
-            <a:pPr algn="ctr" indent="0" marL="0">
-              <a:buNone/>
-            </a:pPr>
-            <a:r>
-              <a:rPr lang="en-US" sz="1300" b="1" dirty="0">
-                <a:solidFill>
-                  <a:srgbClr val="9D174D"/>
+            <a:srgbClr val="E2E8F0"/>
+          </a:solidFill>
+          <a:ln w="12700">
+            <a:solidFill>
+              <a:srgbClr val="E2E8F0"/>
+            </a:solidFill>
+            <a:prstDash val="solid"/>
+          </a:ln>
+        </p:spPr>
+      </p:sp>
+      <p:sp>
+        <p:nvSpPr>
+          <p:cNvPr id="23" name="Text 21"/>
+          <p:cNvSpPr/>
+          <p:nvPr/>
+        </p:nvSpPr>
+        <p:spPr>
+          <a:xfrm>
+            <a:off x="365760" y="3273552"/>
+            <a:ext cx="1371600" cy="658368"/>
+          </a:xfrm>
+          <a:prstGeom prst="rect">
+            <a:avLst/>
+          </a:prstGeom>
+          <a:noFill/>
+          <a:ln/>
+        </p:spPr>
+        <p:txBody>
+          <a:bodyPr wrap="square" lIns="0" tIns="0" rIns="0" bIns="0" rtlCol="0" anchor="ctr"/>
+          <a:lstStyle/>
+          <a:p>
+            <a:pPr algn="ctr" indent="0" marL="0">
+              <a:buNone/>
+            </a:pPr>
+            <a:r>
+              <a:rPr lang="en-US" sz="1100" b="1" dirty="0">
+                <a:solidFill>
+                  <a:srgbClr val="475569"/>
                 </a:solidFill>
                 <a:latin typeface="Trebuchet MS" pitchFamily="34" charset="0"/>
                 <a:ea typeface="Trebuchet MS" pitchFamily="34" charset="-122"/>
                 <a:cs typeface="Trebuchet MS" pitchFamily="34" charset="-120"/>
               </a:rPr>
-              <a:t>ing</a:t>
-            </a:r>
-            <a:endParaRPr lang="en-US" sz="1300" dirty="0"/>
-          </a:p>
-        </p:txBody>
-      </p:sp>
-      <p:sp>
-        <p:nvSpPr>
-          <p:cNvPr id="25" name="Text 23"/>
-          <p:cNvSpPr/>
-          <p:nvPr/>
-        </p:nvSpPr>
-        <p:spPr>
-          <a:xfrm>
-            <a:off x="6519672" y="2569464"/>
-            <a:ext cx="1828800" cy="201168"/>
-          </a:xfrm>
-          <a:prstGeom prst="rect">
-            <a:avLst/>
-          </a:prstGeom>
-          <a:noFill/>
-          <a:ln/>
-        </p:spPr>
-        <p:txBody>
-          <a:bodyPr wrap="square" lIns="0" tIns="0" rIns="0" bIns="0" rtlCol="0" anchor="t"/>
-          <a:lstStyle/>
-          <a:p>
-            <a:pPr algn="ctr" indent="0" marL="0">
-              <a:buNone/>
-            </a:pPr>
-            <a:r>
-              <a:rPr lang="en-US" sz="850" dirty="0">
-                <a:solidFill>
-                  <a:srgbClr val="475569"/>
-                </a:solidFill>
-                <a:latin typeface="Calibri" pitchFamily="34" charset="0"/>
-                <a:ea typeface="Calibri" pitchFamily="34" charset="-122"/>
-                <a:cs typeface="Calibri" pitchFamily="34" charset="-120"/>
-              </a:rPr>
-              <a:t>ongoing action or state</a:t>
-            </a:r>
-            <a:endParaRPr lang="en-US" sz="850" dirty="0"/>
-          </a:p>
-        </p:txBody>
-      </p:sp>
-      <p:sp>
-        <p:nvSpPr>
-          <p:cNvPr id="26" name="Shape 24"/>
-          <p:cNvSpPr/>
-          <p:nvPr/>
-        </p:nvSpPr>
-        <p:spPr>
-          <a:xfrm>
-            <a:off x="365760" y="3273552"/>
-            <a:ext cx="1371600" cy="658368"/>
+              <a:t>Syllables</a:t>
+            </a:r>
+            <a:endParaRPr lang="en-US" sz="1100" dirty="0"/>
+          </a:p>
+        </p:txBody>
+      </p:sp>
+      <p:sp>
+        <p:nvSpPr>
+          <p:cNvPr id="24" name="Shape 22"/>
+          <p:cNvSpPr/>
+          <p:nvPr/>
+        </p:nvSpPr>
+        <p:spPr>
+          <a:xfrm>
+            <a:off x="1874520" y="3273552"/>
+            <a:ext cx="6903720" cy="658368"/>
           </a:xfrm>
           <a:prstGeom prst="rect">
             <a:avLst>
@@ -20090,52 +19920,118 @@
             </a:avLst>
           </a:prstGeom>
           <a:solidFill>
-            <a:srgbClr val="E2E8F0"/>
-          </a:solidFill>
-          <a:ln w="12700">
-            <a:solidFill>
-              <a:srgbClr val="E2E8F0"/>
-            </a:solidFill>
-            <a:prstDash val="solid"/>
-          </a:ln>
-        </p:spPr>
-      </p:sp>
-      <p:sp>
-        <p:nvSpPr>
-          <p:cNvPr id="27" name="Text 25"/>
-          <p:cNvSpPr/>
-          <p:nvPr/>
-        </p:nvSpPr>
-        <p:spPr>
-          <a:xfrm>
-            <a:off x="365760" y="3273552"/>
-            <a:ext cx="1371600" cy="658368"/>
-          </a:xfrm>
-          <a:prstGeom prst="rect">
-            <a:avLst/>
-          </a:prstGeom>
-          <a:noFill/>
-          <a:ln/>
-        </p:spPr>
-        <p:txBody>
-          <a:bodyPr wrap="square" lIns="0" tIns="0" rIns="0" bIns="0" rtlCol="0" anchor="ctr"/>
-          <a:lstStyle/>
-          <a:p>
-            <a:pPr algn="ctr" indent="0" marL="0">
-              <a:buNone/>
-            </a:pPr>
-            <a:r>
-              <a:rPr lang="en-US" sz="1100" b="1" dirty="0">
-                <a:solidFill>
-                  <a:srgbClr val="475569"/>
+            <a:srgbClr val="CCFBF1"/>
+          </a:solidFill>
+          <a:ln w="12700">
+            <a:solidFill>
+              <a:srgbClr val="0D9488"/>
+            </a:solidFill>
+            <a:prstDash val="solid"/>
+          </a:ln>
+        </p:spPr>
+      </p:sp>
+      <p:sp>
+        <p:nvSpPr>
+          <p:cNvPr id="25" name="Shape 23"/>
+          <p:cNvSpPr/>
+          <p:nvPr/>
+        </p:nvSpPr>
+        <p:spPr>
+          <a:xfrm>
+            <a:off x="2999232" y="3364992"/>
+            <a:ext cx="1645920" cy="475488"/>
+          </a:xfrm>
+          <a:prstGeom prst="rect">
+            <a:avLst>
+              <a:gd name="adj" fmla="val 9615"/>
+            </a:avLst>
+          </a:prstGeom>
+          <a:solidFill>
+            <a:srgbClr val="FFFFFF"/>
+          </a:solidFill>
+          <a:ln w="12700">
+            <a:solidFill>
+              <a:srgbClr val="0D9488"/>
+            </a:solidFill>
+            <a:prstDash val="solid"/>
+          </a:ln>
+        </p:spPr>
+      </p:sp>
+      <p:sp>
+        <p:nvSpPr>
+          <p:cNvPr id="26" name="Text 24"/>
+          <p:cNvSpPr/>
+          <p:nvPr/>
+        </p:nvSpPr>
+        <p:spPr>
+          <a:xfrm>
+            <a:off x="2999232" y="3364992"/>
+            <a:ext cx="1645920" cy="475488"/>
+          </a:xfrm>
+          <a:prstGeom prst="rect">
+            <a:avLst/>
+          </a:prstGeom>
+          <a:noFill/>
+          <a:ln/>
+        </p:spPr>
+        <p:txBody>
+          <a:bodyPr wrap="square" lIns="0" tIns="0" rIns="0" bIns="0" rtlCol="0" anchor="ctr"/>
+          <a:lstStyle/>
+          <a:p>
+            <a:pPr algn="ctr" indent="0" marL="0">
+              <a:buNone/>
+            </a:pPr>
+            <a:r>
+              <a:rPr lang="en-US" sz="1400" b="1" dirty="0">
+                <a:solidFill>
+                  <a:srgbClr val="0D9488"/>
                 </a:solidFill>
                 <a:latin typeface="Trebuchet MS" pitchFamily="34" charset="0"/>
                 <a:ea typeface="Trebuchet MS" pitchFamily="34" charset="-122"/>
                 <a:cs typeface="Trebuchet MS" pitchFamily="34" charset="-120"/>
               </a:rPr>
-              <a:t>Syllables</a:t>
-            </a:r>
-            <a:endParaRPr lang="en-US" sz="1100" dirty="0"/>
+              <a:t>de</a:t>
+            </a:r>
+            <a:endParaRPr lang="en-US" sz="1400" dirty="0"/>
+          </a:p>
+        </p:txBody>
+      </p:sp>
+      <p:sp>
+        <p:nvSpPr>
+          <p:cNvPr id="27" name="Text 25"/>
+          <p:cNvSpPr/>
+          <p:nvPr/>
+        </p:nvSpPr>
+        <p:spPr>
+          <a:xfrm>
+            <a:off x="4645152" y="3364992"/>
+            <a:ext cx="1097280" cy="475488"/>
+          </a:xfrm>
+          <a:prstGeom prst="rect">
+            <a:avLst/>
+          </a:prstGeom>
+          <a:noFill/>
+          <a:ln/>
+        </p:spPr>
+        <p:txBody>
+          <a:bodyPr wrap="square" lIns="0" tIns="0" rIns="0" bIns="0" rtlCol="0" anchor="ctr"/>
+          <a:lstStyle/>
+          <a:p>
+            <a:pPr algn="ctr" indent="0" marL="0">
+              <a:buNone/>
+            </a:pPr>
+            <a:r>
+              <a:rPr lang="en-US" sz="1600" b="1" dirty="0">
+                <a:solidFill>
+                  <a:srgbClr val="0D9488"/>
+                </a:solidFill>
+                <a:latin typeface="Trebuchet MS" pitchFamily="34" charset="0"/>
+                <a:ea typeface="Trebuchet MS" pitchFamily="34" charset="-122"/>
+                <a:cs typeface="Trebuchet MS" pitchFamily="34" charset="-120"/>
+              </a:rPr>
+              <a:t>·</a:t>
+            </a:r>
+            <a:endParaRPr lang="en-US" sz="1600" dirty="0"/>
           </a:p>
         </p:txBody>
       </p:sp>
@@ -20147,34 +20043,7 @@
         </p:nvSpPr>
         <p:spPr>
           <a:xfrm>
-            <a:off x="1874520" y="3273552"/>
-            <a:ext cx="6903720" cy="658368"/>
-          </a:xfrm>
-          <a:prstGeom prst="rect">
-            <a:avLst>
-              <a:gd name="adj" fmla="val 8333"/>
-            </a:avLst>
-          </a:prstGeom>
-          <a:solidFill>
-            <a:srgbClr val="CCFBF1"/>
-          </a:solidFill>
-          <a:ln w="12700">
-            <a:solidFill>
-              <a:srgbClr val="0D9488"/>
-            </a:solidFill>
-            <a:prstDash val="solid"/>
-          </a:ln>
-        </p:spPr>
-      </p:sp>
-      <p:sp>
-        <p:nvSpPr>
-          <p:cNvPr id="29" name="Shape 27"/>
-          <p:cNvSpPr/>
-          <p:nvPr/>
-        </p:nvSpPr>
-        <p:spPr>
-          <a:xfrm>
-            <a:off x="2313432" y="3364992"/>
+            <a:off x="5742432" y="3364992"/>
             <a:ext cx="1645920" cy="475488"/>
           </a:xfrm>
           <a:prstGeom prst="rect">
@@ -20195,13 +20064,13 @@
       </p:sp>
       <p:sp>
         <p:nvSpPr>
-          <p:cNvPr id="30" name="Text 28"/>
-          <p:cNvSpPr/>
-          <p:nvPr/>
-        </p:nvSpPr>
-        <p:spPr>
-          <a:xfrm>
-            <a:off x="2313432" y="3364992"/>
+          <p:cNvPr id="29" name="Text 27"/>
+          <p:cNvSpPr/>
+          <p:nvPr/>
+        </p:nvSpPr>
+        <p:spPr>
+          <a:xfrm>
+            <a:off x="5742432" y="3364992"/>
             <a:ext cx="1645920" cy="475488"/>
           </a:xfrm>
           <a:prstGeom prst="rect">
@@ -20226,7 +20095,7 @@
                 <a:ea typeface="Trebuchet MS" pitchFamily="34" charset="-122"/>
                 <a:cs typeface="Trebuchet MS" pitchFamily="34" charset="-120"/>
               </a:rPr>
-              <a:t>im</a:t>
+              <a:t>pend</a:t>
             </a:r>
             <a:endParaRPr lang="en-US" sz="1400" dirty="0"/>
           </a:p>
@@ -20234,40 +20103,67 @@
       </p:sp>
       <p:sp>
         <p:nvSpPr>
+          <p:cNvPr id="30" name="Shape 28"/>
+          <p:cNvSpPr/>
+          <p:nvPr/>
+        </p:nvSpPr>
+        <p:spPr>
+          <a:xfrm>
+            <a:off x="365760" y="4096512"/>
+            <a:ext cx="1371600" cy="804672"/>
+          </a:xfrm>
+          <a:prstGeom prst="rect">
+            <a:avLst>
+              <a:gd name="adj" fmla="val 6818"/>
+            </a:avLst>
+          </a:prstGeom>
+          <a:solidFill>
+            <a:srgbClr val="E2E8F0"/>
+          </a:solidFill>
+          <a:ln w="12700">
+            <a:solidFill>
+              <a:srgbClr val="E2E8F0"/>
+            </a:solidFill>
+            <a:prstDash val="solid"/>
+          </a:ln>
+        </p:spPr>
+      </p:sp>
+      <p:sp>
+        <p:nvSpPr>
           <p:cNvPr id="31" name="Text 29"/>
           <p:cNvSpPr/>
           <p:nvPr/>
         </p:nvSpPr>
         <p:spPr>
           <a:xfrm>
-            <a:off x="3959352" y="3364992"/>
-            <a:ext cx="411480" cy="475488"/>
-          </a:xfrm>
-          <a:prstGeom prst="rect">
-            <a:avLst/>
-          </a:prstGeom>
-          <a:noFill/>
-          <a:ln/>
-        </p:spPr>
-        <p:txBody>
-          <a:bodyPr wrap="square" lIns="0" tIns="0" rIns="0" bIns="0" rtlCol="0" anchor="ctr"/>
-          <a:lstStyle/>
-          <a:p>
-            <a:pPr algn="ctr" indent="0" marL="0">
-              <a:buNone/>
-            </a:pPr>
-            <a:r>
-              <a:rPr lang="en-US" sz="1600" b="1" dirty="0">
-                <a:solidFill>
-                  <a:srgbClr val="0D9488"/>
+            <a:off x="365760" y="4096512"/>
+            <a:ext cx="1371600" cy="804672"/>
+          </a:xfrm>
+          <a:prstGeom prst="rect">
+            <a:avLst/>
+          </a:prstGeom>
+          <a:noFill/>
+          <a:ln/>
+        </p:spPr>
+        <p:txBody>
+          <a:bodyPr wrap="square" lIns="0" tIns="0" rIns="0" bIns="0" rtlCol="0" anchor="ctr"/>
+          <a:lstStyle/>
+          <a:p>
+            <a:pPr algn="ctr" indent="0" marL="0">
+              <a:buNone/>
+            </a:pPr>
+            <a:r>
+              <a:rPr lang="en-US" sz="1100" b="1" dirty="0">
+                <a:solidFill>
+                  <a:srgbClr val="475569"/>
                 </a:solidFill>
                 <a:latin typeface="Trebuchet MS" pitchFamily="34" charset="0"/>
                 <a:ea typeface="Trebuchet MS" pitchFamily="34" charset="-122"/>
                 <a:cs typeface="Trebuchet MS" pitchFamily="34" charset="-120"/>
               </a:rPr>
-              <a:t>·</a:t>
-            </a:r>
-            <a:endParaRPr lang="en-US" sz="1600" dirty="0"/>
+              <a:t>Phonemes</a:t>
+            </a:r>
+            <a:endParaRPr lang="en-US" sz="1100" dirty="0"/>
           </a:p>
         </p:txBody>
       </p:sp>
@@ -20279,179 +20175,8 @@
         </p:nvSpPr>
         <p:spPr>
           <a:xfrm>
-            <a:off x="4370832" y="3364992"/>
-            <a:ext cx="1645920" cy="475488"/>
-          </a:xfrm>
-          <a:prstGeom prst="rect">
-            <a:avLst>
-              <a:gd name="adj" fmla="val 9615"/>
-            </a:avLst>
-          </a:prstGeom>
-          <a:solidFill>
-            <a:srgbClr val="FFFFFF"/>
-          </a:solidFill>
-          <a:ln w="12700">
-            <a:solidFill>
-              <a:srgbClr val="0D9488"/>
-            </a:solidFill>
-            <a:prstDash val="solid"/>
-          </a:ln>
-        </p:spPr>
-      </p:sp>
-      <p:sp>
-        <p:nvSpPr>
-          <p:cNvPr id="33" name="Text 31"/>
-          <p:cNvSpPr/>
-          <p:nvPr/>
-        </p:nvSpPr>
-        <p:spPr>
-          <a:xfrm>
-            <a:off x="4370832" y="3364992"/>
-            <a:ext cx="1645920" cy="475488"/>
-          </a:xfrm>
-          <a:prstGeom prst="rect">
-            <a:avLst/>
-          </a:prstGeom>
-          <a:noFill/>
-          <a:ln/>
-        </p:spPr>
-        <p:txBody>
-          <a:bodyPr wrap="square" lIns="0" tIns="0" rIns="0" bIns="0" rtlCol="0" anchor="ctr"/>
-          <a:lstStyle/>
-          <a:p>
-            <a:pPr algn="ctr" indent="0" marL="0">
-              <a:buNone/>
-            </a:pPr>
-            <a:r>
-              <a:rPr lang="en-US" sz="1400" b="1" dirty="0">
-                <a:solidFill>
-                  <a:srgbClr val="0D9488"/>
-                </a:solidFill>
-                <a:latin typeface="Trebuchet MS" pitchFamily="34" charset="0"/>
-                <a:ea typeface="Trebuchet MS" pitchFamily="34" charset="-122"/>
-                <a:cs typeface="Trebuchet MS" pitchFamily="34" charset="-120"/>
-              </a:rPr>
-              <a:t>pend</a:t>
-            </a:r>
-            <a:endParaRPr lang="en-US" sz="1400" dirty="0"/>
-          </a:p>
-        </p:txBody>
-      </p:sp>
-      <p:sp>
-        <p:nvSpPr>
-          <p:cNvPr id="34" name="Text 32"/>
-          <p:cNvSpPr/>
-          <p:nvPr/>
-        </p:nvSpPr>
-        <p:spPr>
-          <a:xfrm>
-            <a:off x="6016752" y="3364992"/>
-            <a:ext cx="411480" cy="475488"/>
-          </a:xfrm>
-          <a:prstGeom prst="rect">
-            <a:avLst/>
-          </a:prstGeom>
-          <a:noFill/>
-          <a:ln/>
-        </p:spPr>
-        <p:txBody>
-          <a:bodyPr wrap="square" lIns="0" tIns="0" rIns="0" bIns="0" rtlCol="0" anchor="ctr"/>
-          <a:lstStyle/>
-          <a:p>
-            <a:pPr algn="ctr" indent="0" marL="0">
-              <a:buNone/>
-            </a:pPr>
-            <a:r>
-              <a:rPr lang="en-US" sz="1600" b="1" dirty="0">
-                <a:solidFill>
-                  <a:srgbClr val="0D9488"/>
-                </a:solidFill>
-                <a:latin typeface="Trebuchet MS" pitchFamily="34" charset="0"/>
-                <a:ea typeface="Trebuchet MS" pitchFamily="34" charset="-122"/>
-                <a:cs typeface="Trebuchet MS" pitchFamily="34" charset="-120"/>
-              </a:rPr>
-              <a:t>·</a:t>
-            </a:r>
-            <a:endParaRPr lang="en-US" sz="1600" dirty="0"/>
-          </a:p>
-        </p:txBody>
-      </p:sp>
-      <p:sp>
-        <p:nvSpPr>
-          <p:cNvPr id="35" name="Shape 33"/>
-          <p:cNvSpPr/>
-          <p:nvPr/>
-        </p:nvSpPr>
-        <p:spPr>
-          <a:xfrm>
-            <a:off x="6428232" y="3364992"/>
-            <a:ext cx="1645920" cy="475488"/>
-          </a:xfrm>
-          <a:prstGeom prst="rect">
-            <a:avLst>
-              <a:gd name="adj" fmla="val 9615"/>
-            </a:avLst>
-          </a:prstGeom>
-          <a:solidFill>
-            <a:srgbClr val="FFFFFF"/>
-          </a:solidFill>
-          <a:ln w="12700">
-            <a:solidFill>
-              <a:srgbClr val="0D9488"/>
-            </a:solidFill>
-            <a:prstDash val="solid"/>
-          </a:ln>
-        </p:spPr>
-      </p:sp>
-      <p:sp>
-        <p:nvSpPr>
-          <p:cNvPr id="36" name="Text 34"/>
-          <p:cNvSpPr/>
-          <p:nvPr/>
-        </p:nvSpPr>
-        <p:spPr>
-          <a:xfrm>
-            <a:off x="6428232" y="3364992"/>
-            <a:ext cx="1645920" cy="475488"/>
-          </a:xfrm>
-          <a:prstGeom prst="rect">
-            <a:avLst/>
-          </a:prstGeom>
-          <a:noFill/>
-          <a:ln/>
-        </p:spPr>
-        <p:txBody>
-          <a:bodyPr wrap="square" lIns="0" tIns="0" rIns="0" bIns="0" rtlCol="0" anchor="ctr"/>
-          <a:lstStyle/>
-          <a:p>
-            <a:pPr algn="ctr" indent="0" marL="0">
-              <a:buNone/>
-            </a:pPr>
-            <a:r>
-              <a:rPr lang="en-US" sz="1400" b="1" dirty="0">
-                <a:solidFill>
-                  <a:srgbClr val="0D9488"/>
-                </a:solidFill>
-                <a:latin typeface="Trebuchet MS" pitchFamily="34" charset="0"/>
-                <a:ea typeface="Trebuchet MS" pitchFamily="34" charset="-122"/>
-                <a:cs typeface="Trebuchet MS" pitchFamily="34" charset="-120"/>
-              </a:rPr>
-              <a:t>ing</a:t>
-            </a:r>
-            <a:endParaRPr lang="en-US" sz="1400" dirty="0"/>
-          </a:p>
-        </p:txBody>
-      </p:sp>
-      <p:sp>
-        <p:nvSpPr>
-          <p:cNvPr id="37" name="Shape 35"/>
-          <p:cNvSpPr/>
-          <p:nvPr/>
-        </p:nvSpPr>
-        <p:spPr>
-          <a:xfrm>
-            <a:off x="365760" y="4096512"/>
-            <a:ext cx="1371600" cy="804672"/>
+            <a:off x="1874520" y="4096512"/>
+            <a:ext cx="6903720" cy="804672"/>
           </a:xfrm>
           <a:prstGeom prst="rect">
             <a:avLst>
@@ -20459,85 +20184,19 @@
             </a:avLst>
           </a:prstGeom>
           <a:solidFill>
-            <a:srgbClr val="E2E8F0"/>
+            <a:srgbClr val="F8FAFC"/>
           </a:solidFill>
           <a:ln w="12700">
             <a:solidFill>
               <a:srgbClr val="E2E8F0"/>
             </a:solidFill>
-            <a:prstDash val="solid"/>
-          </a:ln>
-        </p:spPr>
-      </p:sp>
-      <p:sp>
-        <p:nvSpPr>
-          <p:cNvPr id="38" name="Text 36"/>
-          <p:cNvSpPr/>
-          <p:nvPr/>
-        </p:nvSpPr>
-        <p:spPr>
-          <a:xfrm>
-            <a:off x="365760" y="4096512"/>
-            <a:ext cx="1371600" cy="804672"/>
-          </a:xfrm>
-          <a:prstGeom prst="rect">
-            <a:avLst/>
-          </a:prstGeom>
-          <a:noFill/>
-          <a:ln/>
-        </p:spPr>
-        <p:txBody>
-          <a:bodyPr wrap="square" lIns="0" tIns="0" rIns="0" bIns="0" rtlCol="0" anchor="ctr"/>
-          <a:lstStyle/>
-          <a:p>
-            <a:pPr algn="ctr" indent="0" marL="0">
-              <a:buNone/>
-            </a:pPr>
-            <a:r>
-              <a:rPr lang="en-US" sz="1100" b="1" dirty="0">
-                <a:solidFill>
-                  <a:srgbClr val="475569"/>
-                </a:solidFill>
-                <a:latin typeface="Trebuchet MS" pitchFamily="34" charset="0"/>
-                <a:ea typeface="Trebuchet MS" pitchFamily="34" charset="-122"/>
-                <a:cs typeface="Trebuchet MS" pitchFamily="34" charset="-120"/>
-              </a:rPr>
-              <a:t>Phonemes</a:t>
-            </a:r>
-            <a:endParaRPr lang="en-US" sz="1100" dirty="0"/>
-          </a:p>
-        </p:txBody>
-      </p:sp>
-      <p:sp>
-        <p:nvSpPr>
-          <p:cNvPr id="39" name="Shape 37"/>
-          <p:cNvSpPr/>
-          <p:nvPr/>
-        </p:nvSpPr>
-        <p:spPr>
-          <a:xfrm>
-            <a:off x="1874520" y="4096512"/>
-            <a:ext cx="6903720" cy="804672"/>
-          </a:xfrm>
-          <a:prstGeom prst="rect">
-            <a:avLst>
-              <a:gd name="adj" fmla="val 6818"/>
-            </a:avLst>
-          </a:prstGeom>
-          <a:solidFill>
-            <a:srgbClr val="F8FAFC"/>
-          </a:solidFill>
-          <a:ln w="12700">
-            <a:solidFill>
-              <a:srgbClr val="E2E8F0"/>
-            </a:solidFill>
             <a:prstDash val="dash"/>
           </a:ln>
         </p:spPr>
       </p:sp>
       <p:sp>
         <p:nvSpPr>
-          <p:cNvPr id="40" name="Text 38"/>
+          <p:cNvPr id="33" name="Text 31"/>
           <p:cNvSpPr/>
           <p:nvPr/>
         </p:nvSpPr>
@@ -20860,7 +20519,7 @@
                 <a:ea typeface="Calibri" pitchFamily="34" charset="-122"/>
                 <a:cs typeface="Calibri" pitchFamily="34" charset="-120"/>
               </a:rPr>
-              <a:t>Word Labs  •  wordlabs.app  •  Root: 'pend' = to hang, hang down</a:t>
+              <a:t>Word Labs  •  wordlabs.app  •  Root: 'pend' = hang, hang down, weigh</a:t>
             </a:r>
             <a:endParaRPr lang="en-US" sz="800" dirty="0"/>
           </a:p>
@@ -20999,7 +20658,7 @@
                 <a:ea typeface="Trebuchet MS" pitchFamily="34" charset="-122"/>
                 <a:cs typeface="Trebuchet MS" pitchFamily="34" charset="-120"/>
               </a:rPr>
-              <a:t>impending</a:t>
+              <a:t>depend</a:t>
             </a:r>
             <a:endParaRPr lang="en-US" sz="2800" dirty="0"/>
           </a:p>
@@ -21079,7 +20738,7 @@
         </p:nvSpPr>
         <p:spPr>
           <a:xfrm>
-            <a:off x="2221992" y="2258568"/>
+            <a:off x="2938272" y="2258568"/>
             <a:ext cx="1828800" cy="292608"/>
           </a:xfrm>
           <a:prstGeom prst="rect">
@@ -21113,7 +20772,7 @@
         </p:nvSpPr>
         <p:spPr>
           <a:xfrm>
-            <a:off x="2221992" y="2258568"/>
+            <a:off x="2938272" y="2258568"/>
             <a:ext cx="1828800" cy="292608"/>
           </a:xfrm>
           <a:prstGeom prst="rect">
@@ -21138,7 +20797,7 @@
                 <a:ea typeface="Trebuchet MS" pitchFamily="34" charset="-122"/>
                 <a:cs typeface="Trebuchet MS" pitchFamily="34" charset="-120"/>
               </a:rPr>
-              <a:t>im</a:t>
+              <a:t>de</a:t>
             </a:r>
             <a:endParaRPr lang="en-US" sz="1300" dirty="0"/>
           </a:p>
@@ -21152,7 +20811,7 @@
         </p:nvSpPr>
         <p:spPr>
           <a:xfrm>
-            <a:off x="2221992" y="2569464"/>
+            <a:off x="2938272" y="2569464"/>
             <a:ext cx="1828800" cy="201168"/>
           </a:xfrm>
           <a:prstGeom prst="rect">
@@ -21177,7 +20836,7 @@
                 <a:ea typeface="Calibri" pitchFamily="34" charset="-122"/>
                 <a:cs typeface="Calibri" pitchFamily="34" charset="-120"/>
               </a:rPr>
-              <a:t>into, upon</a:t>
+              <a:t>down, from</a:t>
             </a:r>
             <a:endParaRPr lang="en-US" sz="850" dirty="0"/>
           </a:p>
@@ -21185,52 +20844,13 @@
       </p:sp>
       <p:sp>
         <p:nvSpPr>
-          <p:cNvPr id="19" name="Text 17"/>
-          <p:cNvSpPr/>
-          <p:nvPr/>
-        </p:nvSpPr>
-        <p:spPr>
-          <a:xfrm>
-            <a:off x="2221992" y="2752344"/>
-            <a:ext cx="1828800" cy="182880"/>
-          </a:xfrm>
-          <a:prstGeom prst="rect">
-            <a:avLst/>
-          </a:prstGeom>
-          <a:noFill/>
-          <a:ln/>
-        </p:spPr>
-        <p:txBody>
-          <a:bodyPr wrap="square" lIns="0" tIns="0" rIns="0" bIns="0" rtlCol="0" anchor="t"/>
-          <a:lstStyle/>
-          <a:p>
-            <a:pPr algn="ctr" indent="0" marL="0">
-              <a:buNone/>
-            </a:pPr>
-            <a:r>
-              <a:rPr lang="en-US" sz="700" i="1" dirty="0">
-                <a:solidFill>
-                  <a:srgbClr val="94A3B8"/>
-                </a:solidFill>
-                <a:latin typeface="Calibri" pitchFamily="34" charset="0"/>
-                <a:ea typeface="Calibri" pitchFamily="34" charset="-122"/>
-                <a:cs typeface="Calibri" pitchFamily="34" charset="-120"/>
-              </a:rPr>
-              <a:t>in → im before 'p'</a:t>
-            </a:r>
-            <a:endParaRPr lang="en-US" sz="700" dirty="0"/>
-          </a:p>
-        </p:txBody>
-      </p:sp>
-      <p:sp>
-        <p:nvSpPr>
-          <p:cNvPr id="20" name="Shape 18"/>
-          <p:cNvSpPr/>
-          <p:nvPr/>
-        </p:nvSpPr>
-        <p:spPr>
-          <a:xfrm>
-            <a:off x="4370832" y="2258568"/>
+          <p:cNvPr id="19" name="Shape 17"/>
+          <p:cNvSpPr/>
+          <p:nvPr/>
+        </p:nvSpPr>
+        <p:spPr>
+          <a:xfrm>
+            <a:off x="5803392" y="2258568"/>
             <a:ext cx="1828800" cy="292608"/>
           </a:xfrm>
           <a:prstGeom prst="rect">
@@ -21258,13 +20878,13 @@
       </p:sp>
       <p:sp>
         <p:nvSpPr>
-          <p:cNvPr id="21" name="Text 19"/>
-          <p:cNvSpPr/>
-          <p:nvPr/>
-        </p:nvSpPr>
-        <p:spPr>
-          <a:xfrm>
-            <a:off x="4370832" y="2258568"/>
+          <p:cNvPr id="20" name="Text 18"/>
+          <p:cNvSpPr/>
+          <p:nvPr/>
+        </p:nvSpPr>
+        <p:spPr>
+          <a:xfrm>
+            <a:off x="5803392" y="2258568"/>
             <a:ext cx="1828800" cy="292608"/>
           </a:xfrm>
           <a:prstGeom prst="rect">
@@ -21297,13 +20917,13 @@
       </p:sp>
       <p:sp>
         <p:nvSpPr>
-          <p:cNvPr id="22" name="Text 20"/>
-          <p:cNvSpPr/>
-          <p:nvPr/>
-        </p:nvSpPr>
-        <p:spPr>
-          <a:xfrm>
-            <a:off x="4370832" y="2569464"/>
+          <p:cNvPr id="21" name="Text 19"/>
+          <p:cNvSpPr/>
+          <p:nvPr/>
+        </p:nvSpPr>
+        <p:spPr>
+          <a:xfrm>
+            <a:off x="5803392" y="2569464"/>
             <a:ext cx="1828800" cy="201168"/>
           </a:xfrm>
           <a:prstGeom prst="rect">
@@ -21328,7 +20948,7 @@
                 <a:ea typeface="Calibri" pitchFamily="34" charset="-122"/>
                 <a:cs typeface="Calibri" pitchFamily="34" charset="-120"/>
               </a:rPr>
-              <a:t>to hang</a:t>
+              <a:t>hang</a:t>
             </a:r>
             <a:endParaRPr lang="en-US" sz="850" dirty="0"/>
           </a:p>
@@ -21336,126 +20956,80 @@
       </p:sp>
       <p:sp>
         <p:nvSpPr>
-          <p:cNvPr id="23" name="Shape 21"/>
-          <p:cNvSpPr/>
-          <p:nvPr/>
-        </p:nvSpPr>
-        <p:spPr>
-          <a:xfrm>
-            <a:off x="6519672" y="2258568"/>
-            <a:ext cx="1828800" cy="292608"/>
+          <p:cNvPr id="22" name="Shape 20"/>
+          <p:cNvSpPr/>
+          <p:nvPr/>
+        </p:nvSpPr>
+        <p:spPr>
+          <a:xfrm>
+            <a:off x="365760" y="3273552"/>
+            <a:ext cx="1371600" cy="658368"/>
           </a:xfrm>
           <a:prstGeom prst="rect">
             <a:avLst>
-              <a:gd name="adj" fmla="val 25000"/>
+              <a:gd name="adj" fmla="val 8333"/>
             </a:avLst>
           </a:prstGeom>
           <a:solidFill>
-            <a:srgbClr val="FCE7F3"/>
-          </a:solidFill>
-          <a:ln w="19050">
-            <a:solidFill>
-              <a:srgbClr val="DB2777"/>
-            </a:solidFill>
-            <a:prstDash val="solid"/>
-          </a:ln>
-          <a:effectLst>
-            <a:outerShdw sx="100000" sy="100000" kx="0" ky="0" algn="bl" rotWithShape="0" blurRad="101600" dist="38100" dir="8100000">
-              <a:srgbClr val="000000">
-                <a:alpha val="12000"/>
-              </a:srgbClr>
-            </a:outerShdw>
-          </a:effectLst>
-        </p:spPr>
-      </p:sp>
-      <p:sp>
-        <p:nvSpPr>
-          <p:cNvPr id="24" name="Text 22"/>
-          <p:cNvSpPr/>
-          <p:nvPr/>
-        </p:nvSpPr>
-        <p:spPr>
-          <a:xfrm>
-            <a:off x="6519672" y="2258568"/>
-            <a:ext cx="1828800" cy="292608"/>
-          </a:xfrm>
-          <a:prstGeom prst="rect">
-            <a:avLst/>
-          </a:prstGeom>
-          <a:noFill/>
-          <a:ln/>
-        </p:spPr>
-        <p:txBody>
-          <a:bodyPr wrap="square" lIns="0" tIns="0" rIns="0" bIns="0" rtlCol="0" anchor="ctr"/>
-          <a:lstStyle/>
-          <a:p>
-            <a:pPr algn="ctr" indent="0" marL="0">
-              <a:buNone/>
-            </a:pPr>
-            <a:r>
-              <a:rPr lang="en-US" sz="1300" b="1" dirty="0">
-                <a:solidFill>
-                  <a:srgbClr val="9D174D"/>
+            <a:srgbClr val="E2E8F0"/>
+          </a:solidFill>
+          <a:ln w="12700">
+            <a:solidFill>
+              <a:srgbClr val="E2E8F0"/>
+            </a:solidFill>
+            <a:prstDash val="solid"/>
+          </a:ln>
+        </p:spPr>
+      </p:sp>
+      <p:sp>
+        <p:nvSpPr>
+          <p:cNvPr id="23" name="Text 21"/>
+          <p:cNvSpPr/>
+          <p:nvPr/>
+        </p:nvSpPr>
+        <p:spPr>
+          <a:xfrm>
+            <a:off x="365760" y="3273552"/>
+            <a:ext cx="1371600" cy="658368"/>
+          </a:xfrm>
+          <a:prstGeom prst="rect">
+            <a:avLst/>
+          </a:prstGeom>
+          <a:noFill/>
+          <a:ln/>
+        </p:spPr>
+        <p:txBody>
+          <a:bodyPr wrap="square" lIns="0" tIns="0" rIns="0" bIns="0" rtlCol="0" anchor="ctr"/>
+          <a:lstStyle/>
+          <a:p>
+            <a:pPr algn="ctr" indent="0" marL="0">
+              <a:buNone/>
+            </a:pPr>
+            <a:r>
+              <a:rPr lang="en-US" sz="1100" b="1" dirty="0">
+                <a:solidFill>
+                  <a:srgbClr val="475569"/>
                 </a:solidFill>
                 <a:latin typeface="Trebuchet MS" pitchFamily="34" charset="0"/>
                 <a:ea typeface="Trebuchet MS" pitchFamily="34" charset="-122"/>
                 <a:cs typeface="Trebuchet MS" pitchFamily="34" charset="-120"/>
               </a:rPr>
-              <a:t>ing</a:t>
-            </a:r>
-            <a:endParaRPr lang="en-US" sz="1300" dirty="0"/>
-          </a:p>
-        </p:txBody>
-      </p:sp>
-      <p:sp>
-        <p:nvSpPr>
-          <p:cNvPr id="25" name="Text 23"/>
-          <p:cNvSpPr/>
-          <p:nvPr/>
-        </p:nvSpPr>
-        <p:spPr>
-          <a:xfrm>
-            <a:off x="6519672" y="2569464"/>
-            <a:ext cx="1828800" cy="201168"/>
-          </a:xfrm>
-          <a:prstGeom prst="rect">
-            <a:avLst/>
-          </a:prstGeom>
-          <a:noFill/>
-          <a:ln/>
-        </p:spPr>
-        <p:txBody>
-          <a:bodyPr wrap="square" lIns="0" tIns="0" rIns="0" bIns="0" rtlCol="0" anchor="t"/>
-          <a:lstStyle/>
-          <a:p>
-            <a:pPr algn="ctr" indent="0" marL="0">
-              <a:buNone/>
-            </a:pPr>
-            <a:r>
-              <a:rPr lang="en-US" sz="850" dirty="0">
-                <a:solidFill>
-                  <a:srgbClr val="475569"/>
-                </a:solidFill>
-                <a:latin typeface="Calibri" pitchFamily="34" charset="0"/>
-                <a:ea typeface="Calibri" pitchFamily="34" charset="-122"/>
-                <a:cs typeface="Calibri" pitchFamily="34" charset="-120"/>
-              </a:rPr>
-              <a:t>ongoing action or state</a:t>
-            </a:r>
-            <a:endParaRPr lang="en-US" sz="850" dirty="0"/>
-          </a:p>
-        </p:txBody>
-      </p:sp>
-      <p:sp>
-        <p:nvSpPr>
-          <p:cNvPr id="26" name="Shape 24"/>
-          <p:cNvSpPr/>
-          <p:nvPr/>
-        </p:nvSpPr>
-        <p:spPr>
-          <a:xfrm>
-            <a:off x="365760" y="3273552"/>
-            <a:ext cx="1371600" cy="658368"/>
+              <a:t>Syllables</a:t>
+            </a:r>
+            <a:endParaRPr lang="en-US" sz="1100" dirty="0"/>
+          </a:p>
+        </p:txBody>
+      </p:sp>
+      <p:sp>
+        <p:nvSpPr>
+          <p:cNvPr id="24" name="Shape 22"/>
+          <p:cNvSpPr/>
+          <p:nvPr/>
+        </p:nvSpPr>
+        <p:spPr>
+          <a:xfrm>
+            <a:off x="1874520" y="3273552"/>
+            <a:ext cx="6903720" cy="658368"/>
           </a:xfrm>
           <a:prstGeom prst="rect">
             <a:avLst>
@@ -21463,50 +21037,248 @@
             </a:avLst>
           </a:prstGeom>
           <a:solidFill>
-            <a:srgbClr val="E2E8F0"/>
-          </a:solidFill>
-          <a:ln w="12700">
-            <a:solidFill>
-              <a:srgbClr val="E2E8F0"/>
-            </a:solidFill>
-            <a:prstDash val="solid"/>
-          </a:ln>
-        </p:spPr>
-      </p:sp>
-      <p:sp>
-        <p:nvSpPr>
-          <p:cNvPr id="27" name="Text 25"/>
-          <p:cNvSpPr/>
-          <p:nvPr/>
-        </p:nvSpPr>
-        <p:spPr>
-          <a:xfrm>
-            <a:off x="365760" y="3273552"/>
-            <a:ext cx="1371600" cy="658368"/>
-          </a:xfrm>
-          <a:prstGeom prst="rect">
-            <a:avLst/>
-          </a:prstGeom>
-          <a:noFill/>
-          <a:ln/>
-        </p:spPr>
-        <p:txBody>
-          <a:bodyPr wrap="square" lIns="0" tIns="0" rIns="0" bIns="0" rtlCol="0" anchor="ctr"/>
-          <a:lstStyle/>
-          <a:p>
-            <a:pPr algn="ctr" indent="0" marL="0">
-              <a:buNone/>
-            </a:pPr>
-            <a:r>
-              <a:rPr lang="en-US" sz="1100" b="1" dirty="0">
-                <a:solidFill>
-                  <a:srgbClr val="475569"/>
+            <a:srgbClr val="CCFBF1"/>
+          </a:solidFill>
+          <a:ln w="12700">
+            <a:solidFill>
+              <a:srgbClr val="0D9488"/>
+            </a:solidFill>
+            <a:prstDash val="solid"/>
+          </a:ln>
+        </p:spPr>
+      </p:sp>
+      <p:sp>
+        <p:nvSpPr>
+          <p:cNvPr id="25" name="Shape 23"/>
+          <p:cNvSpPr/>
+          <p:nvPr/>
+        </p:nvSpPr>
+        <p:spPr>
+          <a:xfrm>
+            <a:off x="2999232" y="3364992"/>
+            <a:ext cx="1645920" cy="475488"/>
+          </a:xfrm>
+          <a:prstGeom prst="rect">
+            <a:avLst>
+              <a:gd name="adj" fmla="val 9615"/>
+            </a:avLst>
+          </a:prstGeom>
+          <a:solidFill>
+            <a:srgbClr val="FFFFFF"/>
+          </a:solidFill>
+          <a:ln w="12700">
+            <a:solidFill>
+              <a:srgbClr val="0D9488"/>
+            </a:solidFill>
+            <a:prstDash val="solid"/>
+          </a:ln>
+        </p:spPr>
+      </p:sp>
+      <p:sp>
+        <p:nvSpPr>
+          <p:cNvPr id="26" name="Text 24"/>
+          <p:cNvSpPr/>
+          <p:nvPr/>
+        </p:nvSpPr>
+        <p:spPr>
+          <a:xfrm>
+            <a:off x="2999232" y="3364992"/>
+            <a:ext cx="1645920" cy="475488"/>
+          </a:xfrm>
+          <a:prstGeom prst="rect">
+            <a:avLst/>
+          </a:prstGeom>
+          <a:noFill/>
+          <a:ln/>
+        </p:spPr>
+        <p:txBody>
+          <a:bodyPr wrap="square" lIns="0" tIns="0" rIns="0" bIns="0" rtlCol="0" anchor="ctr"/>
+          <a:lstStyle/>
+          <a:p>
+            <a:pPr algn="ctr" indent="0" marL="0">
+              <a:buNone/>
+            </a:pPr>
+            <a:r>
+              <a:rPr lang="en-US" sz="1400" b="1" dirty="0">
+                <a:solidFill>
+                  <a:srgbClr val="0D9488"/>
                 </a:solidFill>
                 <a:latin typeface="Trebuchet MS" pitchFamily="34" charset="0"/>
                 <a:ea typeface="Trebuchet MS" pitchFamily="34" charset="-122"/>
                 <a:cs typeface="Trebuchet MS" pitchFamily="34" charset="-120"/>
               </a:rPr>
-              <a:t>Syllables</a:t>
+              <a:t>de</a:t>
+            </a:r>
+            <a:endParaRPr lang="en-US" sz="1400" dirty="0"/>
+          </a:p>
+        </p:txBody>
+      </p:sp>
+      <p:sp>
+        <p:nvSpPr>
+          <p:cNvPr id="27" name="Text 25"/>
+          <p:cNvSpPr/>
+          <p:nvPr/>
+        </p:nvSpPr>
+        <p:spPr>
+          <a:xfrm>
+            <a:off x="4645152" y="3364992"/>
+            <a:ext cx="1097280" cy="475488"/>
+          </a:xfrm>
+          <a:prstGeom prst="rect">
+            <a:avLst/>
+          </a:prstGeom>
+          <a:noFill/>
+          <a:ln/>
+        </p:spPr>
+        <p:txBody>
+          <a:bodyPr wrap="square" lIns="0" tIns="0" rIns="0" bIns="0" rtlCol="0" anchor="ctr"/>
+          <a:lstStyle/>
+          <a:p>
+            <a:pPr algn="ctr" indent="0" marL="0">
+              <a:buNone/>
+            </a:pPr>
+            <a:r>
+              <a:rPr lang="en-US" sz="1600" b="1" dirty="0">
+                <a:solidFill>
+                  <a:srgbClr val="0D9488"/>
+                </a:solidFill>
+                <a:latin typeface="Trebuchet MS" pitchFamily="34" charset="0"/>
+                <a:ea typeface="Trebuchet MS" pitchFamily="34" charset="-122"/>
+                <a:cs typeface="Trebuchet MS" pitchFamily="34" charset="-120"/>
+              </a:rPr>
+              <a:t>·</a:t>
+            </a:r>
+            <a:endParaRPr lang="en-US" sz="1600" dirty="0"/>
+          </a:p>
+        </p:txBody>
+      </p:sp>
+      <p:sp>
+        <p:nvSpPr>
+          <p:cNvPr id="28" name="Shape 26"/>
+          <p:cNvSpPr/>
+          <p:nvPr/>
+        </p:nvSpPr>
+        <p:spPr>
+          <a:xfrm>
+            <a:off x="5742432" y="3364992"/>
+            <a:ext cx="1645920" cy="475488"/>
+          </a:xfrm>
+          <a:prstGeom prst="rect">
+            <a:avLst>
+              <a:gd name="adj" fmla="val 9615"/>
+            </a:avLst>
+          </a:prstGeom>
+          <a:solidFill>
+            <a:srgbClr val="FFFFFF"/>
+          </a:solidFill>
+          <a:ln w="12700">
+            <a:solidFill>
+              <a:srgbClr val="0D9488"/>
+            </a:solidFill>
+            <a:prstDash val="solid"/>
+          </a:ln>
+        </p:spPr>
+      </p:sp>
+      <p:sp>
+        <p:nvSpPr>
+          <p:cNvPr id="29" name="Text 27"/>
+          <p:cNvSpPr/>
+          <p:nvPr/>
+        </p:nvSpPr>
+        <p:spPr>
+          <a:xfrm>
+            <a:off x="5742432" y="3364992"/>
+            <a:ext cx="1645920" cy="475488"/>
+          </a:xfrm>
+          <a:prstGeom prst="rect">
+            <a:avLst/>
+          </a:prstGeom>
+          <a:noFill/>
+          <a:ln/>
+        </p:spPr>
+        <p:txBody>
+          <a:bodyPr wrap="square" lIns="0" tIns="0" rIns="0" bIns="0" rtlCol="0" anchor="ctr"/>
+          <a:lstStyle/>
+          <a:p>
+            <a:pPr algn="ctr" indent="0" marL="0">
+              <a:buNone/>
+            </a:pPr>
+            <a:r>
+              <a:rPr lang="en-US" sz="1400" b="1" dirty="0">
+                <a:solidFill>
+                  <a:srgbClr val="0D9488"/>
+                </a:solidFill>
+                <a:latin typeface="Trebuchet MS" pitchFamily="34" charset="0"/>
+                <a:ea typeface="Trebuchet MS" pitchFamily="34" charset="-122"/>
+                <a:cs typeface="Trebuchet MS" pitchFamily="34" charset="-120"/>
+              </a:rPr>
+              <a:t>pend</a:t>
+            </a:r>
+            <a:endParaRPr lang="en-US" sz="1400" dirty="0"/>
+          </a:p>
+        </p:txBody>
+      </p:sp>
+      <p:sp>
+        <p:nvSpPr>
+          <p:cNvPr id="30" name="Shape 28"/>
+          <p:cNvSpPr/>
+          <p:nvPr/>
+        </p:nvSpPr>
+        <p:spPr>
+          <a:xfrm>
+            <a:off x="365760" y="4096512"/>
+            <a:ext cx="1371600" cy="804672"/>
+          </a:xfrm>
+          <a:prstGeom prst="rect">
+            <a:avLst>
+              <a:gd name="adj" fmla="val 6818"/>
+            </a:avLst>
+          </a:prstGeom>
+          <a:solidFill>
+            <a:srgbClr val="E2E8F0"/>
+          </a:solidFill>
+          <a:ln w="12700">
+            <a:solidFill>
+              <a:srgbClr val="E2E8F0"/>
+            </a:solidFill>
+            <a:prstDash val="solid"/>
+          </a:ln>
+        </p:spPr>
+      </p:sp>
+      <p:sp>
+        <p:nvSpPr>
+          <p:cNvPr id="31" name="Text 29"/>
+          <p:cNvSpPr/>
+          <p:nvPr/>
+        </p:nvSpPr>
+        <p:spPr>
+          <a:xfrm>
+            <a:off x="365760" y="4096512"/>
+            <a:ext cx="1371600" cy="804672"/>
+          </a:xfrm>
+          <a:prstGeom prst="rect">
+            <a:avLst/>
+          </a:prstGeom>
+          <a:noFill/>
+          <a:ln/>
+        </p:spPr>
+        <p:txBody>
+          <a:bodyPr wrap="square" lIns="0" tIns="0" rIns="0" bIns="0" rtlCol="0" anchor="ctr"/>
+          <a:lstStyle/>
+          <a:p>
+            <a:pPr algn="ctr" indent="0" marL="0">
+              <a:buNone/>
+            </a:pPr>
+            <a:r>
+              <a:rPr lang="en-US" sz="1100" b="1" dirty="0">
+                <a:solidFill>
+                  <a:srgbClr val="475569"/>
+                </a:solidFill>
+                <a:latin typeface="Trebuchet MS" pitchFamily="34" charset="0"/>
+                <a:ea typeface="Trebuchet MS" pitchFamily="34" charset="-122"/>
+                <a:cs typeface="Trebuchet MS" pitchFamily="34" charset="-120"/>
+              </a:rPr>
+              <a:t>Phonemes</a:t>
             </a:r>
             <a:endParaRPr lang="en-US" sz="1100" dirty="0"/>
           </a:p>
@@ -21514,13 +21286,13 @@
       </p:sp>
       <p:sp>
         <p:nvSpPr>
-          <p:cNvPr id="28" name="Shape 26"/>
-          <p:cNvSpPr/>
-          <p:nvPr/>
-        </p:nvSpPr>
-        <p:spPr>
-          <a:xfrm>
-            <a:off x="1874520" y="3273552"/>
+          <p:cNvPr id="32" name="Shape 30"/>
+          <p:cNvSpPr/>
+          <p:nvPr/>
+        </p:nvSpPr>
+        <p:spPr>
+          <a:xfrm>
+            <a:off x="1874520" y="4096512"/>
             <a:ext cx="6903720" cy="658368"/>
           </a:xfrm>
           <a:prstGeom prst="rect">
@@ -21529,30 +21301,30 @@
             </a:avLst>
           </a:prstGeom>
           <a:solidFill>
-            <a:srgbClr val="CCFBF1"/>
-          </a:solidFill>
-          <a:ln w="12700">
-            <a:solidFill>
-              <a:srgbClr val="0D9488"/>
-            </a:solidFill>
-            <a:prstDash val="solid"/>
-          </a:ln>
-        </p:spPr>
-      </p:sp>
-      <p:sp>
-        <p:nvSpPr>
-          <p:cNvPr id="29" name="Shape 27"/>
-          <p:cNvSpPr/>
-          <p:nvPr/>
-        </p:nvSpPr>
-        <p:spPr>
-          <a:xfrm>
-            <a:off x="2313432" y="3364992"/>
-            <a:ext cx="1645920" cy="475488"/>
+            <a:srgbClr val="FCE7F3"/>
+          </a:solidFill>
+          <a:ln w="12700">
+            <a:solidFill>
+              <a:srgbClr val="DB2777"/>
+            </a:solidFill>
+            <a:prstDash val="solid"/>
+          </a:ln>
+        </p:spPr>
+      </p:sp>
+      <p:sp>
+        <p:nvSpPr>
+          <p:cNvPr id="33" name="Shape 31"/>
+          <p:cNvSpPr/>
+          <p:nvPr/>
+        </p:nvSpPr>
+        <p:spPr>
+          <a:xfrm>
+            <a:off x="2427732" y="4169664"/>
+            <a:ext cx="685800" cy="475488"/>
           </a:xfrm>
           <a:prstGeom prst="rect">
             <a:avLst>
-              <a:gd name="adj" fmla="val 9615"/>
+              <a:gd name="adj" fmla="val 7692"/>
             </a:avLst>
           </a:prstGeom>
           <a:solidFill>
@@ -21560,104 +21332,131 @@
           </a:solidFill>
           <a:ln w="12700">
             <a:solidFill>
-              <a:srgbClr val="0D9488"/>
-            </a:solidFill>
-            <a:prstDash val="solid"/>
-          </a:ln>
-        </p:spPr>
-      </p:sp>
-      <p:sp>
-        <p:nvSpPr>
-          <p:cNvPr id="30" name="Text 28"/>
-          <p:cNvSpPr/>
-          <p:nvPr/>
-        </p:nvSpPr>
-        <p:spPr>
-          <a:xfrm>
-            <a:off x="2313432" y="3364992"/>
-            <a:ext cx="1645920" cy="475488"/>
-          </a:xfrm>
-          <a:prstGeom prst="rect">
-            <a:avLst/>
-          </a:prstGeom>
-          <a:noFill/>
-          <a:ln/>
-        </p:spPr>
-        <p:txBody>
-          <a:bodyPr wrap="square" lIns="0" tIns="0" rIns="0" bIns="0" rtlCol="0" anchor="ctr"/>
-          <a:lstStyle/>
-          <a:p>
-            <a:pPr algn="ctr" indent="0" marL="0">
-              <a:buNone/>
-            </a:pPr>
-            <a:r>
-              <a:rPr lang="en-US" sz="1400" b="1" dirty="0">
-                <a:solidFill>
-                  <a:srgbClr val="0D9488"/>
+              <a:srgbClr val="DB2777"/>
+            </a:solidFill>
+            <a:prstDash val="solid"/>
+          </a:ln>
+        </p:spPr>
+      </p:sp>
+      <p:sp>
+        <p:nvSpPr>
+          <p:cNvPr id="34" name="Text 32"/>
+          <p:cNvSpPr/>
+          <p:nvPr/>
+        </p:nvSpPr>
+        <p:spPr>
+          <a:xfrm>
+            <a:off x="2427732" y="4169664"/>
+            <a:ext cx="685800" cy="475488"/>
+          </a:xfrm>
+          <a:prstGeom prst="rect">
+            <a:avLst/>
+          </a:prstGeom>
+          <a:noFill/>
+          <a:ln/>
+        </p:spPr>
+        <p:txBody>
+          <a:bodyPr wrap="square" lIns="0" tIns="0" rIns="0" bIns="0" rtlCol="0" anchor="ctr"/>
+          <a:lstStyle/>
+          <a:p>
+            <a:pPr algn="ctr" indent="0" marL="0">
+              <a:buNone/>
+            </a:pPr>
+            <a:r>
+              <a:rPr lang="en-US" sz="900" b="1" dirty="0">
+                <a:solidFill>
+                  <a:srgbClr val="9D174D"/>
                 </a:solidFill>
                 <a:latin typeface="Trebuchet MS" pitchFamily="34" charset="0"/>
                 <a:ea typeface="Trebuchet MS" pitchFamily="34" charset="-122"/>
                 <a:cs typeface="Trebuchet MS" pitchFamily="34" charset="-120"/>
               </a:rPr>
-              <a:t>im</a:t>
-            </a:r>
-            <a:endParaRPr lang="en-US" sz="1400" dirty="0"/>
-          </a:p>
-        </p:txBody>
-      </p:sp>
-      <p:sp>
-        <p:nvSpPr>
-          <p:cNvPr id="31" name="Text 29"/>
-          <p:cNvSpPr/>
-          <p:nvPr/>
-        </p:nvSpPr>
-        <p:spPr>
-          <a:xfrm>
-            <a:off x="3959352" y="3364992"/>
-            <a:ext cx="411480" cy="475488"/>
-          </a:xfrm>
-          <a:prstGeom prst="rect">
-            <a:avLst/>
-          </a:prstGeom>
-          <a:noFill/>
-          <a:ln/>
-        </p:spPr>
-        <p:txBody>
-          <a:bodyPr wrap="square" lIns="0" tIns="0" rIns="0" bIns="0" rtlCol="0" anchor="ctr"/>
-          <a:lstStyle/>
-          <a:p>
-            <a:pPr algn="ctr" indent="0" marL="0">
-              <a:buNone/>
-            </a:pPr>
-            <a:r>
-              <a:rPr lang="en-US" sz="1600" b="1" dirty="0">
-                <a:solidFill>
-                  <a:srgbClr val="0D9488"/>
+              <a:t>d</a:t>
+            </a:r>
+            <a:endParaRPr lang="en-US" sz="900" dirty="0"/>
+          </a:p>
+        </p:txBody>
+      </p:sp>
+      <p:sp>
+        <p:nvSpPr>
+          <p:cNvPr id="35" name="Shape 33"/>
+          <p:cNvSpPr/>
+          <p:nvPr/>
+        </p:nvSpPr>
+        <p:spPr>
+          <a:xfrm>
+            <a:off x="3639312" y="4169664"/>
+            <a:ext cx="685800" cy="475488"/>
+          </a:xfrm>
+          <a:prstGeom prst="rect">
+            <a:avLst>
+              <a:gd name="adj" fmla="val 7692"/>
+            </a:avLst>
+          </a:prstGeom>
+          <a:solidFill>
+            <a:srgbClr val="FFFFFF"/>
+          </a:solidFill>
+          <a:ln w="12700">
+            <a:solidFill>
+              <a:srgbClr val="DB2777"/>
+            </a:solidFill>
+            <a:prstDash val="solid"/>
+          </a:ln>
+        </p:spPr>
+      </p:sp>
+      <p:sp>
+        <p:nvSpPr>
+          <p:cNvPr id="36" name="Text 34"/>
+          <p:cNvSpPr/>
+          <p:nvPr/>
+        </p:nvSpPr>
+        <p:spPr>
+          <a:xfrm>
+            <a:off x="3639312" y="4169664"/>
+            <a:ext cx="685800" cy="475488"/>
+          </a:xfrm>
+          <a:prstGeom prst="rect">
+            <a:avLst/>
+          </a:prstGeom>
+          <a:noFill/>
+          <a:ln/>
+        </p:spPr>
+        <p:txBody>
+          <a:bodyPr wrap="square" lIns="0" tIns="0" rIns="0" bIns="0" rtlCol="0" anchor="ctr"/>
+          <a:lstStyle/>
+          <a:p>
+            <a:pPr algn="ctr" indent="0" marL="0">
+              <a:buNone/>
+            </a:pPr>
+            <a:r>
+              <a:rPr lang="en-US" sz="900" b="1" dirty="0">
+                <a:solidFill>
+                  <a:srgbClr val="9D174D"/>
                 </a:solidFill>
                 <a:latin typeface="Trebuchet MS" pitchFamily="34" charset="0"/>
                 <a:ea typeface="Trebuchet MS" pitchFamily="34" charset="-122"/>
                 <a:cs typeface="Trebuchet MS" pitchFamily="34" charset="-120"/>
               </a:rPr>
-              <a:t>·</a:t>
-            </a:r>
-            <a:endParaRPr lang="en-US" sz="1600" dirty="0"/>
-          </a:p>
-        </p:txBody>
-      </p:sp>
-      <p:sp>
-        <p:nvSpPr>
-          <p:cNvPr id="32" name="Shape 30"/>
-          <p:cNvSpPr/>
-          <p:nvPr/>
-        </p:nvSpPr>
-        <p:spPr>
-          <a:xfrm>
-            <a:off x="4370832" y="3364992"/>
-            <a:ext cx="1645920" cy="475488"/>
+              <a:t>e</a:t>
+            </a:r>
+            <a:endParaRPr lang="en-US" sz="900" dirty="0"/>
+          </a:p>
+        </p:txBody>
+      </p:sp>
+      <p:sp>
+        <p:nvSpPr>
+          <p:cNvPr id="37" name="Shape 35"/>
+          <p:cNvSpPr/>
+          <p:nvPr/>
+        </p:nvSpPr>
+        <p:spPr>
+          <a:xfrm>
+            <a:off x="4850892" y="4169664"/>
+            <a:ext cx="685800" cy="475488"/>
           </a:xfrm>
           <a:prstGeom prst="rect">
             <a:avLst>
-              <a:gd name="adj" fmla="val 9615"/>
+              <a:gd name="adj" fmla="val 7692"/>
             </a:avLst>
           </a:prstGeom>
           <a:solidFill>
@@ -21665,104 +21464,131 @@
           </a:solidFill>
           <a:ln w="12700">
             <a:solidFill>
-              <a:srgbClr val="0D9488"/>
-            </a:solidFill>
-            <a:prstDash val="solid"/>
-          </a:ln>
-        </p:spPr>
-      </p:sp>
-      <p:sp>
-        <p:nvSpPr>
-          <p:cNvPr id="33" name="Text 31"/>
-          <p:cNvSpPr/>
-          <p:nvPr/>
-        </p:nvSpPr>
-        <p:spPr>
-          <a:xfrm>
-            <a:off x="4370832" y="3364992"/>
-            <a:ext cx="1645920" cy="475488"/>
-          </a:xfrm>
-          <a:prstGeom prst="rect">
-            <a:avLst/>
-          </a:prstGeom>
-          <a:noFill/>
-          <a:ln/>
-        </p:spPr>
-        <p:txBody>
-          <a:bodyPr wrap="square" lIns="0" tIns="0" rIns="0" bIns="0" rtlCol="0" anchor="ctr"/>
-          <a:lstStyle/>
-          <a:p>
-            <a:pPr algn="ctr" indent="0" marL="0">
-              <a:buNone/>
-            </a:pPr>
-            <a:r>
-              <a:rPr lang="en-US" sz="1400" b="1" dirty="0">
-                <a:solidFill>
-                  <a:srgbClr val="0D9488"/>
+              <a:srgbClr val="DB2777"/>
+            </a:solidFill>
+            <a:prstDash val="solid"/>
+          </a:ln>
+        </p:spPr>
+      </p:sp>
+      <p:sp>
+        <p:nvSpPr>
+          <p:cNvPr id="38" name="Text 36"/>
+          <p:cNvSpPr/>
+          <p:nvPr/>
+        </p:nvSpPr>
+        <p:spPr>
+          <a:xfrm>
+            <a:off x="4850892" y="4169664"/>
+            <a:ext cx="685800" cy="475488"/>
+          </a:xfrm>
+          <a:prstGeom prst="rect">
+            <a:avLst/>
+          </a:prstGeom>
+          <a:noFill/>
+          <a:ln/>
+        </p:spPr>
+        <p:txBody>
+          <a:bodyPr wrap="square" lIns="0" tIns="0" rIns="0" bIns="0" rtlCol="0" anchor="ctr"/>
+          <a:lstStyle/>
+          <a:p>
+            <a:pPr algn="ctr" indent="0" marL="0">
+              <a:buNone/>
+            </a:pPr>
+            <a:r>
+              <a:rPr lang="en-US" sz="900" b="1" dirty="0">
+                <a:solidFill>
+                  <a:srgbClr val="9D174D"/>
                 </a:solidFill>
                 <a:latin typeface="Trebuchet MS" pitchFamily="34" charset="0"/>
                 <a:ea typeface="Trebuchet MS" pitchFamily="34" charset="-122"/>
                 <a:cs typeface="Trebuchet MS" pitchFamily="34" charset="-120"/>
               </a:rPr>
-              <a:t>pend</a:t>
-            </a:r>
-            <a:endParaRPr lang="en-US" sz="1400" dirty="0"/>
-          </a:p>
-        </p:txBody>
-      </p:sp>
-      <p:sp>
-        <p:nvSpPr>
-          <p:cNvPr id="34" name="Text 32"/>
-          <p:cNvSpPr/>
-          <p:nvPr/>
-        </p:nvSpPr>
-        <p:spPr>
-          <a:xfrm>
-            <a:off x="6016752" y="3364992"/>
-            <a:ext cx="411480" cy="475488"/>
-          </a:xfrm>
-          <a:prstGeom prst="rect">
-            <a:avLst/>
-          </a:prstGeom>
-          <a:noFill/>
-          <a:ln/>
-        </p:spPr>
-        <p:txBody>
-          <a:bodyPr wrap="square" lIns="0" tIns="0" rIns="0" bIns="0" rtlCol="0" anchor="ctr"/>
-          <a:lstStyle/>
-          <a:p>
-            <a:pPr algn="ctr" indent="0" marL="0">
-              <a:buNone/>
-            </a:pPr>
-            <a:r>
-              <a:rPr lang="en-US" sz="1600" b="1" dirty="0">
-                <a:solidFill>
-                  <a:srgbClr val="0D9488"/>
+              <a:t>p</a:t>
+            </a:r>
+            <a:endParaRPr lang="en-US" sz="900" dirty="0"/>
+          </a:p>
+        </p:txBody>
+      </p:sp>
+      <p:sp>
+        <p:nvSpPr>
+          <p:cNvPr id="39" name="Shape 37"/>
+          <p:cNvSpPr/>
+          <p:nvPr/>
+        </p:nvSpPr>
+        <p:spPr>
+          <a:xfrm>
+            <a:off x="6062472" y="4169664"/>
+            <a:ext cx="685800" cy="475488"/>
+          </a:xfrm>
+          <a:prstGeom prst="rect">
+            <a:avLst>
+              <a:gd name="adj" fmla="val 7692"/>
+            </a:avLst>
+          </a:prstGeom>
+          <a:solidFill>
+            <a:srgbClr val="FFFFFF"/>
+          </a:solidFill>
+          <a:ln w="12700">
+            <a:solidFill>
+              <a:srgbClr val="DB2777"/>
+            </a:solidFill>
+            <a:prstDash val="solid"/>
+          </a:ln>
+        </p:spPr>
+      </p:sp>
+      <p:sp>
+        <p:nvSpPr>
+          <p:cNvPr id="40" name="Text 38"/>
+          <p:cNvSpPr/>
+          <p:nvPr/>
+        </p:nvSpPr>
+        <p:spPr>
+          <a:xfrm>
+            <a:off x="6062472" y="4169664"/>
+            <a:ext cx="685800" cy="475488"/>
+          </a:xfrm>
+          <a:prstGeom prst="rect">
+            <a:avLst/>
+          </a:prstGeom>
+          <a:noFill/>
+          <a:ln/>
+        </p:spPr>
+        <p:txBody>
+          <a:bodyPr wrap="square" lIns="0" tIns="0" rIns="0" bIns="0" rtlCol="0" anchor="ctr"/>
+          <a:lstStyle/>
+          <a:p>
+            <a:pPr algn="ctr" indent="0" marL="0">
+              <a:buNone/>
+            </a:pPr>
+            <a:r>
+              <a:rPr lang="en-US" sz="900" b="1" dirty="0">
+                <a:solidFill>
+                  <a:srgbClr val="9D174D"/>
                 </a:solidFill>
                 <a:latin typeface="Trebuchet MS" pitchFamily="34" charset="0"/>
                 <a:ea typeface="Trebuchet MS" pitchFamily="34" charset="-122"/>
                 <a:cs typeface="Trebuchet MS" pitchFamily="34" charset="-120"/>
               </a:rPr>
-              <a:t>·</a:t>
-            </a:r>
-            <a:endParaRPr lang="en-US" sz="1600" dirty="0"/>
-          </a:p>
-        </p:txBody>
-      </p:sp>
-      <p:sp>
-        <p:nvSpPr>
-          <p:cNvPr id="35" name="Shape 33"/>
-          <p:cNvSpPr/>
-          <p:nvPr/>
-        </p:nvSpPr>
-        <p:spPr>
-          <a:xfrm>
-            <a:off x="6428232" y="3364992"/>
-            <a:ext cx="1645920" cy="475488"/>
+              <a:t>e</a:t>
+            </a:r>
+            <a:endParaRPr lang="en-US" sz="900" dirty="0"/>
+          </a:p>
+        </p:txBody>
+      </p:sp>
+      <p:sp>
+        <p:nvSpPr>
+          <p:cNvPr id="41" name="Shape 39"/>
+          <p:cNvSpPr/>
+          <p:nvPr/>
+        </p:nvSpPr>
+        <p:spPr>
+          <a:xfrm>
+            <a:off x="7274052" y="4169664"/>
+            <a:ext cx="685800" cy="475488"/>
           </a:xfrm>
           <a:prstGeom prst="rect">
             <a:avLst>
-              <a:gd name="adj" fmla="val 9615"/>
+              <a:gd name="adj" fmla="val 7692"/>
             </a:avLst>
           </a:prstGeom>
           <a:solidFill>
@@ -21770,601 +21596,46 @@
           </a:solidFill>
           <a:ln w="12700">
             <a:solidFill>
-              <a:srgbClr val="0D9488"/>
-            </a:solidFill>
-            <a:prstDash val="solid"/>
-          </a:ln>
-        </p:spPr>
-      </p:sp>
-      <p:sp>
-        <p:nvSpPr>
-          <p:cNvPr id="36" name="Text 34"/>
-          <p:cNvSpPr/>
-          <p:nvPr/>
-        </p:nvSpPr>
-        <p:spPr>
-          <a:xfrm>
-            <a:off x="6428232" y="3364992"/>
-            <a:ext cx="1645920" cy="475488"/>
-          </a:xfrm>
-          <a:prstGeom prst="rect">
-            <a:avLst/>
-          </a:prstGeom>
-          <a:noFill/>
-          <a:ln/>
-        </p:spPr>
-        <p:txBody>
-          <a:bodyPr wrap="square" lIns="0" tIns="0" rIns="0" bIns="0" rtlCol="0" anchor="ctr"/>
-          <a:lstStyle/>
-          <a:p>
-            <a:pPr algn="ctr" indent="0" marL="0">
-              <a:buNone/>
-            </a:pPr>
-            <a:r>
-              <a:rPr lang="en-US" sz="1400" b="1" dirty="0">
-                <a:solidFill>
-                  <a:srgbClr val="0D9488"/>
+              <a:srgbClr val="DB2777"/>
+            </a:solidFill>
+            <a:prstDash val="solid"/>
+          </a:ln>
+        </p:spPr>
+      </p:sp>
+      <p:sp>
+        <p:nvSpPr>
+          <p:cNvPr id="42" name="Text 40"/>
+          <p:cNvSpPr/>
+          <p:nvPr/>
+        </p:nvSpPr>
+        <p:spPr>
+          <a:xfrm>
+            <a:off x="7274052" y="4169664"/>
+            <a:ext cx="685800" cy="475488"/>
+          </a:xfrm>
+          <a:prstGeom prst="rect">
+            <a:avLst/>
+          </a:prstGeom>
+          <a:noFill/>
+          <a:ln/>
+        </p:spPr>
+        <p:txBody>
+          <a:bodyPr wrap="square" lIns="0" tIns="0" rIns="0" bIns="0" rtlCol="0" anchor="ctr"/>
+          <a:lstStyle/>
+          <a:p>
+            <a:pPr algn="ctr" indent="0" marL="0">
+              <a:buNone/>
+            </a:pPr>
+            <a:r>
+              <a:rPr lang="en-US" sz="900" b="1" dirty="0">
+                <a:solidFill>
+                  <a:srgbClr val="9D174D"/>
                 </a:solidFill>
                 <a:latin typeface="Trebuchet MS" pitchFamily="34" charset="0"/>
                 <a:ea typeface="Trebuchet MS" pitchFamily="34" charset="-122"/>
                 <a:cs typeface="Trebuchet MS" pitchFamily="34" charset="-120"/>
               </a:rPr>
-              <a:t>ing</a:t>
-            </a:r>
-            <a:endParaRPr lang="en-US" sz="1400" dirty="0"/>
-          </a:p>
-        </p:txBody>
-      </p:sp>
-      <p:sp>
-        <p:nvSpPr>
-          <p:cNvPr id="37" name="Shape 35"/>
-          <p:cNvSpPr/>
-          <p:nvPr/>
-        </p:nvSpPr>
-        <p:spPr>
-          <a:xfrm>
-            <a:off x="365760" y="4096512"/>
-            <a:ext cx="1371600" cy="804672"/>
-          </a:xfrm>
-          <a:prstGeom prst="rect">
-            <a:avLst>
-              <a:gd name="adj" fmla="val 6818"/>
-            </a:avLst>
-          </a:prstGeom>
-          <a:solidFill>
-            <a:srgbClr val="E2E8F0"/>
-          </a:solidFill>
-          <a:ln w="12700">
-            <a:solidFill>
-              <a:srgbClr val="E2E8F0"/>
-            </a:solidFill>
-            <a:prstDash val="solid"/>
-          </a:ln>
-        </p:spPr>
-      </p:sp>
-      <p:sp>
-        <p:nvSpPr>
-          <p:cNvPr id="38" name="Text 36"/>
-          <p:cNvSpPr/>
-          <p:nvPr/>
-        </p:nvSpPr>
-        <p:spPr>
-          <a:xfrm>
-            <a:off x="365760" y="4096512"/>
-            <a:ext cx="1371600" cy="804672"/>
-          </a:xfrm>
-          <a:prstGeom prst="rect">
-            <a:avLst/>
-          </a:prstGeom>
-          <a:noFill/>
-          <a:ln/>
-        </p:spPr>
-        <p:txBody>
-          <a:bodyPr wrap="square" lIns="0" tIns="0" rIns="0" bIns="0" rtlCol="0" anchor="ctr"/>
-          <a:lstStyle/>
-          <a:p>
-            <a:pPr algn="ctr" indent="0" marL="0">
-              <a:buNone/>
-            </a:pPr>
-            <a:r>
-              <a:rPr lang="en-US" sz="1100" b="1" dirty="0">
-                <a:solidFill>
-                  <a:srgbClr val="475569"/>
-                </a:solidFill>
-                <a:latin typeface="Trebuchet MS" pitchFamily="34" charset="0"/>
-                <a:ea typeface="Trebuchet MS" pitchFamily="34" charset="-122"/>
-                <a:cs typeface="Trebuchet MS" pitchFamily="34" charset="-120"/>
-              </a:rPr>
-              <a:t>Phonemes</a:t>
-            </a:r>
-            <a:endParaRPr lang="en-US" sz="1100" dirty="0"/>
-          </a:p>
-        </p:txBody>
-      </p:sp>
-      <p:sp>
-        <p:nvSpPr>
-          <p:cNvPr id="39" name="Shape 37"/>
-          <p:cNvSpPr/>
-          <p:nvPr/>
-        </p:nvSpPr>
-        <p:spPr>
-          <a:xfrm>
-            <a:off x="1874520" y="4096512"/>
-            <a:ext cx="6903720" cy="658368"/>
-          </a:xfrm>
-          <a:prstGeom prst="rect">
-            <a:avLst>
-              <a:gd name="adj" fmla="val 8333"/>
-            </a:avLst>
-          </a:prstGeom>
-          <a:solidFill>
-            <a:srgbClr val="FCE7F3"/>
-          </a:solidFill>
-          <a:ln w="12700">
-            <a:solidFill>
-              <a:srgbClr val="DB2777"/>
-            </a:solidFill>
-            <a:prstDash val="solid"/>
-          </a:ln>
-        </p:spPr>
-      </p:sp>
-      <p:sp>
-        <p:nvSpPr>
-          <p:cNvPr id="40" name="Shape 38"/>
-          <p:cNvSpPr/>
-          <p:nvPr/>
-        </p:nvSpPr>
-        <p:spPr>
-          <a:xfrm>
-            <a:off x="2124837" y="4169664"/>
-            <a:ext cx="685800" cy="475488"/>
-          </a:xfrm>
-          <a:prstGeom prst="rect">
-            <a:avLst>
-              <a:gd name="adj" fmla="val 7692"/>
-            </a:avLst>
-          </a:prstGeom>
-          <a:solidFill>
-            <a:srgbClr val="FFFFFF"/>
-          </a:solidFill>
-          <a:ln w="12700">
-            <a:solidFill>
-              <a:srgbClr val="DB2777"/>
-            </a:solidFill>
-            <a:prstDash val="solid"/>
-          </a:ln>
-        </p:spPr>
-      </p:sp>
-      <p:sp>
-        <p:nvSpPr>
-          <p:cNvPr id="41" name="Text 39"/>
-          <p:cNvSpPr/>
-          <p:nvPr/>
-        </p:nvSpPr>
-        <p:spPr>
-          <a:xfrm>
-            <a:off x="2124837" y="4169664"/>
-            <a:ext cx="685800" cy="475488"/>
-          </a:xfrm>
-          <a:prstGeom prst="rect">
-            <a:avLst/>
-          </a:prstGeom>
-          <a:noFill/>
-          <a:ln/>
-        </p:spPr>
-        <p:txBody>
-          <a:bodyPr wrap="square" lIns="0" tIns="0" rIns="0" bIns="0" rtlCol="0" anchor="ctr"/>
-          <a:lstStyle/>
-          <a:p>
-            <a:pPr algn="ctr" indent="0" marL="0">
-              <a:buNone/>
-            </a:pPr>
-            <a:r>
-              <a:rPr lang="en-US" sz="900" b="1" dirty="0">
-                <a:solidFill>
-                  <a:srgbClr val="9D174D"/>
-                </a:solidFill>
-                <a:latin typeface="Trebuchet MS" pitchFamily="34" charset="0"/>
-                <a:ea typeface="Trebuchet MS" pitchFamily="34" charset="-122"/>
-                <a:cs typeface="Trebuchet MS" pitchFamily="34" charset="-120"/>
-              </a:rPr>
-              <a:t>i</a:t>
-            </a:r>
-            <a:endParaRPr lang="en-US" sz="900" dirty="0"/>
-          </a:p>
-        </p:txBody>
-      </p:sp>
-      <p:sp>
-        <p:nvSpPr>
-          <p:cNvPr id="42" name="Shape 40"/>
-          <p:cNvSpPr/>
-          <p:nvPr/>
-        </p:nvSpPr>
-        <p:spPr>
-          <a:xfrm>
-            <a:off x="3033522" y="4169664"/>
-            <a:ext cx="685800" cy="475488"/>
-          </a:xfrm>
-          <a:prstGeom prst="rect">
-            <a:avLst>
-              <a:gd name="adj" fmla="val 7692"/>
-            </a:avLst>
-          </a:prstGeom>
-          <a:solidFill>
-            <a:srgbClr val="FFFFFF"/>
-          </a:solidFill>
-          <a:ln w="12700">
-            <a:solidFill>
-              <a:srgbClr val="DB2777"/>
-            </a:solidFill>
-            <a:prstDash val="solid"/>
-          </a:ln>
-        </p:spPr>
-      </p:sp>
-      <p:sp>
-        <p:nvSpPr>
-          <p:cNvPr id="43" name="Text 41"/>
-          <p:cNvSpPr/>
-          <p:nvPr/>
-        </p:nvSpPr>
-        <p:spPr>
-          <a:xfrm>
-            <a:off x="3033522" y="4169664"/>
-            <a:ext cx="685800" cy="475488"/>
-          </a:xfrm>
-          <a:prstGeom prst="rect">
-            <a:avLst/>
-          </a:prstGeom>
-          <a:noFill/>
-          <a:ln/>
-        </p:spPr>
-        <p:txBody>
-          <a:bodyPr wrap="square" lIns="0" tIns="0" rIns="0" bIns="0" rtlCol="0" anchor="ctr"/>
-          <a:lstStyle/>
-          <a:p>
-            <a:pPr algn="ctr" indent="0" marL="0">
-              <a:buNone/>
-            </a:pPr>
-            <a:r>
-              <a:rPr lang="en-US" sz="900" b="1" dirty="0">
-                <a:solidFill>
-                  <a:srgbClr val="9D174D"/>
-                </a:solidFill>
-                <a:latin typeface="Trebuchet MS" pitchFamily="34" charset="0"/>
-                <a:ea typeface="Trebuchet MS" pitchFamily="34" charset="-122"/>
-                <a:cs typeface="Trebuchet MS" pitchFamily="34" charset="-120"/>
-              </a:rPr>
-              <a:t>m</a:t>
-            </a:r>
-            <a:endParaRPr lang="en-US" sz="900" dirty="0"/>
-          </a:p>
-        </p:txBody>
-      </p:sp>
-      <p:sp>
-        <p:nvSpPr>
-          <p:cNvPr id="44" name="Shape 42"/>
-          <p:cNvSpPr/>
-          <p:nvPr/>
-        </p:nvSpPr>
-        <p:spPr>
-          <a:xfrm>
-            <a:off x="3942207" y="4169664"/>
-            <a:ext cx="685800" cy="475488"/>
-          </a:xfrm>
-          <a:prstGeom prst="rect">
-            <a:avLst>
-              <a:gd name="adj" fmla="val 7692"/>
-            </a:avLst>
-          </a:prstGeom>
-          <a:solidFill>
-            <a:srgbClr val="FFFFFF"/>
-          </a:solidFill>
-          <a:ln w="12700">
-            <a:solidFill>
-              <a:srgbClr val="DB2777"/>
-            </a:solidFill>
-            <a:prstDash val="solid"/>
-          </a:ln>
-        </p:spPr>
-      </p:sp>
-      <p:sp>
-        <p:nvSpPr>
-          <p:cNvPr id="45" name="Text 43"/>
-          <p:cNvSpPr/>
-          <p:nvPr/>
-        </p:nvSpPr>
-        <p:spPr>
-          <a:xfrm>
-            <a:off x="3942207" y="4169664"/>
-            <a:ext cx="685800" cy="475488"/>
-          </a:xfrm>
-          <a:prstGeom prst="rect">
-            <a:avLst/>
-          </a:prstGeom>
-          <a:noFill/>
-          <a:ln/>
-        </p:spPr>
-        <p:txBody>
-          <a:bodyPr wrap="square" lIns="0" tIns="0" rIns="0" bIns="0" rtlCol="0" anchor="ctr"/>
-          <a:lstStyle/>
-          <a:p>
-            <a:pPr algn="ctr" indent="0" marL="0">
-              <a:buNone/>
-            </a:pPr>
-            <a:r>
-              <a:rPr lang="en-US" sz="900" b="1" dirty="0">
-                <a:solidFill>
-                  <a:srgbClr val="9D174D"/>
-                </a:solidFill>
-                <a:latin typeface="Trebuchet MS" pitchFamily="34" charset="0"/>
-                <a:ea typeface="Trebuchet MS" pitchFamily="34" charset="-122"/>
-                <a:cs typeface="Trebuchet MS" pitchFamily="34" charset="-120"/>
-              </a:rPr>
-              <a:t>p</a:t>
-            </a:r>
-            <a:endParaRPr lang="en-US" sz="900" dirty="0"/>
-          </a:p>
-        </p:txBody>
-      </p:sp>
-      <p:sp>
-        <p:nvSpPr>
-          <p:cNvPr id="46" name="Shape 44"/>
-          <p:cNvSpPr/>
-          <p:nvPr/>
-        </p:nvSpPr>
-        <p:spPr>
-          <a:xfrm>
-            <a:off x="4850892" y="4169664"/>
-            <a:ext cx="685800" cy="475488"/>
-          </a:xfrm>
-          <a:prstGeom prst="rect">
-            <a:avLst>
-              <a:gd name="adj" fmla="val 7692"/>
-            </a:avLst>
-          </a:prstGeom>
-          <a:solidFill>
-            <a:srgbClr val="FFFFFF"/>
-          </a:solidFill>
-          <a:ln w="12700">
-            <a:solidFill>
-              <a:srgbClr val="DB2777"/>
-            </a:solidFill>
-            <a:prstDash val="solid"/>
-          </a:ln>
-        </p:spPr>
-      </p:sp>
-      <p:sp>
-        <p:nvSpPr>
-          <p:cNvPr id="47" name="Text 45"/>
-          <p:cNvSpPr/>
-          <p:nvPr/>
-        </p:nvSpPr>
-        <p:spPr>
-          <a:xfrm>
-            <a:off x="4850892" y="4169664"/>
-            <a:ext cx="685800" cy="475488"/>
-          </a:xfrm>
-          <a:prstGeom prst="rect">
-            <a:avLst/>
-          </a:prstGeom>
-          <a:noFill/>
-          <a:ln/>
-        </p:spPr>
-        <p:txBody>
-          <a:bodyPr wrap="square" lIns="0" tIns="0" rIns="0" bIns="0" rtlCol="0" anchor="ctr"/>
-          <a:lstStyle/>
-          <a:p>
-            <a:pPr algn="ctr" indent="0" marL="0">
-              <a:buNone/>
-            </a:pPr>
-            <a:r>
-              <a:rPr lang="en-US" sz="900" b="1" dirty="0">
-                <a:solidFill>
-                  <a:srgbClr val="9D174D"/>
-                </a:solidFill>
-                <a:latin typeface="Trebuchet MS" pitchFamily="34" charset="0"/>
-                <a:ea typeface="Trebuchet MS" pitchFamily="34" charset="-122"/>
-                <a:cs typeface="Trebuchet MS" pitchFamily="34" charset="-120"/>
-              </a:rPr>
-              <a:t>e</a:t>
-            </a:r>
-            <a:endParaRPr lang="en-US" sz="900" dirty="0"/>
-          </a:p>
-        </p:txBody>
-      </p:sp>
-      <p:sp>
-        <p:nvSpPr>
-          <p:cNvPr id="48" name="Shape 46"/>
-          <p:cNvSpPr/>
-          <p:nvPr/>
-        </p:nvSpPr>
-        <p:spPr>
-          <a:xfrm>
-            <a:off x="5759577" y="4169664"/>
-            <a:ext cx="685800" cy="475488"/>
-          </a:xfrm>
-          <a:prstGeom prst="rect">
-            <a:avLst>
-              <a:gd name="adj" fmla="val 7692"/>
-            </a:avLst>
-          </a:prstGeom>
-          <a:solidFill>
-            <a:srgbClr val="FFFFFF"/>
-          </a:solidFill>
-          <a:ln w="12700">
-            <a:solidFill>
-              <a:srgbClr val="DB2777"/>
-            </a:solidFill>
-            <a:prstDash val="solid"/>
-          </a:ln>
-        </p:spPr>
-      </p:sp>
-      <p:sp>
-        <p:nvSpPr>
-          <p:cNvPr id="49" name="Text 47"/>
-          <p:cNvSpPr/>
-          <p:nvPr/>
-        </p:nvSpPr>
-        <p:spPr>
-          <a:xfrm>
-            <a:off x="5759577" y="4169664"/>
-            <a:ext cx="685800" cy="475488"/>
-          </a:xfrm>
-          <a:prstGeom prst="rect">
-            <a:avLst/>
-          </a:prstGeom>
-          <a:noFill/>
-          <a:ln/>
-        </p:spPr>
-        <p:txBody>
-          <a:bodyPr wrap="square" lIns="0" tIns="0" rIns="0" bIns="0" rtlCol="0" anchor="ctr"/>
-          <a:lstStyle/>
-          <a:p>
-            <a:pPr algn="ctr" indent="0" marL="0">
-              <a:buNone/>
-            </a:pPr>
-            <a:r>
-              <a:rPr lang="en-US" sz="900" b="1" dirty="0">
-                <a:solidFill>
-                  <a:srgbClr val="9D174D"/>
-                </a:solidFill>
-                <a:latin typeface="Trebuchet MS" pitchFamily="34" charset="0"/>
-                <a:ea typeface="Trebuchet MS" pitchFamily="34" charset="-122"/>
-                <a:cs typeface="Trebuchet MS" pitchFamily="34" charset="-120"/>
-              </a:rPr>
               <a:t>nd</a:t>
-            </a:r>
-            <a:endParaRPr lang="en-US" sz="900" dirty="0"/>
-          </a:p>
-        </p:txBody>
-      </p:sp>
-      <p:sp>
-        <p:nvSpPr>
-          <p:cNvPr id="50" name="Shape 48"/>
-          <p:cNvSpPr/>
-          <p:nvPr/>
-        </p:nvSpPr>
-        <p:spPr>
-          <a:xfrm>
-            <a:off x="6668262" y="4169664"/>
-            <a:ext cx="685800" cy="475488"/>
-          </a:xfrm>
-          <a:prstGeom prst="rect">
-            <a:avLst>
-              <a:gd name="adj" fmla="val 7692"/>
-            </a:avLst>
-          </a:prstGeom>
-          <a:solidFill>
-            <a:srgbClr val="FFFFFF"/>
-          </a:solidFill>
-          <a:ln w="12700">
-            <a:solidFill>
-              <a:srgbClr val="DB2777"/>
-            </a:solidFill>
-            <a:prstDash val="solid"/>
-          </a:ln>
-        </p:spPr>
-      </p:sp>
-      <p:sp>
-        <p:nvSpPr>
-          <p:cNvPr id="51" name="Text 49"/>
-          <p:cNvSpPr/>
-          <p:nvPr/>
-        </p:nvSpPr>
-        <p:spPr>
-          <a:xfrm>
-            <a:off x="6668262" y="4169664"/>
-            <a:ext cx="685800" cy="475488"/>
-          </a:xfrm>
-          <a:prstGeom prst="rect">
-            <a:avLst/>
-          </a:prstGeom>
-          <a:noFill/>
-          <a:ln/>
-        </p:spPr>
-        <p:txBody>
-          <a:bodyPr wrap="square" lIns="0" tIns="0" rIns="0" bIns="0" rtlCol="0" anchor="ctr"/>
-          <a:lstStyle/>
-          <a:p>
-            <a:pPr algn="ctr" indent="0" marL="0">
-              <a:buNone/>
-            </a:pPr>
-            <a:r>
-              <a:rPr lang="en-US" sz="900" b="1" dirty="0">
-                <a:solidFill>
-                  <a:srgbClr val="9D174D"/>
-                </a:solidFill>
-                <a:latin typeface="Trebuchet MS" pitchFamily="34" charset="0"/>
-                <a:ea typeface="Trebuchet MS" pitchFamily="34" charset="-122"/>
-                <a:cs typeface="Trebuchet MS" pitchFamily="34" charset="-120"/>
-              </a:rPr>
-              <a:t>i</a:t>
-            </a:r>
-            <a:endParaRPr lang="en-US" sz="900" dirty="0"/>
-          </a:p>
-        </p:txBody>
-      </p:sp>
-      <p:sp>
-        <p:nvSpPr>
-          <p:cNvPr id="52" name="Shape 50"/>
-          <p:cNvSpPr/>
-          <p:nvPr/>
-        </p:nvSpPr>
-        <p:spPr>
-          <a:xfrm>
-            <a:off x="7576947" y="4169664"/>
-            <a:ext cx="685800" cy="475488"/>
-          </a:xfrm>
-          <a:prstGeom prst="rect">
-            <a:avLst>
-              <a:gd name="adj" fmla="val 7692"/>
-            </a:avLst>
-          </a:prstGeom>
-          <a:solidFill>
-            <a:srgbClr val="FFFFFF"/>
-          </a:solidFill>
-          <a:ln w="12700">
-            <a:solidFill>
-              <a:srgbClr val="DB2777"/>
-            </a:solidFill>
-            <a:prstDash val="solid"/>
-          </a:ln>
-        </p:spPr>
-      </p:sp>
-      <p:sp>
-        <p:nvSpPr>
-          <p:cNvPr id="53" name="Text 51"/>
-          <p:cNvSpPr/>
-          <p:nvPr/>
-        </p:nvSpPr>
-        <p:spPr>
-          <a:xfrm>
-            <a:off x="7576947" y="4169664"/>
-            <a:ext cx="685800" cy="475488"/>
-          </a:xfrm>
-          <a:prstGeom prst="rect">
-            <a:avLst/>
-          </a:prstGeom>
-          <a:noFill/>
-          <a:ln/>
-        </p:spPr>
-        <p:txBody>
-          <a:bodyPr wrap="square" lIns="0" tIns="0" rIns="0" bIns="0" rtlCol="0" anchor="ctr"/>
-          <a:lstStyle/>
-          <a:p>
-            <a:pPr algn="ctr" indent="0" marL="0">
-              <a:buNone/>
-            </a:pPr>
-            <a:r>
-              <a:rPr lang="en-US" sz="900" b="1" dirty="0">
-                <a:solidFill>
-                  <a:srgbClr val="9D174D"/>
-                </a:solidFill>
-                <a:latin typeface="Trebuchet MS" pitchFamily="34" charset="0"/>
-                <a:ea typeface="Trebuchet MS" pitchFamily="34" charset="-122"/>
-                <a:cs typeface="Trebuchet MS" pitchFamily="34" charset="-120"/>
-              </a:rPr>
-              <a:t>ng</a:t>
             </a:r>
             <a:endParaRPr lang="en-US" sz="900" dirty="0"/>
           </a:p>
@@ -22656,7 +21927,7 @@
                 <a:ea typeface="Calibri" pitchFamily="34" charset="-122"/>
                 <a:cs typeface="Calibri" pitchFamily="34" charset="-120"/>
               </a:rPr>
-              <a:t>Word Labs  •  wordlabs.app  •  Root: 'pend' = to hang, hang down</a:t>
+              <a:t>Word Labs  •  wordlabs.app  •  Root: 'pend' = hang, hang down, weigh</a:t>
             </a:r>
             <a:endParaRPr lang="en-US" sz="800" dirty="0"/>
           </a:p>
@@ -22795,7 +22066,7 @@
                 <a:ea typeface="Trebuchet MS" pitchFamily="34" charset="-122"/>
                 <a:cs typeface="Trebuchet MS" pitchFamily="34" charset="-120"/>
               </a:rPr>
-              <a:t>dependent</a:t>
+              <a:t>independent</a:t>
             </a:r>
             <a:endParaRPr lang="en-US" sz="2800" dirty="0"/>
           </a:p>
@@ -23483,7 +22754,7 @@
                 <a:ea typeface="Calibri" pitchFamily="34" charset="-122"/>
                 <a:cs typeface="Calibri" pitchFamily="34" charset="-120"/>
               </a:rPr>
-              <a:t>Word Labs  •  wordlabs.app  •  Root: 'pend' = to hang, hang down</a:t>
+              <a:t>Word Labs  •  wordlabs.app  •  Root: 'pend' = hang, hang down, weigh</a:t>
             </a:r>
             <a:endParaRPr lang="en-US" sz="800" dirty="0"/>
           </a:p>
@@ -23622,7 +22893,7 @@
                 <a:ea typeface="Trebuchet MS" pitchFamily="34" charset="-122"/>
                 <a:cs typeface="Trebuchet MS" pitchFamily="34" charset="-120"/>
               </a:rPr>
-              <a:t>dependent</a:t>
+              <a:t>independent</a:t>
             </a:r>
             <a:endParaRPr lang="en-US" sz="2800" dirty="0"/>
           </a:p>
@@ -23702,8 +22973,8 @@
         </p:nvSpPr>
         <p:spPr>
           <a:xfrm>
-            <a:off x="2221992" y="2258568"/>
-            <a:ext cx="1828800" cy="292608"/>
+            <a:off x="1989734" y="2258568"/>
+            <a:ext cx="1581912" cy="292608"/>
           </a:xfrm>
           <a:prstGeom prst="rect">
             <a:avLst>
@@ -23736,8 +23007,8 @@
         </p:nvSpPr>
         <p:spPr>
           <a:xfrm>
-            <a:off x="2221992" y="2258568"/>
-            <a:ext cx="1828800" cy="292608"/>
+            <a:off x="1989734" y="2258568"/>
+            <a:ext cx="1581912" cy="292608"/>
           </a:xfrm>
           <a:prstGeom prst="rect">
             <a:avLst/>
@@ -23761,7 +23032,7 @@
                 <a:ea typeface="Trebuchet MS" pitchFamily="34" charset="-122"/>
                 <a:cs typeface="Trebuchet MS" pitchFamily="34" charset="-120"/>
               </a:rPr>
-              <a:t>de</a:t>
+              <a:t>in</a:t>
             </a:r>
             <a:endParaRPr lang="en-US" sz="1300" dirty="0"/>
           </a:p>
@@ -23775,8 +23046,8 @@
         </p:nvSpPr>
         <p:spPr>
           <a:xfrm>
-            <a:off x="2221992" y="2569464"/>
-            <a:ext cx="1828800" cy="201168"/>
+            <a:off x="1989734" y="2569464"/>
+            <a:ext cx="1581912" cy="201168"/>
           </a:xfrm>
           <a:prstGeom prst="rect">
             <a:avLst/>
@@ -23800,7 +23071,7 @@
                 <a:ea typeface="Calibri" pitchFamily="34" charset="-122"/>
                 <a:cs typeface="Calibri" pitchFamily="34" charset="-120"/>
               </a:rPr>
-              <a:t>down, from</a:t>
+              <a:t>not</a:t>
             </a:r>
             <a:endParaRPr lang="en-US" sz="850" dirty="0"/>
           </a:p>
@@ -23814,8 +23085,8 @@
         </p:nvSpPr>
         <p:spPr>
           <a:xfrm>
-            <a:off x="4370832" y="2258568"/>
-            <a:ext cx="1828800" cy="292608"/>
+            <a:off x="3659429" y="2258568"/>
+            <a:ext cx="1581912" cy="292608"/>
           </a:xfrm>
           <a:prstGeom prst="rect">
             <a:avLst>
@@ -23823,11 +23094,11 @@
             </a:avLst>
           </a:prstGeom>
           <a:solidFill>
-            <a:srgbClr val="CCFBF1"/>
+            <a:srgbClr val="FCE7F3"/>
           </a:solidFill>
           <a:ln w="19050">
             <a:solidFill>
-              <a:srgbClr val="0D9488"/>
+              <a:srgbClr val="DB2777"/>
             </a:solidFill>
             <a:prstDash val="solid"/>
           </a:ln>
@@ -23848,8 +23119,8 @@
         </p:nvSpPr>
         <p:spPr>
           <a:xfrm>
-            <a:off x="4370832" y="2258568"/>
-            <a:ext cx="1828800" cy="292608"/>
+            <a:off x="3659429" y="2258568"/>
+            <a:ext cx="1581912" cy="292608"/>
           </a:xfrm>
           <a:prstGeom prst="rect">
             <a:avLst/>
@@ -23867,13 +23138,13 @@
             <a:r>
               <a:rPr lang="en-US" sz="1300" b="1" dirty="0">
                 <a:solidFill>
-                  <a:srgbClr val="0F766E"/>
+                  <a:srgbClr val="9D174D"/>
                 </a:solidFill>
                 <a:latin typeface="Trebuchet MS" pitchFamily="34" charset="0"/>
                 <a:ea typeface="Trebuchet MS" pitchFamily="34" charset="-122"/>
                 <a:cs typeface="Trebuchet MS" pitchFamily="34" charset="-120"/>
               </a:rPr>
-              <a:t>pend</a:t>
+              <a:t>de</a:t>
             </a:r>
             <a:endParaRPr lang="en-US" sz="1300" dirty="0"/>
           </a:p>
@@ -23887,8 +23158,8 @@
         </p:nvSpPr>
         <p:spPr>
           <a:xfrm>
-            <a:off x="4370832" y="2569464"/>
-            <a:ext cx="1828800" cy="201168"/>
+            <a:off x="3659429" y="2569464"/>
+            <a:ext cx="1581912" cy="201168"/>
           </a:xfrm>
           <a:prstGeom prst="rect">
             <a:avLst/>
@@ -23912,7 +23183,7 @@
                 <a:ea typeface="Calibri" pitchFamily="34" charset="-122"/>
                 <a:cs typeface="Calibri" pitchFamily="34" charset="-120"/>
               </a:rPr>
-              <a:t>to hang</a:t>
+              <a:t>down, from</a:t>
             </a:r>
             <a:endParaRPr lang="en-US" sz="850" dirty="0"/>
           </a:p>
@@ -23926,8 +23197,8 @@
         </p:nvSpPr>
         <p:spPr>
           <a:xfrm>
-            <a:off x="6519672" y="2258568"/>
-            <a:ext cx="1828800" cy="292608"/>
+            <a:off x="5329123" y="2258568"/>
+            <a:ext cx="1581912" cy="292608"/>
           </a:xfrm>
           <a:prstGeom prst="rect">
             <a:avLst>
@@ -23935,11 +23206,11 @@
             </a:avLst>
           </a:prstGeom>
           <a:solidFill>
-            <a:srgbClr val="FCE7F3"/>
+            <a:srgbClr val="CCFBF1"/>
           </a:solidFill>
           <a:ln w="19050">
             <a:solidFill>
-              <a:srgbClr val="DB2777"/>
+              <a:srgbClr val="0D9488"/>
             </a:solidFill>
             <a:prstDash val="solid"/>
           </a:ln>
@@ -23960,8 +23231,8 @@
         </p:nvSpPr>
         <p:spPr>
           <a:xfrm>
-            <a:off x="6519672" y="2258568"/>
-            <a:ext cx="1828800" cy="292608"/>
+            <a:off x="5329123" y="2258568"/>
+            <a:ext cx="1581912" cy="292608"/>
           </a:xfrm>
           <a:prstGeom prst="rect">
             <a:avLst/>
@@ -23979,13 +23250,13 @@
             <a:r>
               <a:rPr lang="en-US" sz="1300" b="1" dirty="0">
                 <a:solidFill>
-                  <a:srgbClr val="9D174D"/>
+                  <a:srgbClr val="0F766E"/>
                 </a:solidFill>
                 <a:latin typeface="Trebuchet MS" pitchFamily="34" charset="0"/>
                 <a:ea typeface="Trebuchet MS" pitchFamily="34" charset="-122"/>
                 <a:cs typeface="Trebuchet MS" pitchFamily="34" charset="-120"/>
               </a:rPr>
-              <a:t>ent</a:t>
+              <a:t>pend</a:t>
             </a:r>
             <a:endParaRPr lang="en-US" sz="1300" dirty="0"/>
           </a:p>
@@ -23999,8 +23270,8 @@
         </p:nvSpPr>
         <p:spPr>
           <a:xfrm>
-            <a:off x="6519672" y="2569464"/>
-            <a:ext cx="1828800" cy="201168"/>
+            <a:off x="5329123" y="2569464"/>
+            <a:ext cx="1581912" cy="201168"/>
           </a:xfrm>
           <a:prstGeom prst="rect">
             <a:avLst/>
@@ -24024,7 +23295,7 @@
                 <a:ea typeface="Calibri" pitchFamily="34" charset="-122"/>
                 <a:cs typeface="Calibri" pitchFamily="34" charset="-120"/>
               </a:rPr>
-              <a:t>having a quality, being in a state</a:t>
+              <a:t>hang</a:t>
             </a:r>
             <a:endParaRPr lang="en-US" sz="850" dirty="0"/>
           </a:p>
@@ -24033,6 +23304,118 @@
       <p:sp>
         <p:nvSpPr>
           <p:cNvPr id="25" name="Shape 23"/>
+          <p:cNvSpPr/>
+          <p:nvPr/>
+        </p:nvSpPr>
+        <p:spPr>
+          <a:xfrm>
+            <a:off x="6998818" y="2258568"/>
+            <a:ext cx="1581912" cy="292608"/>
+          </a:xfrm>
+          <a:prstGeom prst="rect">
+            <a:avLst>
+              <a:gd name="adj" fmla="val 25000"/>
+            </a:avLst>
+          </a:prstGeom>
+          <a:solidFill>
+            <a:srgbClr val="FCE7F3"/>
+          </a:solidFill>
+          <a:ln w="19050">
+            <a:solidFill>
+              <a:srgbClr val="DB2777"/>
+            </a:solidFill>
+            <a:prstDash val="solid"/>
+          </a:ln>
+          <a:effectLst>
+            <a:outerShdw sx="100000" sy="100000" kx="0" ky="0" algn="bl" rotWithShape="0" blurRad="101600" dist="38100" dir="8100000">
+              <a:srgbClr val="000000">
+                <a:alpha val="12000"/>
+              </a:srgbClr>
+            </a:outerShdw>
+          </a:effectLst>
+        </p:spPr>
+      </p:sp>
+      <p:sp>
+        <p:nvSpPr>
+          <p:cNvPr id="26" name="Text 24"/>
+          <p:cNvSpPr/>
+          <p:nvPr/>
+        </p:nvSpPr>
+        <p:spPr>
+          <a:xfrm>
+            <a:off x="6998818" y="2258568"/>
+            <a:ext cx="1581912" cy="292608"/>
+          </a:xfrm>
+          <a:prstGeom prst="rect">
+            <a:avLst/>
+          </a:prstGeom>
+          <a:noFill/>
+          <a:ln/>
+        </p:spPr>
+        <p:txBody>
+          <a:bodyPr wrap="square" lIns="0" tIns="0" rIns="0" bIns="0" rtlCol="0" anchor="ctr"/>
+          <a:lstStyle/>
+          <a:p>
+            <a:pPr algn="ctr" indent="0" marL="0">
+              <a:buNone/>
+            </a:pPr>
+            <a:r>
+              <a:rPr lang="en-US" sz="1300" b="1" dirty="0">
+                <a:solidFill>
+                  <a:srgbClr val="9D174D"/>
+                </a:solidFill>
+                <a:latin typeface="Trebuchet MS" pitchFamily="34" charset="0"/>
+                <a:ea typeface="Trebuchet MS" pitchFamily="34" charset="-122"/>
+                <a:cs typeface="Trebuchet MS" pitchFamily="34" charset="-120"/>
+              </a:rPr>
+              <a:t>ent</a:t>
+            </a:r>
+            <a:endParaRPr lang="en-US" sz="1300" dirty="0"/>
+          </a:p>
+        </p:txBody>
+      </p:sp>
+      <p:sp>
+        <p:nvSpPr>
+          <p:cNvPr id="27" name="Text 25"/>
+          <p:cNvSpPr/>
+          <p:nvPr/>
+        </p:nvSpPr>
+        <p:spPr>
+          <a:xfrm>
+            <a:off x="6998818" y="2569464"/>
+            <a:ext cx="1581912" cy="201168"/>
+          </a:xfrm>
+          <a:prstGeom prst="rect">
+            <a:avLst/>
+          </a:prstGeom>
+          <a:noFill/>
+          <a:ln/>
+        </p:spPr>
+        <p:txBody>
+          <a:bodyPr wrap="square" lIns="0" tIns="0" rIns="0" bIns="0" rtlCol="0" anchor="t"/>
+          <a:lstStyle/>
+          <a:p>
+            <a:pPr algn="ctr" indent="0" marL="0">
+              <a:buNone/>
+            </a:pPr>
+            <a:r>
+              <a:rPr lang="en-US" sz="850" dirty="0">
+                <a:solidFill>
+                  <a:srgbClr val="475569"/>
+                </a:solidFill>
+                <a:latin typeface="Calibri" pitchFamily="34" charset="0"/>
+                <a:ea typeface="Calibri" pitchFamily="34" charset="-122"/>
+                <a:cs typeface="Calibri" pitchFamily="34" charset="-120"/>
+              </a:rPr>
+              <a:t>having a quality; a person who does something</a:t>
+            </a:r>
+            <a:endParaRPr lang="en-US" sz="850" dirty="0"/>
+          </a:p>
+        </p:txBody>
+      </p:sp>
+      <p:sp>
+        <p:nvSpPr>
+          <p:cNvPr id="28" name="Shape 26"/>
           <p:cNvSpPr/>
           <p:nvPr/>
         </p:nvSpPr>
@@ -24059,7 +23442,7 @@
       </p:sp>
       <p:sp>
         <p:nvSpPr>
-          <p:cNvPr id="26" name="Text 24"/>
+          <p:cNvPr id="29" name="Text 27"/>
           <p:cNvSpPr/>
           <p:nvPr/>
         </p:nvSpPr>
@@ -24098,7 +23481,7 @@
       </p:sp>
       <p:sp>
         <p:nvSpPr>
-          <p:cNvPr id="27" name="Shape 25"/>
+          <p:cNvPr id="30" name="Shape 28"/>
           <p:cNvSpPr/>
           <p:nvPr/>
         </p:nvSpPr>
@@ -24125,7 +23508,7 @@
       </p:sp>
       <p:sp>
         <p:nvSpPr>
-          <p:cNvPr id="28" name="Text 26"/>
+          <p:cNvPr id="31" name="Text 29"/>
           <p:cNvSpPr/>
           <p:nvPr/>
         </p:nvSpPr>
@@ -24164,7 +23547,7 @@
       </p:sp>
       <p:sp>
         <p:nvSpPr>
-          <p:cNvPr id="29" name="Shape 27"/>
+          <p:cNvPr id="32" name="Shape 30"/>
           <p:cNvSpPr/>
           <p:nvPr/>
         </p:nvSpPr>
@@ -24191,7 +23574,7 @@
       </p:sp>
       <p:sp>
         <p:nvSpPr>
-          <p:cNvPr id="30" name="Text 28"/>
+          <p:cNvPr id="33" name="Text 31"/>
           <p:cNvSpPr/>
           <p:nvPr/>
         </p:nvSpPr>
@@ -24230,7 +23613,7 @@
       </p:sp>
       <p:sp>
         <p:nvSpPr>
-          <p:cNvPr id="31" name="Shape 29"/>
+          <p:cNvPr id="34" name="Shape 32"/>
           <p:cNvSpPr/>
           <p:nvPr/>
         </p:nvSpPr>
@@ -24257,7 +23640,7 @@
       </p:sp>
       <p:sp>
         <p:nvSpPr>
-          <p:cNvPr id="32" name="Text 30"/>
+          <p:cNvPr id="35" name="Text 33"/>
           <p:cNvSpPr/>
           <p:nvPr/>
         </p:nvSpPr>
@@ -24580,7 +23963,7 @@
                 <a:ea typeface="Calibri" pitchFamily="34" charset="-122"/>
                 <a:cs typeface="Calibri" pitchFamily="34" charset="-120"/>
               </a:rPr>
-              <a:t>Word Labs  •  wordlabs.app  •  Root: 'pend' = to hang, hang down</a:t>
+              <a:t>Word Labs  •  wordlabs.app  •  Root: 'pend' = hang, hang down, weigh</a:t>
             </a:r>
             <a:endParaRPr lang="en-US" sz="800" dirty="0"/>
           </a:p>
@@ -24653,7 +24036,7 @@
                 <a:ea typeface="Trebuchet MS" pitchFamily="34" charset="-122"/>
                 <a:cs typeface="Trebuchet MS" pitchFamily="34" charset="-120"/>
               </a:rPr>
-              <a:t>We are learning that the root 'pend' means 'to hang, hang down'.</a:t>
+              <a:t>We are learning that the root 'pend' means 'hang, hang down, weigh'.</a:t>
             </a:r>
             <a:endParaRPr lang="en-US" sz="2000" dirty="0"/>
           </a:p>
@@ -25299,7 +24682,7 @@
                 <a:ea typeface="Calibri" pitchFamily="34" charset="-122"/>
                 <a:cs typeface="Calibri" pitchFamily="34" charset="-120"/>
               </a:rPr>
-              <a:t>Word Labs  •  wordlabs.app  •  Root: 'pend' = to hang, hang down</a:t>
+              <a:t>Word Labs  •  wordlabs.app  •  Root: 'pend' = hang, hang down, weigh</a:t>
             </a:r>
             <a:endParaRPr lang="en-US" sz="800" dirty="0"/>
           </a:p>
@@ -25438,7 +24821,7 @@
                 <a:ea typeface="Trebuchet MS" pitchFamily="34" charset="-122"/>
                 <a:cs typeface="Trebuchet MS" pitchFamily="34" charset="-120"/>
               </a:rPr>
-              <a:t>dependent</a:t>
+              <a:t>independent</a:t>
             </a:r>
             <a:endParaRPr lang="en-US" sz="2800" dirty="0"/>
           </a:p>
@@ -25518,8 +24901,8 @@
         </p:nvSpPr>
         <p:spPr>
           <a:xfrm>
-            <a:off x="2221992" y="2258568"/>
-            <a:ext cx="1828800" cy="292608"/>
+            <a:off x="1989734" y="2258568"/>
+            <a:ext cx="1581912" cy="292608"/>
           </a:xfrm>
           <a:prstGeom prst="rect">
             <a:avLst>
@@ -25552,8 +24935,8 @@
         </p:nvSpPr>
         <p:spPr>
           <a:xfrm>
-            <a:off x="2221992" y="2258568"/>
-            <a:ext cx="1828800" cy="292608"/>
+            <a:off x="1989734" y="2258568"/>
+            <a:ext cx="1581912" cy="292608"/>
           </a:xfrm>
           <a:prstGeom prst="rect">
             <a:avLst/>
@@ -25577,7 +24960,7 @@
                 <a:ea typeface="Trebuchet MS" pitchFamily="34" charset="-122"/>
                 <a:cs typeface="Trebuchet MS" pitchFamily="34" charset="-120"/>
               </a:rPr>
-              <a:t>de</a:t>
+              <a:t>in</a:t>
             </a:r>
             <a:endParaRPr lang="en-US" sz="1300" dirty="0"/>
           </a:p>
@@ -25591,8 +24974,8 @@
         </p:nvSpPr>
         <p:spPr>
           <a:xfrm>
-            <a:off x="2221992" y="2569464"/>
-            <a:ext cx="1828800" cy="201168"/>
+            <a:off x="1989734" y="2569464"/>
+            <a:ext cx="1581912" cy="201168"/>
           </a:xfrm>
           <a:prstGeom prst="rect">
             <a:avLst/>
@@ -25616,7 +24999,7 @@
                 <a:ea typeface="Calibri" pitchFamily="34" charset="-122"/>
                 <a:cs typeface="Calibri" pitchFamily="34" charset="-120"/>
               </a:rPr>
-              <a:t>down, from</a:t>
+              <a:t>not</a:t>
             </a:r>
             <a:endParaRPr lang="en-US" sz="850" dirty="0"/>
           </a:p>
@@ -25630,8 +25013,8 @@
         </p:nvSpPr>
         <p:spPr>
           <a:xfrm>
-            <a:off x="4370832" y="2258568"/>
-            <a:ext cx="1828800" cy="292608"/>
+            <a:off x="3659429" y="2258568"/>
+            <a:ext cx="1581912" cy="292608"/>
           </a:xfrm>
           <a:prstGeom prst="rect">
             <a:avLst>
@@ -25639,11 +25022,11 @@
             </a:avLst>
           </a:prstGeom>
           <a:solidFill>
-            <a:srgbClr val="CCFBF1"/>
+            <a:srgbClr val="FCE7F3"/>
           </a:solidFill>
           <a:ln w="19050">
             <a:solidFill>
-              <a:srgbClr val="0D9488"/>
+              <a:srgbClr val="DB2777"/>
             </a:solidFill>
             <a:prstDash val="solid"/>
           </a:ln>
@@ -25664,8 +25047,8 @@
         </p:nvSpPr>
         <p:spPr>
           <a:xfrm>
-            <a:off x="4370832" y="2258568"/>
-            <a:ext cx="1828800" cy="292608"/>
+            <a:off x="3659429" y="2258568"/>
+            <a:ext cx="1581912" cy="292608"/>
           </a:xfrm>
           <a:prstGeom prst="rect">
             <a:avLst/>
@@ -25683,13 +25066,13 @@
             <a:r>
               <a:rPr lang="en-US" sz="1300" b="1" dirty="0">
                 <a:solidFill>
-                  <a:srgbClr val="0F766E"/>
+                  <a:srgbClr val="9D174D"/>
                 </a:solidFill>
                 <a:latin typeface="Trebuchet MS" pitchFamily="34" charset="0"/>
                 <a:ea typeface="Trebuchet MS" pitchFamily="34" charset="-122"/>
                 <a:cs typeface="Trebuchet MS" pitchFamily="34" charset="-120"/>
               </a:rPr>
-              <a:t>pend</a:t>
+              <a:t>de</a:t>
             </a:r>
             <a:endParaRPr lang="en-US" sz="1300" dirty="0"/>
           </a:p>
@@ -25703,8 +25086,8 @@
         </p:nvSpPr>
         <p:spPr>
           <a:xfrm>
-            <a:off x="4370832" y="2569464"/>
-            <a:ext cx="1828800" cy="201168"/>
+            <a:off x="3659429" y="2569464"/>
+            <a:ext cx="1581912" cy="201168"/>
           </a:xfrm>
           <a:prstGeom prst="rect">
             <a:avLst/>
@@ -25728,7 +25111,7 @@
                 <a:ea typeface="Calibri" pitchFamily="34" charset="-122"/>
                 <a:cs typeface="Calibri" pitchFamily="34" charset="-120"/>
               </a:rPr>
-              <a:t>to hang</a:t>
+              <a:t>down, from</a:t>
             </a:r>
             <a:endParaRPr lang="en-US" sz="850" dirty="0"/>
           </a:p>
@@ -25742,8 +25125,8 @@
         </p:nvSpPr>
         <p:spPr>
           <a:xfrm>
-            <a:off x="6519672" y="2258568"/>
-            <a:ext cx="1828800" cy="292608"/>
+            <a:off x="5329123" y="2258568"/>
+            <a:ext cx="1581912" cy="292608"/>
           </a:xfrm>
           <a:prstGeom prst="rect">
             <a:avLst>
@@ -25751,11 +25134,11 @@
             </a:avLst>
           </a:prstGeom>
           <a:solidFill>
-            <a:srgbClr val="FCE7F3"/>
+            <a:srgbClr val="CCFBF1"/>
           </a:solidFill>
           <a:ln w="19050">
             <a:solidFill>
-              <a:srgbClr val="DB2777"/>
+              <a:srgbClr val="0D9488"/>
             </a:solidFill>
             <a:prstDash val="solid"/>
           </a:ln>
@@ -25776,8 +25159,8 @@
         </p:nvSpPr>
         <p:spPr>
           <a:xfrm>
-            <a:off x="6519672" y="2258568"/>
-            <a:ext cx="1828800" cy="292608"/>
+            <a:off x="5329123" y="2258568"/>
+            <a:ext cx="1581912" cy="292608"/>
           </a:xfrm>
           <a:prstGeom prst="rect">
             <a:avLst/>
@@ -25795,13 +25178,13 @@
             <a:r>
               <a:rPr lang="en-US" sz="1300" b="1" dirty="0">
                 <a:solidFill>
-                  <a:srgbClr val="9D174D"/>
+                  <a:srgbClr val="0F766E"/>
                 </a:solidFill>
                 <a:latin typeface="Trebuchet MS" pitchFamily="34" charset="0"/>
                 <a:ea typeface="Trebuchet MS" pitchFamily="34" charset="-122"/>
                 <a:cs typeface="Trebuchet MS" pitchFamily="34" charset="-120"/>
               </a:rPr>
-              <a:t>ent</a:t>
+              <a:t>pend</a:t>
             </a:r>
             <a:endParaRPr lang="en-US" sz="1300" dirty="0"/>
           </a:p>
@@ -25815,8 +25198,8 @@
         </p:nvSpPr>
         <p:spPr>
           <a:xfrm>
-            <a:off x="6519672" y="2569464"/>
-            <a:ext cx="1828800" cy="201168"/>
+            <a:off x="5329123" y="2569464"/>
+            <a:ext cx="1581912" cy="201168"/>
           </a:xfrm>
           <a:prstGeom prst="rect">
             <a:avLst/>
@@ -25840,7 +25223,7 @@
                 <a:ea typeface="Calibri" pitchFamily="34" charset="-122"/>
                 <a:cs typeface="Calibri" pitchFamily="34" charset="-120"/>
               </a:rPr>
-              <a:t>having a quality, being in a state</a:t>
+              <a:t>hang</a:t>
             </a:r>
             <a:endParaRPr lang="en-US" sz="850" dirty="0"/>
           </a:p>
@@ -25849,6 +25232,118 @@
       <p:sp>
         <p:nvSpPr>
           <p:cNvPr id="25" name="Shape 23"/>
+          <p:cNvSpPr/>
+          <p:nvPr/>
+        </p:nvSpPr>
+        <p:spPr>
+          <a:xfrm>
+            <a:off x="6998818" y="2258568"/>
+            <a:ext cx="1581912" cy="292608"/>
+          </a:xfrm>
+          <a:prstGeom prst="rect">
+            <a:avLst>
+              <a:gd name="adj" fmla="val 25000"/>
+            </a:avLst>
+          </a:prstGeom>
+          <a:solidFill>
+            <a:srgbClr val="FCE7F3"/>
+          </a:solidFill>
+          <a:ln w="19050">
+            <a:solidFill>
+              <a:srgbClr val="DB2777"/>
+            </a:solidFill>
+            <a:prstDash val="solid"/>
+          </a:ln>
+          <a:effectLst>
+            <a:outerShdw sx="100000" sy="100000" kx="0" ky="0" algn="bl" rotWithShape="0" blurRad="101600" dist="38100" dir="8100000">
+              <a:srgbClr val="000000">
+                <a:alpha val="12000"/>
+              </a:srgbClr>
+            </a:outerShdw>
+          </a:effectLst>
+        </p:spPr>
+      </p:sp>
+      <p:sp>
+        <p:nvSpPr>
+          <p:cNvPr id="26" name="Text 24"/>
+          <p:cNvSpPr/>
+          <p:nvPr/>
+        </p:nvSpPr>
+        <p:spPr>
+          <a:xfrm>
+            <a:off x="6998818" y="2258568"/>
+            <a:ext cx="1581912" cy="292608"/>
+          </a:xfrm>
+          <a:prstGeom prst="rect">
+            <a:avLst/>
+          </a:prstGeom>
+          <a:noFill/>
+          <a:ln/>
+        </p:spPr>
+        <p:txBody>
+          <a:bodyPr wrap="square" lIns="0" tIns="0" rIns="0" bIns="0" rtlCol="0" anchor="ctr"/>
+          <a:lstStyle/>
+          <a:p>
+            <a:pPr algn="ctr" indent="0" marL="0">
+              <a:buNone/>
+            </a:pPr>
+            <a:r>
+              <a:rPr lang="en-US" sz="1300" b="1" dirty="0">
+                <a:solidFill>
+                  <a:srgbClr val="9D174D"/>
+                </a:solidFill>
+                <a:latin typeface="Trebuchet MS" pitchFamily="34" charset="0"/>
+                <a:ea typeface="Trebuchet MS" pitchFamily="34" charset="-122"/>
+                <a:cs typeface="Trebuchet MS" pitchFamily="34" charset="-120"/>
+              </a:rPr>
+              <a:t>ent</a:t>
+            </a:r>
+            <a:endParaRPr lang="en-US" sz="1300" dirty="0"/>
+          </a:p>
+        </p:txBody>
+      </p:sp>
+      <p:sp>
+        <p:nvSpPr>
+          <p:cNvPr id="27" name="Text 25"/>
+          <p:cNvSpPr/>
+          <p:nvPr/>
+        </p:nvSpPr>
+        <p:spPr>
+          <a:xfrm>
+            <a:off x="6998818" y="2569464"/>
+            <a:ext cx="1581912" cy="201168"/>
+          </a:xfrm>
+          <a:prstGeom prst="rect">
+            <a:avLst/>
+          </a:prstGeom>
+          <a:noFill/>
+          <a:ln/>
+        </p:spPr>
+        <p:txBody>
+          <a:bodyPr wrap="square" lIns="0" tIns="0" rIns="0" bIns="0" rtlCol="0" anchor="t"/>
+          <a:lstStyle/>
+          <a:p>
+            <a:pPr algn="ctr" indent="0" marL="0">
+              <a:buNone/>
+            </a:pPr>
+            <a:r>
+              <a:rPr lang="en-US" sz="850" dirty="0">
+                <a:solidFill>
+                  <a:srgbClr val="475569"/>
+                </a:solidFill>
+                <a:latin typeface="Calibri" pitchFamily="34" charset="0"/>
+                <a:ea typeface="Calibri" pitchFamily="34" charset="-122"/>
+                <a:cs typeface="Calibri" pitchFamily="34" charset="-120"/>
+              </a:rPr>
+              <a:t>having a quality; a person who does something</a:t>
+            </a:r>
+            <a:endParaRPr lang="en-US" sz="850" dirty="0"/>
+          </a:p>
+        </p:txBody>
+      </p:sp>
+      <p:sp>
+        <p:nvSpPr>
+          <p:cNvPr id="28" name="Shape 26"/>
           <p:cNvSpPr/>
           <p:nvPr/>
         </p:nvSpPr>
@@ -25875,7 +25370,7 @@
       </p:sp>
       <p:sp>
         <p:nvSpPr>
-          <p:cNvPr id="26" name="Text 24"/>
+          <p:cNvPr id="29" name="Text 27"/>
           <p:cNvSpPr/>
           <p:nvPr/>
         </p:nvSpPr>
@@ -25914,7 +25409,7 @@
       </p:sp>
       <p:sp>
         <p:nvSpPr>
-          <p:cNvPr id="27" name="Shape 25"/>
+          <p:cNvPr id="30" name="Shape 28"/>
           <p:cNvSpPr/>
           <p:nvPr/>
         </p:nvSpPr>
@@ -25941,14 +25436,14 @@
       </p:sp>
       <p:sp>
         <p:nvSpPr>
-          <p:cNvPr id="28" name="Shape 26"/>
-          <p:cNvSpPr/>
-          <p:nvPr/>
-        </p:nvSpPr>
-        <p:spPr>
-          <a:xfrm>
-            <a:off x="2313432" y="3364992"/>
-            <a:ext cx="1645920" cy="475488"/>
+          <p:cNvPr id="31" name="Shape 29"/>
+          <p:cNvSpPr/>
+          <p:nvPr/>
+        </p:nvSpPr>
+        <p:spPr>
+          <a:xfrm>
+            <a:off x="1975104" y="3364992"/>
+            <a:ext cx="1554480" cy="475488"/>
           </a:xfrm>
           <a:prstGeom prst="rect">
             <a:avLst>
@@ -25968,14 +25463,14 @@
       </p:sp>
       <p:sp>
         <p:nvSpPr>
-          <p:cNvPr id="29" name="Text 27"/>
-          <p:cNvSpPr/>
-          <p:nvPr/>
-        </p:nvSpPr>
-        <p:spPr>
-          <a:xfrm>
-            <a:off x="2313432" y="3364992"/>
-            <a:ext cx="1645920" cy="475488"/>
+          <p:cNvPr id="32" name="Text 30"/>
+          <p:cNvSpPr/>
+          <p:nvPr/>
+        </p:nvSpPr>
+        <p:spPr>
+          <a:xfrm>
+            <a:off x="1975104" y="3364992"/>
+            <a:ext cx="1554480" cy="475488"/>
           </a:xfrm>
           <a:prstGeom prst="rect">
             <a:avLst/>
@@ -25999,7 +25494,7 @@
                 <a:ea typeface="Trebuchet MS" pitchFamily="34" charset="-122"/>
                 <a:cs typeface="Trebuchet MS" pitchFamily="34" charset="-120"/>
               </a:rPr>
-              <a:t>de</a:t>
+              <a:t>in</a:t>
             </a:r>
             <a:endParaRPr lang="en-US" sz="1400" dirty="0"/>
           </a:p>
@@ -26007,14 +25502,14 @@
       </p:sp>
       <p:sp>
         <p:nvSpPr>
-          <p:cNvPr id="30" name="Text 28"/>
-          <p:cNvSpPr/>
-          <p:nvPr/>
-        </p:nvSpPr>
-        <p:spPr>
-          <a:xfrm>
-            <a:off x="3959352" y="3364992"/>
-            <a:ext cx="411480" cy="475488"/>
+          <p:cNvPr id="33" name="Text 31"/>
+          <p:cNvSpPr/>
+          <p:nvPr/>
+        </p:nvSpPr>
+        <p:spPr>
+          <a:xfrm>
+            <a:off x="3529584" y="3364992"/>
+            <a:ext cx="73152" cy="475488"/>
           </a:xfrm>
           <a:prstGeom prst="rect">
             <a:avLst/>
@@ -26046,14 +25541,14 @@
       </p:sp>
       <p:sp>
         <p:nvSpPr>
-          <p:cNvPr id="31" name="Shape 29"/>
-          <p:cNvSpPr/>
-          <p:nvPr/>
-        </p:nvSpPr>
-        <p:spPr>
-          <a:xfrm>
-            <a:off x="4370832" y="3364992"/>
-            <a:ext cx="1645920" cy="475488"/>
+          <p:cNvPr id="34" name="Shape 32"/>
+          <p:cNvSpPr/>
+          <p:nvPr/>
+        </p:nvSpPr>
+        <p:spPr>
+          <a:xfrm>
+            <a:off x="3602736" y="3364992"/>
+            <a:ext cx="1554480" cy="475488"/>
           </a:xfrm>
           <a:prstGeom prst="rect">
             <a:avLst>
@@ -26073,14 +25568,14 @@
       </p:sp>
       <p:sp>
         <p:nvSpPr>
-          <p:cNvPr id="32" name="Text 30"/>
-          <p:cNvSpPr/>
-          <p:nvPr/>
-        </p:nvSpPr>
-        <p:spPr>
-          <a:xfrm>
-            <a:off x="4370832" y="3364992"/>
-            <a:ext cx="1645920" cy="475488"/>
+          <p:cNvPr id="35" name="Text 33"/>
+          <p:cNvSpPr/>
+          <p:nvPr/>
+        </p:nvSpPr>
+        <p:spPr>
+          <a:xfrm>
+            <a:off x="3602736" y="3364992"/>
+            <a:ext cx="1554480" cy="475488"/>
           </a:xfrm>
           <a:prstGeom prst="rect">
             <a:avLst/>
@@ -26104,7 +25599,7 @@
                 <a:ea typeface="Trebuchet MS" pitchFamily="34" charset="-122"/>
                 <a:cs typeface="Trebuchet MS" pitchFamily="34" charset="-120"/>
               </a:rPr>
-              <a:t>pend</a:t>
+              <a:t>de</a:t>
             </a:r>
             <a:endParaRPr lang="en-US" sz="1400" dirty="0"/>
           </a:p>
@@ -26112,14 +25607,14 @@
       </p:sp>
       <p:sp>
         <p:nvSpPr>
-          <p:cNvPr id="33" name="Text 31"/>
-          <p:cNvSpPr/>
-          <p:nvPr/>
-        </p:nvSpPr>
-        <p:spPr>
-          <a:xfrm>
-            <a:off x="6016752" y="3364992"/>
-            <a:ext cx="411480" cy="475488"/>
+          <p:cNvPr id="36" name="Text 34"/>
+          <p:cNvSpPr/>
+          <p:nvPr/>
+        </p:nvSpPr>
+        <p:spPr>
+          <a:xfrm>
+            <a:off x="5157216" y="3364992"/>
+            <a:ext cx="73152" cy="475488"/>
           </a:xfrm>
           <a:prstGeom prst="rect">
             <a:avLst/>
@@ -26151,14 +25646,14 @@
       </p:sp>
       <p:sp>
         <p:nvSpPr>
-          <p:cNvPr id="34" name="Shape 32"/>
-          <p:cNvSpPr/>
-          <p:nvPr/>
-        </p:nvSpPr>
-        <p:spPr>
-          <a:xfrm>
-            <a:off x="6428232" y="3364992"/>
-            <a:ext cx="1645920" cy="475488"/>
+          <p:cNvPr id="37" name="Shape 35"/>
+          <p:cNvSpPr/>
+          <p:nvPr/>
+        </p:nvSpPr>
+        <p:spPr>
+          <a:xfrm>
+            <a:off x="5230368" y="3364992"/>
+            <a:ext cx="1554480" cy="475488"/>
           </a:xfrm>
           <a:prstGeom prst="rect">
             <a:avLst>
@@ -26178,14 +25673,14 @@
       </p:sp>
       <p:sp>
         <p:nvSpPr>
-          <p:cNvPr id="35" name="Text 33"/>
-          <p:cNvSpPr/>
-          <p:nvPr/>
-        </p:nvSpPr>
-        <p:spPr>
-          <a:xfrm>
-            <a:off x="6428232" y="3364992"/>
-            <a:ext cx="1645920" cy="475488"/>
+          <p:cNvPr id="38" name="Text 36"/>
+          <p:cNvSpPr/>
+          <p:nvPr/>
+        </p:nvSpPr>
+        <p:spPr>
+          <a:xfrm>
+            <a:off x="5230368" y="3364992"/>
+            <a:ext cx="1554480" cy="475488"/>
           </a:xfrm>
           <a:prstGeom prst="rect">
             <a:avLst/>
@@ -26209,7 +25704,7 @@
                 <a:ea typeface="Trebuchet MS" pitchFamily="34" charset="-122"/>
                 <a:cs typeface="Trebuchet MS" pitchFamily="34" charset="-120"/>
               </a:rPr>
-              <a:t>ent</a:t>
+              <a:t>pen</a:t>
             </a:r>
             <a:endParaRPr lang="en-US" sz="1400" dirty="0"/>
           </a:p>
@@ -26217,7 +25712,112 @@
       </p:sp>
       <p:sp>
         <p:nvSpPr>
-          <p:cNvPr id="36" name="Shape 34"/>
+          <p:cNvPr id="39" name="Text 37"/>
+          <p:cNvSpPr/>
+          <p:nvPr/>
+        </p:nvSpPr>
+        <p:spPr>
+          <a:xfrm>
+            <a:off x="6784848" y="3364992"/>
+            <a:ext cx="73152" cy="475488"/>
+          </a:xfrm>
+          <a:prstGeom prst="rect">
+            <a:avLst/>
+          </a:prstGeom>
+          <a:noFill/>
+          <a:ln/>
+        </p:spPr>
+        <p:txBody>
+          <a:bodyPr wrap="square" lIns="0" tIns="0" rIns="0" bIns="0" rtlCol="0" anchor="ctr"/>
+          <a:lstStyle/>
+          <a:p>
+            <a:pPr algn="ctr" indent="0" marL="0">
+              <a:buNone/>
+            </a:pPr>
+            <a:r>
+              <a:rPr lang="en-US" sz="1600" b="1" dirty="0">
+                <a:solidFill>
+                  <a:srgbClr val="0D9488"/>
+                </a:solidFill>
+                <a:latin typeface="Trebuchet MS" pitchFamily="34" charset="0"/>
+                <a:ea typeface="Trebuchet MS" pitchFamily="34" charset="-122"/>
+                <a:cs typeface="Trebuchet MS" pitchFamily="34" charset="-120"/>
+              </a:rPr>
+              <a:t>·</a:t>
+            </a:r>
+            <a:endParaRPr lang="en-US" sz="1600" dirty="0"/>
+          </a:p>
+        </p:txBody>
+      </p:sp>
+      <p:sp>
+        <p:nvSpPr>
+          <p:cNvPr id="40" name="Shape 38"/>
+          <p:cNvSpPr/>
+          <p:nvPr/>
+        </p:nvSpPr>
+        <p:spPr>
+          <a:xfrm>
+            <a:off x="6858000" y="3364992"/>
+            <a:ext cx="1554480" cy="475488"/>
+          </a:xfrm>
+          <a:prstGeom prst="rect">
+            <a:avLst>
+              <a:gd name="adj" fmla="val 9615"/>
+            </a:avLst>
+          </a:prstGeom>
+          <a:solidFill>
+            <a:srgbClr val="FFFFFF"/>
+          </a:solidFill>
+          <a:ln w="12700">
+            <a:solidFill>
+              <a:srgbClr val="0D9488"/>
+            </a:solidFill>
+            <a:prstDash val="solid"/>
+          </a:ln>
+        </p:spPr>
+      </p:sp>
+      <p:sp>
+        <p:nvSpPr>
+          <p:cNvPr id="41" name="Text 39"/>
+          <p:cNvSpPr/>
+          <p:nvPr/>
+        </p:nvSpPr>
+        <p:spPr>
+          <a:xfrm>
+            <a:off x="6858000" y="3364992"/>
+            <a:ext cx="1554480" cy="475488"/>
+          </a:xfrm>
+          <a:prstGeom prst="rect">
+            <a:avLst/>
+          </a:prstGeom>
+          <a:noFill/>
+          <a:ln/>
+        </p:spPr>
+        <p:txBody>
+          <a:bodyPr wrap="square" lIns="0" tIns="0" rIns="0" bIns="0" rtlCol="0" anchor="ctr"/>
+          <a:lstStyle/>
+          <a:p>
+            <a:pPr algn="ctr" indent="0" marL="0">
+              <a:buNone/>
+            </a:pPr>
+            <a:r>
+              <a:rPr lang="en-US" sz="1400" b="1" dirty="0">
+                <a:solidFill>
+                  <a:srgbClr val="0D9488"/>
+                </a:solidFill>
+                <a:latin typeface="Trebuchet MS" pitchFamily="34" charset="0"/>
+                <a:ea typeface="Trebuchet MS" pitchFamily="34" charset="-122"/>
+                <a:cs typeface="Trebuchet MS" pitchFamily="34" charset="-120"/>
+              </a:rPr>
+              <a:t>dent</a:t>
+            </a:r>
+            <a:endParaRPr lang="en-US" sz="1400" dirty="0"/>
+          </a:p>
+        </p:txBody>
+      </p:sp>
+      <p:sp>
+        <p:nvSpPr>
+          <p:cNvPr id="42" name="Shape 40"/>
           <p:cNvSpPr/>
           <p:nvPr/>
         </p:nvSpPr>
@@ -26244,7 +25844,7 @@
       </p:sp>
       <p:sp>
         <p:nvSpPr>
-          <p:cNvPr id="37" name="Text 35"/>
+          <p:cNvPr id="43" name="Text 41"/>
           <p:cNvSpPr/>
           <p:nvPr/>
         </p:nvSpPr>
@@ -26283,7 +25883,7 @@
       </p:sp>
       <p:sp>
         <p:nvSpPr>
-          <p:cNvPr id="38" name="Shape 36"/>
+          <p:cNvPr id="44" name="Shape 42"/>
           <p:cNvSpPr/>
           <p:nvPr/>
         </p:nvSpPr>
@@ -26310,7 +25910,7 @@
       </p:sp>
       <p:sp>
         <p:nvSpPr>
-          <p:cNvPr id="39" name="Text 37"/>
+          <p:cNvPr id="45" name="Text 43"/>
           <p:cNvSpPr/>
           <p:nvPr/>
         </p:nvSpPr>
@@ -26633,7 +26233,7 @@
                 <a:ea typeface="Calibri" pitchFamily="34" charset="-122"/>
                 <a:cs typeface="Calibri" pitchFamily="34" charset="-120"/>
               </a:rPr>
-              <a:t>Word Labs  •  wordlabs.app  •  Root: 'pend' = to hang, hang down</a:t>
+              <a:t>Word Labs  •  wordlabs.app  •  Root: 'pend' = hang, hang down, weigh</a:t>
             </a:r>
             <a:endParaRPr lang="en-US" sz="800" dirty="0"/>
           </a:p>
@@ -26772,7 +26372,7 @@
                 <a:ea typeface="Trebuchet MS" pitchFamily="34" charset="-122"/>
                 <a:cs typeface="Trebuchet MS" pitchFamily="34" charset="-120"/>
               </a:rPr>
-              <a:t>dependent</a:t>
+              <a:t>independent</a:t>
             </a:r>
             <a:endParaRPr lang="en-US" sz="2800" dirty="0"/>
           </a:p>
@@ -26852,8 +26452,8 @@
         </p:nvSpPr>
         <p:spPr>
           <a:xfrm>
-            <a:off x="2221992" y="2258568"/>
-            <a:ext cx="1828800" cy="292608"/>
+            <a:off x="1989734" y="2258568"/>
+            <a:ext cx="1581912" cy="292608"/>
           </a:xfrm>
           <a:prstGeom prst="rect">
             <a:avLst>
@@ -26886,8 +26486,8 @@
         </p:nvSpPr>
         <p:spPr>
           <a:xfrm>
-            <a:off x="2221992" y="2258568"/>
-            <a:ext cx="1828800" cy="292608"/>
+            <a:off x="1989734" y="2258568"/>
+            <a:ext cx="1581912" cy="292608"/>
           </a:xfrm>
           <a:prstGeom prst="rect">
             <a:avLst/>
@@ -26911,7 +26511,7 @@
                 <a:ea typeface="Trebuchet MS" pitchFamily="34" charset="-122"/>
                 <a:cs typeface="Trebuchet MS" pitchFamily="34" charset="-120"/>
               </a:rPr>
-              <a:t>de</a:t>
+              <a:t>in</a:t>
             </a:r>
             <a:endParaRPr lang="en-US" sz="1300" dirty="0"/>
           </a:p>
@@ -26925,8 +26525,8 @@
         </p:nvSpPr>
         <p:spPr>
           <a:xfrm>
-            <a:off x="2221992" y="2569464"/>
-            <a:ext cx="1828800" cy="201168"/>
+            <a:off x="1989734" y="2569464"/>
+            <a:ext cx="1581912" cy="201168"/>
           </a:xfrm>
           <a:prstGeom prst="rect">
             <a:avLst/>
@@ -26950,7 +26550,7 @@
                 <a:ea typeface="Calibri" pitchFamily="34" charset="-122"/>
                 <a:cs typeface="Calibri" pitchFamily="34" charset="-120"/>
               </a:rPr>
-              <a:t>down, from</a:t>
+              <a:t>not</a:t>
             </a:r>
             <a:endParaRPr lang="en-US" sz="850" dirty="0"/>
           </a:p>
@@ -26964,8 +26564,8 @@
         </p:nvSpPr>
         <p:spPr>
           <a:xfrm>
-            <a:off x="4370832" y="2258568"/>
-            <a:ext cx="1828800" cy="292608"/>
+            <a:off x="3659429" y="2258568"/>
+            <a:ext cx="1581912" cy="292608"/>
           </a:xfrm>
           <a:prstGeom prst="rect">
             <a:avLst>
@@ -26973,11 +26573,11 @@
             </a:avLst>
           </a:prstGeom>
           <a:solidFill>
-            <a:srgbClr val="CCFBF1"/>
+            <a:srgbClr val="FCE7F3"/>
           </a:solidFill>
           <a:ln w="19050">
             <a:solidFill>
-              <a:srgbClr val="0D9488"/>
+              <a:srgbClr val="DB2777"/>
             </a:solidFill>
             <a:prstDash val="solid"/>
           </a:ln>
@@ -26998,8 +26598,8 @@
         </p:nvSpPr>
         <p:spPr>
           <a:xfrm>
-            <a:off x="4370832" y="2258568"/>
-            <a:ext cx="1828800" cy="292608"/>
+            <a:off x="3659429" y="2258568"/>
+            <a:ext cx="1581912" cy="292608"/>
           </a:xfrm>
           <a:prstGeom prst="rect">
             <a:avLst/>
@@ -27017,13 +26617,13 @@
             <a:r>
               <a:rPr lang="en-US" sz="1300" b="1" dirty="0">
                 <a:solidFill>
-                  <a:srgbClr val="0F766E"/>
+                  <a:srgbClr val="9D174D"/>
                 </a:solidFill>
                 <a:latin typeface="Trebuchet MS" pitchFamily="34" charset="0"/>
                 <a:ea typeface="Trebuchet MS" pitchFamily="34" charset="-122"/>
                 <a:cs typeface="Trebuchet MS" pitchFamily="34" charset="-120"/>
               </a:rPr>
-              <a:t>pend</a:t>
+              <a:t>de</a:t>
             </a:r>
             <a:endParaRPr lang="en-US" sz="1300" dirty="0"/>
           </a:p>
@@ -27037,8 +26637,8 @@
         </p:nvSpPr>
         <p:spPr>
           <a:xfrm>
-            <a:off x="4370832" y="2569464"/>
-            <a:ext cx="1828800" cy="201168"/>
+            <a:off x="3659429" y="2569464"/>
+            <a:ext cx="1581912" cy="201168"/>
           </a:xfrm>
           <a:prstGeom prst="rect">
             <a:avLst/>
@@ -27062,7 +26662,7 @@
                 <a:ea typeface="Calibri" pitchFamily="34" charset="-122"/>
                 <a:cs typeface="Calibri" pitchFamily="34" charset="-120"/>
               </a:rPr>
-              <a:t>to hang</a:t>
+              <a:t>down, from</a:t>
             </a:r>
             <a:endParaRPr lang="en-US" sz="850" dirty="0"/>
           </a:p>
@@ -27076,8 +26676,8 @@
         </p:nvSpPr>
         <p:spPr>
           <a:xfrm>
-            <a:off x="6519672" y="2258568"/>
-            <a:ext cx="1828800" cy="292608"/>
+            <a:off x="5329123" y="2258568"/>
+            <a:ext cx="1581912" cy="292608"/>
           </a:xfrm>
           <a:prstGeom prst="rect">
             <a:avLst>
@@ -27085,11 +26685,11 @@
             </a:avLst>
           </a:prstGeom>
           <a:solidFill>
-            <a:srgbClr val="FCE7F3"/>
+            <a:srgbClr val="CCFBF1"/>
           </a:solidFill>
           <a:ln w="19050">
             <a:solidFill>
-              <a:srgbClr val="DB2777"/>
+              <a:srgbClr val="0D9488"/>
             </a:solidFill>
             <a:prstDash val="solid"/>
           </a:ln>
@@ -27110,8 +26710,8 @@
         </p:nvSpPr>
         <p:spPr>
           <a:xfrm>
-            <a:off x="6519672" y="2258568"/>
-            <a:ext cx="1828800" cy="292608"/>
+            <a:off x="5329123" y="2258568"/>
+            <a:ext cx="1581912" cy="292608"/>
           </a:xfrm>
           <a:prstGeom prst="rect">
             <a:avLst/>
@@ -27129,13 +26729,13 @@
             <a:r>
               <a:rPr lang="en-US" sz="1300" b="1" dirty="0">
                 <a:solidFill>
-                  <a:srgbClr val="9D174D"/>
+                  <a:srgbClr val="0F766E"/>
                 </a:solidFill>
                 <a:latin typeface="Trebuchet MS" pitchFamily="34" charset="0"/>
                 <a:ea typeface="Trebuchet MS" pitchFamily="34" charset="-122"/>
                 <a:cs typeface="Trebuchet MS" pitchFamily="34" charset="-120"/>
               </a:rPr>
-              <a:t>ent</a:t>
+              <a:t>pend</a:t>
             </a:r>
             <a:endParaRPr lang="en-US" sz="1300" dirty="0"/>
           </a:p>
@@ -27149,8 +26749,8 @@
         </p:nvSpPr>
         <p:spPr>
           <a:xfrm>
-            <a:off x="6519672" y="2569464"/>
-            <a:ext cx="1828800" cy="201168"/>
+            <a:off x="5329123" y="2569464"/>
+            <a:ext cx="1581912" cy="201168"/>
           </a:xfrm>
           <a:prstGeom prst="rect">
             <a:avLst/>
@@ -27174,7 +26774,7 @@
                 <a:ea typeface="Calibri" pitchFamily="34" charset="-122"/>
                 <a:cs typeface="Calibri" pitchFamily="34" charset="-120"/>
               </a:rPr>
-              <a:t>having a quality, being in a state</a:t>
+              <a:t>hang</a:t>
             </a:r>
             <a:endParaRPr lang="en-US" sz="850" dirty="0"/>
           </a:p>
@@ -27183,6 +26783,118 @@
       <p:sp>
         <p:nvSpPr>
           <p:cNvPr id="25" name="Shape 23"/>
+          <p:cNvSpPr/>
+          <p:nvPr/>
+        </p:nvSpPr>
+        <p:spPr>
+          <a:xfrm>
+            <a:off x="6998818" y="2258568"/>
+            <a:ext cx="1581912" cy="292608"/>
+          </a:xfrm>
+          <a:prstGeom prst="rect">
+            <a:avLst>
+              <a:gd name="adj" fmla="val 25000"/>
+            </a:avLst>
+          </a:prstGeom>
+          <a:solidFill>
+            <a:srgbClr val="FCE7F3"/>
+          </a:solidFill>
+          <a:ln w="19050">
+            <a:solidFill>
+              <a:srgbClr val="DB2777"/>
+            </a:solidFill>
+            <a:prstDash val="solid"/>
+          </a:ln>
+          <a:effectLst>
+            <a:outerShdw sx="100000" sy="100000" kx="0" ky="0" algn="bl" rotWithShape="0" blurRad="101600" dist="38100" dir="8100000">
+              <a:srgbClr val="000000">
+                <a:alpha val="12000"/>
+              </a:srgbClr>
+            </a:outerShdw>
+          </a:effectLst>
+        </p:spPr>
+      </p:sp>
+      <p:sp>
+        <p:nvSpPr>
+          <p:cNvPr id="26" name="Text 24"/>
+          <p:cNvSpPr/>
+          <p:nvPr/>
+        </p:nvSpPr>
+        <p:spPr>
+          <a:xfrm>
+            <a:off x="6998818" y="2258568"/>
+            <a:ext cx="1581912" cy="292608"/>
+          </a:xfrm>
+          <a:prstGeom prst="rect">
+            <a:avLst/>
+          </a:prstGeom>
+          <a:noFill/>
+          <a:ln/>
+        </p:spPr>
+        <p:txBody>
+          <a:bodyPr wrap="square" lIns="0" tIns="0" rIns="0" bIns="0" rtlCol="0" anchor="ctr"/>
+          <a:lstStyle/>
+          <a:p>
+            <a:pPr algn="ctr" indent="0" marL="0">
+              <a:buNone/>
+            </a:pPr>
+            <a:r>
+              <a:rPr lang="en-US" sz="1300" b="1" dirty="0">
+                <a:solidFill>
+                  <a:srgbClr val="9D174D"/>
+                </a:solidFill>
+                <a:latin typeface="Trebuchet MS" pitchFamily="34" charset="0"/>
+                <a:ea typeface="Trebuchet MS" pitchFamily="34" charset="-122"/>
+                <a:cs typeface="Trebuchet MS" pitchFamily="34" charset="-120"/>
+              </a:rPr>
+              <a:t>ent</a:t>
+            </a:r>
+            <a:endParaRPr lang="en-US" sz="1300" dirty="0"/>
+          </a:p>
+        </p:txBody>
+      </p:sp>
+      <p:sp>
+        <p:nvSpPr>
+          <p:cNvPr id="27" name="Text 25"/>
+          <p:cNvSpPr/>
+          <p:nvPr/>
+        </p:nvSpPr>
+        <p:spPr>
+          <a:xfrm>
+            <a:off x="6998818" y="2569464"/>
+            <a:ext cx="1581912" cy="201168"/>
+          </a:xfrm>
+          <a:prstGeom prst="rect">
+            <a:avLst/>
+          </a:prstGeom>
+          <a:noFill/>
+          <a:ln/>
+        </p:spPr>
+        <p:txBody>
+          <a:bodyPr wrap="square" lIns="0" tIns="0" rIns="0" bIns="0" rtlCol="0" anchor="t"/>
+          <a:lstStyle/>
+          <a:p>
+            <a:pPr algn="ctr" indent="0" marL="0">
+              <a:buNone/>
+            </a:pPr>
+            <a:r>
+              <a:rPr lang="en-US" sz="850" dirty="0">
+                <a:solidFill>
+                  <a:srgbClr val="475569"/>
+                </a:solidFill>
+                <a:latin typeface="Calibri" pitchFamily="34" charset="0"/>
+                <a:ea typeface="Calibri" pitchFamily="34" charset="-122"/>
+                <a:cs typeface="Calibri" pitchFamily="34" charset="-120"/>
+              </a:rPr>
+              <a:t>having a quality; a person who does something</a:t>
+            </a:r>
+            <a:endParaRPr lang="en-US" sz="850" dirty="0"/>
+          </a:p>
+        </p:txBody>
+      </p:sp>
+      <p:sp>
+        <p:nvSpPr>
+          <p:cNvPr id="28" name="Shape 26"/>
           <p:cNvSpPr/>
           <p:nvPr/>
         </p:nvSpPr>
@@ -27209,7 +26921,7 @@
       </p:sp>
       <p:sp>
         <p:nvSpPr>
-          <p:cNvPr id="26" name="Text 24"/>
+          <p:cNvPr id="29" name="Text 27"/>
           <p:cNvSpPr/>
           <p:nvPr/>
         </p:nvSpPr>
@@ -27248,7 +26960,7 @@
       </p:sp>
       <p:sp>
         <p:nvSpPr>
-          <p:cNvPr id="27" name="Shape 25"/>
+          <p:cNvPr id="30" name="Shape 28"/>
           <p:cNvSpPr/>
           <p:nvPr/>
         </p:nvSpPr>
@@ -27275,14 +26987,14 @@
       </p:sp>
       <p:sp>
         <p:nvSpPr>
-          <p:cNvPr id="28" name="Shape 26"/>
-          <p:cNvSpPr/>
-          <p:nvPr/>
-        </p:nvSpPr>
-        <p:spPr>
-          <a:xfrm>
-            <a:off x="2313432" y="3364992"/>
-            <a:ext cx="1645920" cy="475488"/>
+          <p:cNvPr id="31" name="Shape 29"/>
+          <p:cNvSpPr/>
+          <p:nvPr/>
+        </p:nvSpPr>
+        <p:spPr>
+          <a:xfrm>
+            <a:off x="1975104" y="3364992"/>
+            <a:ext cx="1554480" cy="475488"/>
           </a:xfrm>
           <a:prstGeom prst="rect">
             <a:avLst>
@@ -27302,14 +27014,14 @@
       </p:sp>
       <p:sp>
         <p:nvSpPr>
-          <p:cNvPr id="29" name="Text 27"/>
-          <p:cNvSpPr/>
-          <p:nvPr/>
-        </p:nvSpPr>
-        <p:spPr>
-          <a:xfrm>
-            <a:off x="2313432" y="3364992"/>
-            <a:ext cx="1645920" cy="475488"/>
+          <p:cNvPr id="32" name="Text 30"/>
+          <p:cNvSpPr/>
+          <p:nvPr/>
+        </p:nvSpPr>
+        <p:spPr>
+          <a:xfrm>
+            <a:off x="1975104" y="3364992"/>
+            <a:ext cx="1554480" cy="475488"/>
           </a:xfrm>
           <a:prstGeom prst="rect">
             <a:avLst/>
@@ -27333,7 +27045,7 @@
                 <a:ea typeface="Trebuchet MS" pitchFamily="34" charset="-122"/>
                 <a:cs typeface="Trebuchet MS" pitchFamily="34" charset="-120"/>
               </a:rPr>
-              <a:t>de</a:t>
+              <a:t>in</a:t>
             </a:r>
             <a:endParaRPr lang="en-US" sz="1400" dirty="0"/>
           </a:p>
@@ -27341,14 +27053,14 @@
       </p:sp>
       <p:sp>
         <p:nvSpPr>
-          <p:cNvPr id="30" name="Text 28"/>
-          <p:cNvSpPr/>
-          <p:nvPr/>
-        </p:nvSpPr>
-        <p:spPr>
-          <a:xfrm>
-            <a:off x="3959352" y="3364992"/>
-            <a:ext cx="411480" cy="475488"/>
+          <p:cNvPr id="33" name="Text 31"/>
+          <p:cNvSpPr/>
+          <p:nvPr/>
+        </p:nvSpPr>
+        <p:spPr>
+          <a:xfrm>
+            <a:off x="3529584" y="3364992"/>
+            <a:ext cx="73152" cy="475488"/>
           </a:xfrm>
           <a:prstGeom prst="rect">
             <a:avLst/>
@@ -27380,14 +27092,14 @@
       </p:sp>
       <p:sp>
         <p:nvSpPr>
-          <p:cNvPr id="31" name="Shape 29"/>
-          <p:cNvSpPr/>
-          <p:nvPr/>
-        </p:nvSpPr>
-        <p:spPr>
-          <a:xfrm>
-            <a:off x="4370832" y="3364992"/>
-            <a:ext cx="1645920" cy="475488"/>
+          <p:cNvPr id="34" name="Shape 32"/>
+          <p:cNvSpPr/>
+          <p:nvPr/>
+        </p:nvSpPr>
+        <p:spPr>
+          <a:xfrm>
+            <a:off x="3602736" y="3364992"/>
+            <a:ext cx="1554480" cy="475488"/>
           </a:xfrm>
           <a:prstGeom prst="rect">
             <a:avLst>
@@ -27407,14 +27119,14 @@
       </p:sp>
       <p:sp>
         <p:nvSpPr>
-          <p:cNvPr id="32" name="Text 30"/>
-          <p:cNvSpPr/>
-          <p:nvPr/>
-        </p:nvSpPr>
-        <p:spPr>
-          <a:xfrm>
-            <a:off x="4370832" y="3364992"/>
-            <a:ext cx="1645920" cy="475488"/>
+          <p:cNvPr id="35" name="Text 33"/>
+          <p:cNvSpPr/>
+          <p:nvPr/>
+        </p:nvSpPr>
+        <p:spPr>
+          <a:xfrm>
+            <a:off x="3602736" y="3364992"/>
+            <a:ext cx="1554480" cy="475488"/>
           </a:xfrm>
           <a:prstGeom prst="rect">
             <a:avLst/>
@@ -27438,7 +27150,7 @@
                 <a:ea typeface="Trebuchet MS" pitchFamily="34" charset="-122"/>
                 <a:cs typeface="Trebuchet MS" pitchFamily="34" charset="-120"/>
               </a:rPr>
-              <a:t>pend</a:t>
+              <a:t>de</a:t>
             </a:r>
             <a:endParaRPr lang="en-US" sz="1400" dirty="0"/>
           </a:p>
@@ -27446,14 +27158,14 @@
       </p:sp>
       <p:sp>
         <p:nvSpPr>
-          <p:cNvPr id="33" name="Text 31"/>
-          <p:cNvSpPr/>
-          <p:nvPr/>
-        </p:nvSpPr>
-        <p:spPr>
-          <a:xfrm>
-            <a:off x="6016752" y="3364992"/>
-            <a:ext cx="411480" cy="475488"/>
+          <p:cNvPr id="36" name="Text 34"/>
+          <p:cNvSpPr/>
+          <p:nvPr/>
+        </p:nvSpPr>
+        <p:spPr>
+          <a:xfrm>
+            <a:off x="5157216" y="3364992"/>
+            <a:ext cx="73152" cy="475488"/>
           </a:xfrm>
           <a:prstGeom prst="rect">
             <a:avLst/>
@@ -27485,14 +27197,14 @@
       </p:sp>
       <p:sp>
         <p:nvSpPr>
-          <p:cNvPr id="34" name="Shape 32"/>
-          <p:cNvSpPr/>
-          <p:nvPr/>
-        </p:nvSpPr>
-        <p:spPr>
-          <a:xfrm>
-            <a:off x="6428232" y="3364992"/>
-            <a:ext cx="1645920" cy="475488"/>
+          <p:cNvPr id="37" name="Shape 35"/>
+          <p:cNvSpPr/>
+          <p:nvPr/>
+        </p:nvSpPr>
+        <p:spPr>
+          <a:xfrm>
+            <a:off x="5230368" y="3364992"/>
+            <a:ext cx="1554480" cy="475488"/>
           </a:xfrm>
           <a:prstGeom prst="rect">
             <a:avLst>
@@ -27512,14 +27224,14 @@
       </p:sp>
       <p:sp>
         <p:nvSpPr>
-          <p:cNvPr id="35" name="Text 33"/>
-          <p:cNvSpPr/>
-          <p:nvPr/>
-        </p:nvSpPr>
-        <p:spPr>
-          <a:xfrm>
-            <a:off x="6428232" y="3364992"/>
-            <a:ext cx="1645920" cy="475488"/>
+          <p:cNvPr id="38" name="Text 36"/>
+          <p:cNvSpPr/>
+          <p:nvPr/>
+        </p:nvSpPr>
+        <p:spPr>
+          <a:xfrm>
+            <a:off x="5230368" y="3364992"/>
+            <a:ext cx="1554480" cy="475488"/>
           </a:xfrm>
           <a:prstGeom prst="rect">
             <a:avLst/>
@@ -27543,7 +27255,7 @@
                 <a:ea typeface="Trebuchet MS" pitchFamily="34" charset="-122"/>
                 <a:cs typeface="Trebuchet MS" pitchFamily="34" charset="-120"/>
               </a:rPr>
-              <a:t>ent</a:t>
+              <a:t>pen</a:t>
             </a:r>
             <a:endParaRPr lang="en-US" sz="1400" dirty="0"/>
           </a:p>
@@ -27551,7 +27263,112 @@
       </p:sp>
       <p:sp>
         <p:nvSpPr>
-          <p:cNvPr id="36" name="Shape 34"/>
+          <p:cNvPr id="39" name="Text 37"/>
+          <p:cNvSpPr/>
+          <p:nvPr/>
+        </p:nvSpPr>
+        <p:spPr>
+          <a:xfrm>
+            <a:off x="6784848" y="3364992"/>
+            <a:ext cx="73152" cy="475488"/>
+          </a:xfrm>
+          <a:prstGeom prst="rect">
+            <a:avLst/>
+          </a:prstGeom>
+          <a:noFill/>
+          <a:ln/>
+        </p:spPr>
+        <p:txBody>
+          <a:bodyPr wrap="square" lIns="0" tIns="0" rIns="0" bIns="0" rtlCol="0" anchor="ctr"/>
+          <a:lstStyle/>
+          <a:p>
+            <a:pPr algn="ctr" indent="0" marL="0">
+              <a:buNone/>
+            </a:pPr>
+            <a:r>
+              <a:rPr lang="en-US" sz="1600" b="1" dirty="0">
+                <a:solidFill>
+                  <a:srgbClr val="0D9488"/>
+                </a:solidFill>
+                <a:latin typeface="Trebuchet MS" pitchFamily="34" charset="0"/>
+                <a:ea typeface="Trebuchet MS" pitchFamily="34" charset="-122"/>
+                <a:cs typeface="Trebuchet MS" pitchFamily="34" charset="-120"/>
+              </a:rPr>
+              <a:t>·</a:t>
+            </a:r>
+            <a:endParaRPr lang="en-US" sz="1600" dirty="0"/>
+          </a:p>
+        </p:txBody>
+      </p:sp>
+      <p:sp>
+        <p:nvSpPr>
+          <p:cNvPr id="40" name="Shape 38"/>
+          <p:cNvSpPr/>
+          <p:nvPr/>
+        </p:nvSpPr>
+        <p:spPr>
+          <a:xfrm>
+            <a:off x="6858000" y="3364992"/>
+            <a:ext cx="1554480" cy="475488"/>
+          </a:xfrm>
+          <a:prstGeom prst="rect">
+            <a:avLst>
+              <a:gd name="adj" fmla="val 9615"/>
+            </a:avLst>
+          </a:prstGeom>
+          <a:solidFill>
+            <a:srgbClr val="FFFFFF"/>
+          </a:solidFill>
+          <a:ln w="12700">
+            <a:solidFill>
+              <a:srgbClr val="0D9488"/>
+            </a:solidFill>
+            <a:prstDash val="solid"/>
+          </a:ln>
+        </p:spPr>
+      </p:sp>
+      <p:sp>
+        <p:nvSpPr>
+          <p:cNvPr id="41" name="Text 39"/>
+          <p:cNvSpPr/>
+          <p:nvPr/>
+        </p:nvSpPr>
+        <p:spPr>
+          <a:xfrm>
+            <a:off x="6858000" y="3364992"/>
+            <a:ext cx="1554480" cy="475488"/>
+          </a:xfrm>
+          <a:prstGeom prst="rect">
+            <a:avLst/>
+          </a:prstGeom>
+          <a:noFill/>
+          <a:ln/>
+        </p:spPr>
+        <p:txBody>
+          <a:bodyPr wrap="square" lIns="0" tIns="0" rIns="0" bIns="0" rtlCol="0" anchor="ctr"/>
+          <a:lstStyle/>
+          <a:p>
+            <a:pPr algn="ctr" indent="0" marL="0">
+              <a:buNone/>
+            </a:pPr>
+            <a:r>
+              <a:rPr lang="en-US" sz="1400" b="1" dirty="0">
+                <a:solidFill>
+                  <a:srgbClr val="0D9488"/>
+                </a:solidFill>
+                <a:latin typeface="Trebuchet MS" pitchFamily="34" charset="0"/>
+                <a:ea typeface="Trebuchet MS" pitchFamily="34" charset="-122"/>
+                <a:cs typeface="Trebuchet MS" pitchFamily="34" charset="-120"/>
+              </a:rPr>
+              <a:t>dent</a:t>
+            </a:r>
+            <a:endParaRPr lang="en-US" sz="1400" dirty="0"/>
+          </a:p>
+        </p:txBody>
+      </p:sp>
+      <p:sp>
+        <p:nvSpPr>
+          <p:cNvPr id="42" name="Shape 40"/>
           <p:cNvSpPr/>
           <p:nvPr/>
         </p:nvSpPr>
@@ -27578,7 +27395,7 @@
       </p:sp>
       <p:sp>
         <p:nvSpPr>
-          <p:cNvPr id="37" name="Text 35"/>
+          <p:cNvPr id="43" name="Text 41"/>
           <p:cNvSpPr/>
           <p:nvPr/>
         </p:nvSpPr>
@@ -27617,7 +27434,7 @@
       </p:sp>
       <p:sp>
         <p:nvSpPr>
-          <p:cNvPr id="38" name="Shape 36"/>
+          <p:cNvPr id="44" name="Shape 42"/>
           <p:cNvSpPr/>
           <p:nvPr/>
         </p:nvSpPr>
@@ -27644,14 +27461,14 @@
       </p:sp>
       <p:sp>
         <p:nvSpPr>
-          <p:cNvPr id="39" name="Shape 37"/>
-          <p:cNvSpPr/>
-          <p:nvPr/>
-        </p:nvSpPr>
-        <p:spPr>
-          <a:xfrm>
-            <a:off x="2124837" y="4169664"/>
-            <a:ext cx="685800" cy="475488"/>
+          <p:cNvPr id="45" name="Shape 43"/>
+          <p:cNvSpPr/>
+          <p:nvPr/>
+        </p:nvSpPr>
+        <p:spPr>
+          <a:xfrm>
+            <a:off x="1951828" y="4169664"/>
+            <a:ext cx="603504" cy="475488"/>
           </a:xfrm>
           <a:prstGeom prst="rect">
             <a:avLst>
@@ -27671,14 +27488,14 @@
       </p:sp>
       <p:sp>
         <p:nvSpPr>
-          <p:cNvPr id="40" name="Text 38"/>
-          <p:cNvSpPr/>
-          <p:nvPr/>
-        </p:nvSpPr>
-        <p:spPr>
-          <a:xfrm>
-            <a:off x="2124837" y="4169664"/>
-            <a:ext cx="685800" cy="475488"/>
+          <p:cNvPr id="46" name="Text 44"/>
+          <p:cNvSpPr/>
+          <p:nvPr/>
+        </p:nvSpPr>
+        <p:spPr>
+          <a:xfrm>
+            <a:off x="1951828" y="4169664"/>
+            <a:ext cx="603504" cy="475488"/>
           </a:xfrm>
           <a:prstGeom prst="rect">
             <a:avLst/>
@@ -27702,7 +27519,7 @@
                 <a:ea typeface="Trebuchet MS" pitchFamily="34" charset="-122"/>
                 <a:cs typeface="Trebuchet MS" pitchFamily="34" charset="-120"/>
               </a:rPr>
-              <a:t>d</a:t>
+              <a:t>i</a:t>
             </a:r>
             <a:endParaRPr lang="en-US" sz="900" dirty="0"/>
           </a:p>
@@ -27710,14 +27527,14 @@
       </p:sp>
       <p:sp>
         <p:nvSpPr>
-          <p:cNvPr id="41" name="Shape 39"/>
-          <p:cNvSpPr/>
-          <p:nvPr/>
-        </p:nvSpPr>
-        <p:spPr>
-          <a:xfrm>
-            <a:off x="3033522" y="4169664"/>
-            <a:ext cx="685800" cy="475488"/>
+          <p:cNvPr id="47" name="Shape 45"/>
+          <p:cNvSpPr/>
+          <p:nvPr/>
+        </p:nvSpPr>
+        <p:spPr>
+          <a:xfrm>
+            <a:off x="2605209" y="4169664"/>
+            <a:ext cx="603504" cy="475488"/>
           </a:xfrm>
           <a:prstGeom prst="rect">
             <a:avLst>
@@ -27737,14 +27554,14 @@
       </p:sp>
       <p:sp>
         <p:nvSpPr>
-          <p:cNvPr id="42" name="Text 40"/>
-          <p:cNvSpPr/>
-          <p:nvPr/>
-        </p:nvSpPr>
-        <p:spPr>
-          <a:xfrm>
-            <a:off x="3033522" y="4169664"/>
-            <a:ext cx="685800" cy="475488"/>
+          <p:cNvPr id="48" name="Text 46"/>
+          <p:cNvSpPr/>
+          <p:nvPr/>
+        </p:nvSpPr>
+        <p:spPr>
+          <a:xfrm>
+            <a:off x="2605209" y="4169664"/>
+            <a:ext cx="603504" cy="475488"/>
           </a:xfrm>
           <a:prstGeom prst="rect">
             <a:avLst/>
@@ -27768,7 +27585,7 @@
                 <a:ea typeface="Trebuchet MS" pitchFamily="34" charset="-122"/>
                 <a:cs typeface="Trebuchet MS" pitchFamily="34" charset="-120"/>
               </a:rPr>
-              <a:t>e</a:t>
+              <a:t>n</a:t>
             </a:r>
             <a:endParaRPr lang="en-US" sz="900" dirty="0"/>
           </a:p>
@@ -27776,14 +27593,14 @@
       </p:sp>
       <p:sp>
         <p:nvSpPr>
-          <p:cNvPr id="43" name="Shape 41"/>
-          <p:cNvSpPr/>
-          <p:nvPr/>
-        </p:nvSpPr>
-        <p:spPr>
-          <a:xfrm>
-            <a:off x="3942207" y="4169664"/>
-            <a:ext cx="685800" cy="475488"/>
+          <p:cNvPr id="49" name="Shape 47"/>
+          <p:cNvSpPr/>
+          <p:nvPr/>
+        </p:nvSpPr>
+        <p:spPr>
+          <a:xfrm>
+            <a:off x="3258589" y="4169664"/>
+            <a:ext cx="603504" cy="475488"/>
           </a:xfrm>
           <a:prstGeom prst="rect">
             <a:avLst>
@@ -27803,14 +27620,14 @@
       </p:sp>
       <p:sp>
         <p:nvSpPr>
-          <p:cNvPr id="44" name="Text 42"/>
-          <p:cNvSpPr/>
-          <p:nvPr/>
-        </p:nvSpPr>
-        <p:spPr>
-          <a:xfrm>
-            <a:off x="3942207" y="4169664"/>
-            <a:ext cx="685800" cy="475488"/>
+          <p:cNvPr id="50" name="Text 48"/>
+          <p:cNvSpPr/>
+          <p:nvPr/>
+        </p:nvSpPr>
+        <p:spPr>
+          <a:xfrm>
+            <a:off x="3258589" y="4169664"/>
+            <a:ext cx="603504" cy="475488"/>
           </a:xfrm>
           <a:prstGeom prst="rect">
             <a:avLst/>
@@ -27834,7 +27651,7 @@
                 <a:ea typeface="Trebuchet MS" pitchFamily="34" charset="-122"/>
                 <a:cs typeface="Trebuchet MS" pitchFamily="34" charset="-120"/>
               </a:rPr>
-              <a:t>p</a:t>
+              <a:t>d</a:t>
             </a:r>
             <a:endParaRPr lang="en-US" sz="900" dirty="0"/>
           </a:p>
@@ -27842,14 +27659,14 @@
       </p:sp>
       <p:sp>
         <p:nvSpPr>
-          <p:cNvPr id="45" name="Shape 43"/>
-          <p:cNvSpPr/>
-          <p:nvPr/>
-        </p:nvSpPr>
-        <p:spPr>
-          <a:xfrm>
-            <a:off x="4850892" y="4169664"/>
-            <a:ext cx="685800" cy="475488"/>
+          <p:cNvPr id="51" name="Shape 49"/>
+          <p:cNvSpPr/>
+          <p:nvPr/>
+        </p:nvSpPr>
+        <p:spPr>
+          <a:xfrm>
+            <a:off x="3911969" y="4169664"/>
+            <a:ext cx="603504" cy="475488"/>
           </a:xfrm>
           <a:prstGeom prst="rect">
             <a:avLst>
@@ -27869,14 +27686,14 @@
       </p:sp>
       <p:sp>
         <p:nvSpPr>
-          <p:cNvPr id="46" name="Text 44"/>
-          <p:cNvSpPr/>
-          <p:nvPr/>
-        </p:nvSpPr>
-        <p:spPr>
-          <a:xfrm>
-            <a:off x="4850892" y="4169664"/>
-            <a:ext cx="685800" cy="475488"/>
+          <p:cNvPr id="52" name="Text 50"/>
+          <p:cNvSpPr/>
+          <p:nvPr/>
+        </p:nvSpPr>
+        <p:spPr>
+          <a:xfrm>
+            <a:off x="3911969" y="4169664"/>
+            <a:ext cx="603504" cy="475488"/>
           </a:xfrm>
           <a:prstGeom prst="rect">
             <a:avLst/>
@@ -27908,14 +27725,14 @@
       </p:sp>
       <p:sp>
         <p:nvSpPr>
-          <p:cNvPr id="47" name="Shape 45"/>
-          <p:cNvSpPr/>
-          <p:nvPr/>
-        </p:nvSpPr>
-        <p:spPr>
-          <a:xfrm>
-            <a:off x="5759577" y="4169664"/>
-            <a:ext cx="685800" cy="475488"/>
+          <p:cNvPr id="53" name="Shape 51"/>
+          <p:cNvSpPr/>
+          <p:nvPr/>
+        </p:nvSpPr>
+        <p:spPr>
+          <a:xfrm>
+            <a:off x="4565350" y="4169664"/>
+            <a:ext cx="603504" cy="475488"/>
           </a:xfrm>
           <a:prstGeom prst="rect">
             <a:avLst>
@@ -27935,14 +27752,14 @@
       </p:sp>
       <p:sp>
         <p:nvSpPr>
-          <p:cNvPr id="48" name="Text 46"/>
-          <p:cNvSpPr/>
-          <p:nvPr/>
-        </p:nvSpPr>
-        <p:spPr>
-          <a:xfrm>
-            <a:off x="5759577" y="4169664"/>
-            <a:ext cx="685800" cy="475488"/>
+          <p:cNvPr id="54" name="Text 52"/>
+          <p:cNvSpPr/>
+          <p:nvPr/>
+        </p:nvSpPr>
+        <p:spPr>
+          <a:xfrm>
+            <a:off x="4565350" y="4169664"/>
+            <a:ext cx="603504" cy="475488"/>
           </a:xfrm>
           <a:prstGeom prst="rect">
             <a:avLst/>
@@ -27966,7 +27783,7 @@
                 <a:ea typeface="Trebuchet MS" pitchFamily="34" charset="-122"/>
                 <a:cs typeface="Trebuchet MS" pitchFamily="34" charset="-120"/>
               </a:rPr>
-              <a:t>nd</a:t>
+              <a:t>p</a:t>
             </a:r>
             <a:endParaRPr lang="en-US" sz="900" dirty="0"/>
           </a:p>
@@ -27974,14 +27791,14 @@
       </p:sp>
       <p:sp>
         <p:nvSpPr>
-          <p:cNvPr id="49" name="Shape 47"/>
-          <p:cNvSpPr/>
-          <p:nvPr/>
-        </p:nvSpPr>
-        <p:spPr>
-          <a:xfrm>
-            <a:off x="6668262" y="4169664"/>
-            <a:ext cx="685800" cy="475488"/>
+          <p:cNvPr id="55" name="Shape 53"/>
+          <p:cNvSpPr/>
+          <p:nvPr/>
+        </p:nvSpPr>
+        <p:spPr>
+          <a:xfrm>
+            <a:off x="5218730" y="4169664"/>
+            <a:ext cx="603504" cy="475488"/>
           </a:xfrm>
           <a:prstGeom prst="rect">
             <a:avLst>
@@ -28001,14 +27818,14 @@
       </p:sp>
       <p:sp>
         <p:nvSpPr>
-          <p:cNvPr id="50" name="Text 48"/>
-          <p:cNvSpPr/>
-          <p:nvPr/>
-        </p:nvSpPr>
-        <p:spPr>
-          <a:xfrm>
-            <a:off x="6668262" y="4169664"/>
-            <a:ext cx="685800" cy="475488"/>
+          <p:cNvPr id="56" name="Text 54"/>
+          <p:cNvSpPr/>
+          <p:nvPr/>
+        </p:nvSpPr>
+        <p:spPr>
+          <a:xfrm>
+            <a:off x="5218730" y="4169664"/>
+            <a:ext cx="603504" cy="475488"/>
           </a:xfrm>
           <a:prstGeom prst="rect">
             <a:avLst/>
@@ -28040,14 +27857,14 @@
       </p:sp>
       <p:sp>
         <p:nvSpPr>
-          <p:cNvPr id="51" name="Shape 49"/>
-          <p:cNvSpPr/>
-          <p:nvPr/>
-        </p:nvSpPr>
-        <p:spPr>
-          <a:xfrm>
-            <a:off x="7576947" y="4169664"/>
-            <a:ext cx="685800" cy="475488"/>
+          <p:cNvPr id="57" name="Shape 55"/>
+          <p:cNvSpPr/>
+          <p:nvPr/>
+        </p:nvSpPr>
+        <p:spPr>
+          <a:xfrm>
+            <a:off x="5872111" y="4169664"/>
+            <a:ext cx="603504" cy="475488"/>
           </a:xfrm>
           <a:prstGeom prst="rect">
             <a:avLst>
@@ -28067,14 +27884,212 @@
       </p:sp>
       <p:sp>
         <p:nvSpPr>
-          <p:cNvPr id="52" name="Text 50"/>
-          <p:cNvSpPr/>
-          <p:nvPr/>
-        </p:nvSpPr>
-        <p:spPr>
-          <a:xfrm>
-            <a:off x="7576947" y="4169664"/>
-            <a:ext cx="685800" cy="475488"/>
+          <p:cNvPr id="58" name="Text 56"/>
+          <p:cNvSpPr/>
+          <p:nvPr/>
+        </p:nvSpPr>
+        <p:spPr>
+          <a:xfrm>
+            <a:off x="5872111" y="4169664"/>
+            <a:ext cx="603504" cy="475488"/>
+          </a:xfrm>
+          <a:prstGeom prst="rect">
+            <a:avLst/>
+          </a:prstGeom>
+          <a:noFill/>
+          <a:ln/>
+        </p:spPr>
+        <p:txBody>
+          <a:bodyPr wrap="square" lIns="0" tIns="0" rIns="0" bIns="0" rtlCol="0" anchor="ctr"/>
+          <a:lstStyle/>
+          <a:p>
+            <a:pPr algn="ctr" indent="0" marL="0">
+              <a:buNone/>
+            </a:pPr>
+            <a:r>
+              <a:rPr lang="en-US" sz="900" b="1" dirty="0">
+                <a:solidFill>
+                  <a:srgbClr val="9D174D"/>
+                </a:solidFill>
+                <a:latin typeface="Trebuchet MS" pitchFamily="34" charset="0"/>
+                <a:ea typeface="Trebuchet MS" pitchFamily="34" charset="-122"/>
+                <a:cs typeface="Trebuchet MS" pitchFamily="34" charset="-120"/>
+              </a:rPr>
+              <a:t>n</a:t>
+            </a:r>
+            <a:endParaRPr lang="en-US" sz="900" dirty="0"/>
+          </a:p>
+        </p:txBody>
+      </p:sp>
+      <p:sp>
+        <p:nvSpPr>
+          <p:cNvPr id="59" name="Shape 57"/>
+          <p:cNvSpPr/>
+          <p:nvPr/>
+        </p:nvSpPr>
+        <p:spPr>
+          <a:xfrm>
+            <a:off x="6525491" y="4169664"/>
+            <a:ext cx="603504" cy="475488"/>
+          </a:xfrm>
+          <a:prstGeom prst="rect">
+            <a:avLst>
+              <a:gd name="adj" fmla="val 7692"/>
+            </a:avLst>
+          </a:prstGeom>
+          <a:solidFill>
+            <a:srgbClr val="FFFFFF"/>
+          </a:solidFill>
+          <a:ln w="12700">
+            <a:solidFill>
+              <a:srgbClr val="DB2777"/>
+            </a:solidFill>
+            <a:prstDash val="solid"/>
+          </a:ln>
+        </p:spPr>
+      </p:sp>
+      <p:sp>
+        <p:nvSpPr>
+          <p:cNvPr id="60" name="Text 58"/>
+          <p:cNvSpPr/>
+          <p:nvPr/>
+        </p:nvSpPr>
+        <p:spPr>
+          <a:xfrm>
+            <a:off x="6525491" y="4169664"/>
+            <a:ext cx="603504" cy="475488"/>
+          </a:xfrm>
+          <a:prstGeom prst="rect">
+            <a:avLst/>
+          </a:prstGeom>
+          <a:noFill/>
+          <a:ln/>
+        </p:spPr>
+        <p:txBody>
+          <a:bodyPr wrap="square" lIns="0" tIns="0" rIns="0" bIns="0" rtlCol="0" anchor="ctr"/>
+          <a:lstStyle/>
+          <a:p>
+            <a:pPr algn="ctr" indent="0" marL="0">
+              <a:buNone/>
+            </a:pPr>
+            <a:r>
+              <a:rPr lang="en-US" sz="900" b="1" dirty="0">
+                <a:solidFill>
+                  <a:srgbClr val="9D174D"/>
+                </a:solidFill>
+                <a:latin typeface="Trebuchet MS" pitchFamily="34" charset="0"/>
+                <a:ea typeface="Trebuchet MS" pitchFamily="34" charset="-122"/>
+                <a:cs typeface="Trebuchet MS" pitchFamily="34" charset="-120"/>
+              </a:rPr>
+              <a:t>d</a:t>
+            </a:r>
+            <a:endParaRPr lang="en-US" sz="900" dirty="0"/>
+          </a:p>
+        </p:txBody>
+      </p:sp>
+      <p:sp>
+        <p:nvSpPr>
+          <p:cNvPr id="61" name="Shape 59"/>
+          <p:cNvSpPr/>
+          <p:nvPr/>
+        </p:nvSpPr>
+        <p:spPr>
+          <a:xfrm>
+            <a:off x="7178871" y="4169664"/>
+            <a:ext cx="603504" cy="475488"/>
+          </a:xfrm>
+          <a:prstGeom prst="rect">
+            <a:avLst>
+              <a:gd name="adj" fmla="val 7692"/>
+            </a:avLst>
+          </a:prstGeom>
+          <a:solidFill>
+            <a:srgbClr val="FFFFFF"/>
+          </a:solidFill>
+          <a:ln w="12700">
+            <a:solidFill>
+              <a:srgbClr val="DB2777"/>
+            </a:solidFill>
+            <a:prstDash val="solid"/>
+          </a:ln>
+        </p:spPr>
+      </p:sp>
+      <p:sp>
+        <p:nvSpPr>
+          <p:cNvPr id="62" name="Text 60"/>
+          <p:cNvSpPr/>
+          <p:nvPr/>
+        </p:nvSpPr>
+        <p:spPr>
+          <a:xfrm>
+            <a:off x="7178871" y="4169664"/>
+            <a:ext cx="603504" cy="475488"/>
+          </a:xfrm>
+          <a:prstGeom prst="rect">
+            <a:avLst/>
+          </a:prstGeom>
+          <a:noFill/>
+          <a:ln/>
+        </p:spPr>
+        <p:txBody>
+          <a:bodyPr wrap="square" lIns="0" tIns="0" rIns="0" bIns="0" rtlCol="0" anchor="ctr"/>
+          <a:lstStyle/>
+          <a:p>
+            <a:pPr algn="ctr" indent="0" marL="0">
+              <a:buNone/>
+            </a:pPr>
+            <a:r>
+              <a:rPr lang="en-US" sz="900" b="1" dirty="0">
+                <a:solidFill>
+                  <a:srgbClr val="9D174D"/>
+                </a:solidFill>
+                <a:latin typeface="Trebuchet MS" pitchFamily="34" charset="0"/>
+                <a:ea typeface="Trebuchet MS" pitchFamily="34" charset="-122"/>
+                <a:cs typeface="Trebuchet MS" pitchFamily="34" charset="-120"/>
+              </a:rPr>
+              <a:t>e</a:t>
+            </a:r>
+            <a:endParaRPr lang="en-US" sz="900" dirty="0"/>
+          </a:p>
+        </p:txBody>
+      </p:sp>
+      <p:sp>
+        <p:nvSpPr>
+          <p:cNvPr id="63" name="Shape 61"/>
+          <p:cNvSpPr/>
+          <p:nvPr/>
+        </p:nvSpPr>
+        <p:spPr>
+          <a:xfrm>
+            <a:off x="7832252" y="4169664"/>
+            <a:ext cx="603504" cy="475488"/>
+          </a:xfrm>
+          <a:prstGeom prst="rect">
+            <a:avLst>
+              <a:gd name="adj" fmla="val 7692"/>
+            </a:avLst>
+          </a:prstGeom>
+          <a:solidFill>
+            <a:srgbClr val="FFFFFF"/>
+          </a:solidFill>
+          <a:ln w="12700">
+            <a:solidFill>
+              <a:srgbClr val="DB2777"/>
+            </a:solidFill>
+            <a:prstDash val="solid"/>
+          </a:ln>
+        </p:spPr>
+      </p:sp>
+      <p:sp>
+        <p:nvSpPr>
+          <p:cNvPr id="64" name="Text 62"/>
+          <p:cNvSpPr/>
+          <p:nvPr/>
+        </p:nvSpPr>
+        <p:spPr>
+          <a:xfrm>
+            <a:off x="7832252" y="4169664"/>
+            <a:ext cx="603504" cy="475488"/>
           </a:xfrm>
           <a:prstGeom prst="rect">
             <a:avLst/>
@@ -28390,7 +28405,7 @@
                 <a:ea typeface="Calibri" pitchFamily="34" charset="-122"/>
                 <a:cs typeface="Calibri" pitchFamily="34" charset="-120"/>
               </a:rPr>
-              <a:t>Word Labs  •  wordlabs.app  •  Root: 'pend' = to hang, hang down</a:t>
+              <a:t>Word Labs  •  wordlabs.app  •  Root: 'pend' = hang, hang down, weigh</a:t>
             </a:r>
             <a:endParaRPr lang="en-US" sz="800" dirty="0"/>
           </a:p>
@@ -28529,7 +28544,7 @@
                 <a:ea typeface="Trebuchet MS" pitchFamily="34" charset="-122"/>
                 <a:cs typeface="Trebuchet MS" pitchFamily="34" charset="-120"/>
               </a:rPr>
-              <a:t>append</a:t>
+              <a:t>suspend</a:t>
             </a:r>
             <a:endParaRPr lang="en-US" sz="2800" dirty="0"/>
           </a:p>
@@ -29217,7 +29232,7 @@
                 <a:ea typeface="Calibri" pitchFamily="34" charset="-122"/>
                 <a:cs typeface="Calibri" pitchFamily="34" charset="-120"/>
               </a:rPr>
-              <a:t>Word Labs  •  wordlabs.app  •  Root: 'pend' = to hang, hang down</a:t>
+              <a:t>Word Labs  •  wordlabs.app  •  Root: 'pend' = hang, hang down, weigh</a:t>
             </a:r>
             <a:endParaRPr lang="en-US" sz="800" dirty="0"/>
           </a:p>
@@ -29356,7 +29371,7 @@
                 <a:ea typeface="Trebuchet MS" pitchFamily="34" charset="-122"/>
                 <a:cs typeface="Trebuchet MS" pitchFamily="34" charset="-120"/>
               </a:rPr>
-              <a:t>append</a:t>
+              <a:t>suspend</a:t>
             </a:r>
             <a:endParaRPr lang="en-US" sz="2800" dirty="0"/>
           </a:p>
@@ -29495,7 +29510,7 @@
                 <a:ea typeface="Trebuchet MS" pitchFamily="34" charset="-122"/>
                 <a:cs typeface="Trebuchet MS" pitchFamily="34" charset="-120"/>
               </a:rPr>
-              <a:t>ap</a:t>
+              <a:t>sus</a:t>
             </a:r>
             <a:endParaRPr lang="en-US" sz="1300" dirty="0"/>
           </a:p>
@@ -29534,7 +29549,7 @@
                 <a:ea typeface="Calibri" pitchFamily="34" charset="-122"/>
                 <a:cs typeface="Calibri" pitchFamily="34" charset="-120"/>
               </a:rPr>
-              <a:t>to, toward</a:t>
+              <a:t>up, under, from below</a:t>
             </a:r>
             <a:endParaRPr lang="en-US" sz="850" dirty="0"/>
           </a:p>
@@ -29542,46 +29557,7 @@
       </p:sp>
       <p:sp>
         <p:nvSpPr>
-          <p:cNvPr id="19" name="Text 17"/>
-          <p:cNvSpPr/>
-          <p:nvPr/>
-        </p:nvSpPr>
-        <p:spPr>
-          <a:xfrm>
-            <a:off x="2938272" y="2752344"/>
-            <a:ext cx="1828800" cy="182880"/>
-          </a:xfrm>
-          <a:prstGeom prst="rect">
-            <a:avLst/>
-          </a:prstGeom>
-          <a:noFill/>
-          <a:ln/>
-        </p:spPr>
-        <p:txBody>
-          <a:bodyPr wrap="square" lIns="0" tIns="0" rIns="0" bIns="0" rtlCol="0" anchor="t"/>
-          <a:lstStyle/>
-          <a:p>
-            <a:pPr algn="ctr" indent="0" marL="0">
-              <a:buNone/>
-            </a:pPr>
-            <a:r>
-              <a:rPr lang="en-US" sz="700" i="1" dirty="0">
-                <a:solidFill>
-                  <a:srgbClr val="94A3B8"/>
-                </a:solidFill>
-                <a:latin typeface="Calibri" pitchFamily="34" charset="0"/>
-                <a:ea typeface="Calibri" pitchFamily="34" charset="-122"/>
-                <a:cs typeface="Calibri" pitchFamily="34" charset="-120"/>
-              </a:rPr>
-              <a:t>ad → ap before 'p'</a:t>
-            </a:r>
-            <a:endParaRPr lang="en-US" sz="700" dirty="0"/>
-          </a:p>
-        </p:txBody>
-      </p:sp>
-      <p:sp>
-        <p:nvSpPr>
-          <p:cNvPr id="20" name="Shape 18"/>
+          <p:cNvPr id="19" name="Shape 17"/>
           <p:cNvSpPr/>
           <p:nvPr/>
         </p:nvSpPr>
@@ -29615,7 +29591,7 @@
       </p:sp>
       <p:sp>
         <p:nvSpPr>
-          <p:cNvPr id="21" name="Text 19"/>
+          <p:cNvPr id="20" name="Text 18"/>
           <p:cNvSpPr/>
           <p:nvPr/>
         </p:nvSpPr>
@@ -29654,7 +29630,7 @@
       </p:sp>
       <p:sp>
         <p:nvSpPr>
-          <p:cNvPr id="22" name="Text 20"/>
+          <p:cNvPr id="21" name="Text 19"/>
           <p:cNvSpPr/>
           <p:nvPr/>
         </p:nvSpPr>
@@ -29685,7 +29661,7 @@
                 <a:ea typeface="Calibri" pitchFamily="34" charset="-122"/>
                 <a:cs typeface="Calibri" pitchFamily="34" charset="-120"/>
               </a:rPr>
-              <a:t>to hang</a:t>
+              <a:t>hang</a:t>
             </a:r>
             <a:endParaRPr lang="en-US" sz="850" dirty="0"/>
           </a:p>
@@ -29693,7 +29669,7 @@
       </p:sp>
       <p:sp>
         <p:nvSpPr>
-          <p:cNvPr id="23" name="Shape 21"/>
+          <p:cNvPr id="22" name="Shape 20"/>
           <p:cNvSpPr/>
           <p:nvPr/>
         </p:nvSpPr>
@@ -29720,7 +29696,7 @@
       </p:sp>
       <p:sp>
         <p:nvSpPr>
-          <p:cNvPr id="24" name="Text 22"/>
+          <p:cNvPr id="23" name="Text 21"/>
           <p:cNvSpPr/>
           <p:nvPr/>
         </p:nvSpPr>
@@ -29759,7 +29735,7 @@
       </p:sp>
       <p:sp>
         <p:nvSpPr>
-          <p:cNvPr id="25" name="Shape 23"/>
+          <p:cNvPr id="24" name="Shape 22"/>
           <p:cNvSpPr/>
           <p:nvPr/>
         </p:nvSpPr>
@@ -29786,7 +29762,7 @@
       </p:sp>
       <p:sp>
         <p:nvSpPr>
-          <p:cNvPr id="26" name="Text 24"/>
+          <p:cNvPr id="25" name="Text 23"/>
           <p:cNvSpPr/>
           <p:nvPr/>
         </p:nvSpPr>
@@ -29825,7 +29801,7 @@
       </p:sp>
       <p:sp>
         <p:nvSpPr>
-          <p:cNvPr id="27" name="Shape 25"/>
+          <p:cNvPr id="26" name="Shape 24"/>
           <p:cNvSpPr/>
           <p:nvPr/>
         </p:nvSpPr>
@@ -29852,7 +29828,7 @@
       </p:sp>
       <p:sp>
         <p:nvSpPr>
-          <p:cNvPr id="28" name="Text 26"/>
+          <p:cNvPr id="27" name="Text 25"/>
           <p:cNvSpPr/>
           <p:nvPr/>
         </p:nvSpPr>
@@ -29891,7 +29867,7 @@
       </p:sp>
       <p:sp>
         <p:nvSpPr>
-          <p:cNvPr id="29" name="Shape 27"/>
+          <p:cNvPr id="28" name="Shape 26"/>
           <p:cNvSpPr/>
           <p:nvPr/>
         </p:nvSpPr>
@@ -29918,7 +29894,7 @@
       </p:sp>
       <p:sp>
         <p:nvSpPr>
-          <p:cNvPr id="30" name="Text 28"/>
+          <p:cNvPr id="29" name="Text 27"/>
           <p:cNvSpPr/>
           <p:nvPr/>
         </p:nvSpPr>
@@ -30241,7 +30217,7 @@
                 <a:ea typeface="Calibri" pitchFamily="34" charset="-122"/>
                 <a:cs typeface="Calibri" pitchFamily="34" charset="-120"/>
               </a:rPr>
-              <a:t>Word Labs  •  wordlabs.app  •  Root: 'pend' = to hang, hang down</a:t>
+              <a:t>Word Labs  •  wordlabs.app  •  Root: 'pend' = hang, hang down, weigh</a:t>
             </a:r>
             <a:endParaRPr lang="en-US" sz="800" dirty="0"/>
           </a:p>
@@ -30380,7 +30356,7 @@
                 <a:ea typeface="Trebuchet MS" pitchFamily="34" charset="-122"/>
                 <a:cs typeface="Trebuchet MS" pitchFamily="34" charset="-120"/>
               </a:rPr>
-              <a:t>append</a:t>
+              <a:t>suspend</a:t>
             </a:r>
             <a:endParaRPr lang="en-US" sz="2800" dirty="0"/>
           </a:p>
@@ -30519,7 +30495,7 @@
                 <a:ea typeface="Trebuchet MS" pitchFamily="34" charset="-122"/>
                 <a:cs typeface="Trebuchet MS" pitchFamily="34" charset="-120"/>
               </a:rPr>
-              <a:t>ap</a:t>
+              <a:t>sus</a:t>
             </a:r>
             <a:endParaRPr lang="en-US" sz="1300" dirty="0"/>
           </a:p>
@@ -30558,7 +30534,7 @@
                 <a:ea typeface="Calibri" pitchFamily="34" charset="-122"/>
                 <a:cs typeface="Calibri" pitchFamily="34" charset="-120"/>
               </a:rPr>
-              <a:t>to, toward</a:t>
+              <a:t>up, under, from below</a:t>
             </a:r>
             <a:endParaRPr lang="en-US" sz="850" dirty="0"/>
           </a:p>
@@ -30566,46 +30542,7 @@
       </p:sp>
       <p:sp>
         <p:nvSpPr>
-          <p:cNvPr id="19" name="Text 17"/>
-          <p:cNvSpPr/>
-          <p:nvPr/>
-        </p:nvSpPr>
-        <p:spPr>
-          <a:xfrm>
-            <a:off x="2938272" y="2752344"/>
-            <a:ext cx="1828800" cy="182880"/>
-          </a:xfrm>
-          <a:prstGeom prst="rect">
-            <a:avLst/>
-          </a:prstGeom>
-          <a:noFill/>
-          <a:ln/>
-        </p:spPr>
-        <p:txBody>
-          <a:bodyPr wrap="square" lIns="0" tIns="0" rIns="0" bIns="0" rtlCol="0" anchor="t"/>
-          <a:lstStyle/>
-          <a:p>
-            <a:pPr algn="ctr" indent="0" marL="0">
-              <a:buNone/>
-            </a:pPr>
-            <a:r>
-              <a:rPr lang="en-US" sz="700" i="1" dirty="0">
-                <a:solidFill>
-                  <a:srgbClr val="94A3B8"/>
-                </a:solidFill>
-                <a:latin typeface="Calibri" pitchFamily="34" charset="0"/>
-                <a:ea typeface="Calibri" pitchFamily="34" charset="-122"/>
-                <a:cs typeface="Calibri" pitchFamily="34" charset="-120"/>
-              </a:rPr>
-              <a:t>ad → ap before 'p'</a:t>
-            </a:r>
-            <a:endParaRPr lang="en-US" sz="700" dirty="0"/>
-          </a:p>
-        </p:txBody>
-      </p:sp>
-      <p:sp>
-        <p:nvSpPr>
-          <p:cNvPr id="20" name="Shape 18"/>
+          <p:cNvPr id="19" name="Shape 17"/>
           <p:cNvSpPr/>
           <p:nvPr/>
         </p:nvSpPr>
@@ -30639,7 +30576,7 @@
       </p:sp>
       <p:sp>
         <p:nvSpPr>
-          <p:cNvPr id="21" name="Text 19"/>
+          <p:cNvPr id="20" name="Text 18"/>
           <p:cNvSpPr/>
           <p:nvPr/>
         </p:nvSpPr>
@@ -30678,7 +30615,7 @@
       </p:sp>
       <p:sp>
         <p:nvSpPr>
-          <p:cNvPr id="22" name="Text 20"/>
+          <p:cNvPr id="21" name="Text 19"/>
           <p:cNvSpPr/>
           <p:nvPr/>
         </p:nvSpPr>
@@ -30709,7 +30646,7 @@
                 <a:ea typeface="Calibri" pitchFamily="34" charset="-122"/>
                 <a:cs typeface="Calibri" pitchFamily="34" charset="-120"/>
               </a:rPr>
-              <a:t>to hang</a:t>
+              <a:t>hang</a:t>
             </a:r>
             <a:endParaRPr lang="en-US" sz="850" dirty="0"/>
           </a:p>
@@ -30717,7 +30654,7 @@
       </p:sp>
       <p:sp>
         <p:nvSpPr>
-          <p:cNvPr id="23" name="Shape 21"/>
+          <p:cNvPr id="22" name="Shape 20"/>
           <p:cNvSpPr/>
           <p:nvPr/>
         </p:nvSpPr>
@@ -30744,7 +30681,7 @@
       </p:sp>
       <p:sp>
         <p:nvSpPr>
-          <p:cNvPr id="24" name="Text 22"/>
+          <p:cNvPr id="23" name="Text 21"/>
           <p:cNvSpPr/>
           <p:nvPr/>
         </p:nvSpPr>
@@ -30783,7 +30720,7 @@
       </p:sp>
       <p:sp>
         <p:nvSpPr>
-          <p:cNvPr id="25" name="Shape 23"/>
+          <p:cNvPr id="24" name="Shape 22"/>
           <p:cNvSpPr/>
           <p:nvPr/>
         </p:nvSpPr>
@@ -30810,7 +30747,7 @@
       </p:sp>
       <p:sp>
         <p:nvSpPr>
-          <p:cNvPr id="26" name="Shape 24"/>
+          <p:cNvPr id="25" name="Shape 23"/>
           <p:cNvSpPr/>
           <p:nvPr/>
         </p:nvSpPr>
@@ -30837,7 +30774,7 @@
       </p:sp>
       <p:sp>
         <p:nvSpPr>
-          <p:cNvPr id="27" name="Text 25"/>
+          <p:cNvPr id="26" name="Text 24"/>
           <p:cNvSpPr/>
           <p:nvPr/>
         </p:nvSpPr>
@@ -30868,7 +30805,7 @@
                 <a:ea typeface="Trebuchet MS" pitchFamily="34" charset="-122"/>
                 <a:cs typeface="Trebuchet MS" pitchFamily="34" charset="-120"/>
               </a:rPr>
-              <a:t>ap</a:t>
+              <a:t>sus</a:t>
             </a:r>
             <a:endParaRPr lang="en-US" sz="1400" dirty="0"/>
           </a:p>
@@ -30876,7 +30813,7 @@
       </p:sp>
       <p:sp>
         <p:nvSpPr>
-          <p:cNvPr id="28" name="Text 26"/>
+          <p:cNvPr id="27" name="Text 25"/>
           <p:cNvSpPr/>
           <p:nvPr/>
         </p:nvSpPr>
@@ -30915,7 +30852,7 @@
       </p:sp>
       <p:sp>
         <p:nvSpPr>
-          <p:cNvPr id="29" name="Shape 27"/>
+          <p:cNvPr id="28" name="Shape 26"/>
           <p:cNvSpPr/>
           <p:nvPr/>
         </p:nvSpPr>
@@ -30942,7 +30879,7 @@
       </p:sp>
       <p:sp>
         <p:nvSpPr>
-          <p:cNvPr id="30" name="Text 28"/>
+          <p:cNvPr id="29" name="Text 27"/>
           <p:cNvSpPr/>
           <p:nvPr/>
         </p:nvSpPr>
@@ -30981,7 +30918,7 @@
       </p:sp>
       <p:sp>
         <p:nvSpPr>
-          <p:cNvPr id="31" name="Shape 29"/>
+          <p:cNvPr id="30" name="Shape 28"/>
           <p:cNvSpPr/>
           <p:nvPr/>
         </p:nvSpPr>
@@ -31008,7 +30945,7 @@
       </p:sp>
       <p:sp>
         <p:nvSpPr>
-          <p:cNvPr id="32" name="Text 30"/>
+          <p:cNvPr id="31" name="Text 29"/>
           <p:cNvSpPr/>
           <p:nvPr/>
         </p:nvSpPr>
@@ -31047,7 +30984,7 @@
       </p:sp>
       <p:sp>
         <p:nvSpPr>
-          <p:cNvPr id="33" name="Shape 31"/>
+          <p:cNvPr id="32" name="Shape 30"/>
           <p:cNvSpPr/>
           <p:nvPr/>
         </p:nvSpPr>
@@ -31074,7 +31011,7 @@
       </p:sp>
       <p:sp>
         <p:nvSpPr>
-          <p:cNvPr id="34" name="Text 32"/>
+          <p:cNvPr id="33" name="Text 31"/>
           <p:cNvSpPr/>
           <p:nvPr/>
         </p:nvSpPr>
@@ -31397,7 +31334,7 @@
                 <a:ea typeface="Calibri" pitchFamily="34" charset="-122"/>
                 <a:cs typeface="Calibri" pitchFamily="34" charset="-120"/>
               </a:rPr>
-              <a:t>Word Labs  •  wordlabs.app  •  Root: 'pend' = to hang, hang down</a:t>
+              <a:t>Word Labs  •  wordlabs.app  •  Root: 'pend' = hang, hang down, weigh</a:t>
             </a:r>
             <a:endParaRPr lang="en-US" sz="800" dirty="0"/>
           </a:p>
@@ -31536,7 +31473,7 @@
                 <a:ea typeface="Trebuchet MS" pitchFamily="34" charset="-122"/>
                 <a:cs typeface="Trebuchet MS" pitchFamily="34" charset="-120"/>
               </a:rPr>
-              <a:t>append</a:t>
+              <a:t>suspend</a:t>
             </a:r>
             <a:endParaRPr lang="en-US" sz="2800" dirty="0"/>
           </a:p>
@@ -31675,7 +31612,7 @@
                 <a:ea typeface="Trebuchet MS" pitchFamily="34" charset="-122"/>
                 <a:cs typeface="Trebuchet MS" pitchFamily="34" charset="-120"/>
               </a:rPr>
-              <a:t>ap</a:t>
+              <a:t>sus</a:t>
             </a:r>
             <a:endParaRPr lang="en-US" sz="1300" dirty="0"/>
           </a:p>
@@ -31714,7 +31651,7 @@
                 <a:ea typeface="Calibri" pitchFamily="34" charset="-122"/>
                 <a:cs typeface="Calibri" pitchFamily="34" charset="-120"/>
               </a:rPr>
-              <a:t>to, toward</a:t>
+              <a:t>up, under, from below</a:t>
             </a:r>
             <a:endParaRPr lang="en-US" sz="850" dirty="0"/>
           </a:p>
@@ -31722,46 +31659,7 @@
       </p:sp>
       <p:sp>
         <p:nvSpPr>
-          <p:cNvPr id="19" name="Text 17"/>
-          <p:cNvSpPr/>
-          <p:nvPr/>
-        </p:nvSpPr>
-        <p:spPr>
-          <a:xfrm>
-            <a:off x="2938272" y="2752344"/>
-            <a:ext cx="1828800" cy="182880"/>
-          </a:xfrm>
-          <a:prstGeom prst="rect">
-            <a:avLst/>
-          </a:prstGeom>
-          <a:noFill/>
-          <a:ln/>
-        </p:spPr>
-        <p:txBody>
-          <a:bodyPr wrap="square" lIns="0" tIns="0" rIns="0" bIns="0" rtlCol="0" anchor="t"/>
-          <a:lstStyle/>
-          <a:p>
-            <a:pPr algn="ctr" indent="0" marL="0">
-              <a:buNone/>
-            </a:pPr>
-            <a:r>
-              <a:rPr lang="en-US" sz="700" i="1" dirty="0">
-                <a:solidFill>
-                  <a:srgbClr val="94A3B8"/>
-                </a:solidFill>
-                <a:latin typeface="Calibri" pitchFamily="34" charset="0"/>
-                <a:ea typeface="Calibri" pitchFamily="34" charset="-122"/>
-                <a:cs typeface="Calibri" pitchFamily="34" charset="-120"/>
-              </a:rPr>
-              <a:t>ad → ap before 'p'</a:t>
-            </a:r>
-            <a:endParaRPr lang="en-US" sz="700" dirty="0"/>
-          </a:p>
-        </p:txBody>
-      </p:sp>
-      <p:sp>
-        <p:nvSpPr>
-          <p:cNvPr id="20" name="Shape 18"/>
+          <p:cNvPr id="19" name="Shape 17"/>
           <p:cNvSpPr/>
           <p:nvPr/>
         </p:nvSpPr>
@@ -31795,7 +31693,7 @@
       </p:sp>
       <p:sp>
         <p:nvSpPr>
-          <p:cNvPr id="21" name="Text 19"/>
+          <p:cNvPr id="20" name="Text 18"/>
           <p:cNvSpPr/>
           <p:nvPr/>
         </p:nvSpPr>
@@ -31834,7 +31732,7 @@
       </p:sp>
       <p:sp>
         <p:nvSpPr>
-          <p:cNvPr id="22" name="Text 20"/>
+          <p:cNvPr id="21" name="Text 19"/>
           <p:cNvSpPr/>
           <p:nvPr/>
         </p:nvSpPr>
@@ -31865,7 +31763,7 @@
                 <a:ea typeface="Calibri" pitchFamily="34" charset="-122"/>
                 <a:cs typeface="Calibri" pitchFamily="34" charset="-120"/>
               </a:rPr>
-              <a:t>to hang</a:t>
+              <a:t>hang</a:t>
             </a:r>
             <a:endParaRPr lang="en-US" sz="850" dirty="0"/>
           </a:p>
@@ -31873,7 +31771,7 @@
       </p:sp>
       <p:sp>
         <p:nvSpPr>
-          <p:cNvPr id="23" name="Shape 21"/>
+          <p:cNvPr id="22" name="Shape 20"/>
           <p:cNvSpPr/>
           <p:nvPr/>
         </p:nvSpPr>
@@ -31900,7 +31798,7 @@
       </p:sp>
       <p:sp>
         <p:nvSpPr>
-          <p:cNvPr id="24" name="Text 22"/>
+          <p:cNvPr id="23" name="Text 21"/>
           <p:cNvSpPr/>
           <p:nvPr/>
         </p:nvSpPr>
@@ -31939,7 +31837,7 @@
       </p:sp>
       <p:sp>
         <p:nvSpPr>
-          <p:cNvPr id="25" name="Shape 23"/>
+          <p:cNvPr id="24" name="Shape 22"/>
           <p:cNvSpPr/>
           <p:nvPr/>
         </p:nvSpPr>
@@ -31966,7 +31864,7 @@
       </p:sp>
       <p:sp>
         <p:nvSpPr>
-          <p:cNvPr id="26" name="Shape 24"/>
+          <p:cNvPr id="25" name="Shape 23"/>
           <p:cNvSpPr/>
           <p:nvPr/>
         </p:nvSpPr>
@@ -31993,7 +31891,7 @@
       </p:sp>
       <p:sp>
         <p:nvSpPr>
-          <p:cNvPr id="27" name="Text 25"/>
+          <p:cNvPr id="26" name="Text 24"/>
           <p:cNvSpPr/>
           <p:nvPr/>
         </p:nvSpPr>
@@ -32024,7 +31922,7 @@
                 <a:ea typeface="Trebuchet MS" pitchFamily="34" charset="-122"/>
                 <a:cs typeface="Trebuchet MS" pitchFamily="34" charset="-120"/>
               </a:rPr>
-              <a:t>ap</a:t>
+              <a:t>sus</a:t>
             </a:r>
             <a:endParaRPr lang="en-US" sz="1400" dirty="0"/>
           </a:p>
@@ -32032,7 +31930,7 @@
       </p:sp>
       <p:sp>
         <p:nvSpPr>
-          <p:cNvPr id="28" name="Text 26"/>
+          <p:cNvPr id="27" name="Text 25"/>
           <p:cNvSpPr/>
           <p:nvPr/>
         </p:nvSpPr>
@@ -32071,7 +31969,7 @@
       </p:sp>
       <p:sp>
         <p:nvSpPr>
-          <p:cNvPr id="29" name="Shape 27"/>
+          <p:cNvPr id="28" name="Shape 26"/>
           <p:cNvSpPr/>
           <p:nvPr/>
         </p:nvSpPr>
@@ -32098,7 +31996,7 @@
       </p:sp>
       <p:sp>
         <p:nvSpPr>
-          <p:cNvPr id="30" name="Text 28"/>
+          <p:cNvPr id="29" name="Text 27"/>
           <p:cNvSpPr/>
           <p:nvPr/>
         </p:nvSpPr>
@@ -32137,7 +32035,7 @@
       </p:sp>
       <p:sp>
         <p:nvSpPr>
-          <p:cNvPr id="31" name="Shape 29"/>
+          <p:cNvPr id="30" name="Shape 28"/>
           <p:cNvSpPr/>
           <p:nvPr/>
         </p:nvSpPr>
@@ -32164,7 +32062,7 @@
       </p:sp>
       <p:sp>
         <p:nvSpPr>
-          <p:cNvPr id="32" name="Text 30"/>
+          <p:cNvPr id="31" name="Text 29"/>
           <p:cNvSpPr/>
           <p:nvPr/>
         </p:nvSpPr>
@@ -32203,7 +32101,7 @@
       </p:sp>
       <p:sp>
         <p:nvSpPr>
-          <p:cNvPr id="33" name="Shape 31"/>
+          <p:cNvPr id="32" name="Shape 30"/>
           <p:cNvSpPr/>
           <p:nvPr/>
         </p:nvSpPr>
@@ -32230,13 +32128,13 @@
       </p:sp>
       <p:sp>
         <p:nvSpPr>
-          <p:cNvPr id="34" name="Shape 32"/>
-          <p:cNvSpPr/>
-          <p:nvPr/>
-        </p:nvSpPr>
-        <p:spPr>
-          <a:xfrm>
-            <a:off x="2670048" y="4169664"/>
+          <p:cNvPr id="33" name="Shape 31"/>
+          <p:cNvSpPr/>
+          <p:nvPr/>
+        </p:nvSpPr>
+        <p:spPr>
+          <a:xfrm>
+            <a:off x="2254649" y="4169664"/>
             <a:ext cx="685800" cy="475488"/>
           </a:xfrm>
           <a:prstGeom prst="rect">
@@ -32257,13 +32155,13 @@
       </p:sp>
       <p:sp>
         <p:nvSpPr>
-          <p:cNvPr id="35" name="Text 33"/>
-          <p:cNvSpPr/>
-          <p:nvPr/>
-        </p:nvSpPr>
-        <p:spPr>
-          <a:xfrm>
-            <a:off x="2670048" y="4169664"/>
+          <p:cNvPr id="34" name="Text 32"/>
+          <p:cNvSpPr/>
+          <p:nvPr/>
+        </p:nvSpPr>
+        <p:spPr>
+          <a:xfrm>
+            <a:off x="2254649" y="4169664"/>
             <a:ext cx="685800" cy="475488"/>
           </a:xfrm>
           <a:prstGeom prst="rect">
@@ -32288,7 +32186,7 @@
                 <a:ea typeface="Trebuchet MS" pitchFamily="34" charset="-122"/>
                 <a:cs typeface="Trebuchet MS" pitchFamily="34" charset="-120"/>
               </a:rPr>
-              <a:t>a</a:t>
+              <a:t>s</a:t>
             </a:r>
             <a:endParaRPr lang="en-US" sz="900" dirty="0"/>
           </a:p>
@@ -32296,13 +32194,13 @@
       </p:sp>
       <p:sp>
         <p:nvSpPr>
-          <p:cNvPr id="36" name="Shape 34"/>
-          <p:cNvSpPr/>
-          <p:nvPr/>
-        </p:nvSpPr>
-        <p:spPr>
-          <a:xfrm>
-            <a:off x="4123944" y="4169664"/>
+          <p:cNvPr id="35" name="Shape 33"/>
+          <p:cNvSpPr/>
+          <p:nvPr/>
+        </p:nvSpPr>
+        <p:spPr>
+          <a:xfrm>
+            <a:off x="3293146" y="4169664"/>
             <a:ext cx="685800" cy="475488"/>
           </a:xfrm>
           <a:prstGeom prst="rect">
@@ -32323,13 +32221,13 @@
       </p:sp>
       <p:sp>
         <p:nvSpPr>
-          <p:cNvPr id="37" name="Text 35"/>
-          <p:cNvSpPr/>
-          <p:nvPr/>
-        </p:nvSpPr>
-        <p:spPr>
-          <a:xfrm>
-            <a:off x="4123944" y="4169664"/>
+          <p:cNvPr id="36" name="Text 34"/>
+          <p:cNvSpPr/>
+          <p:nvPr/>
+        </p:nvSpPr>
+        <p:spPr>
+          <a:xfrm>
+            <a:off x="3293146" y="4169664"/>
             <a:ext cx="685800" cy="475488"/>
           </a:xfrm>
           <a:prstGeom prst="rect">
@@ -32354,7 +32252,7 @@
                 <a:ea typeface="Trebuchet MS" pitchFamily="34" charset="-122"/>
                 <a:cs typeface="Trebuchet MS" pitchFamily="34" charset="-120"/>
               </a:rPr>
-              <a:t>pp</a:t>
+              <a:t>u</a:t>
             </a:r>
             <a:endParaRPr lang="en-US" sz="900" dirty="0"/>
           </a:p>
@@ -32362,13 +32260,13 @@
       </p:sp>
       <p:sp>
         <p:nvSpPr>
-          <p:cNvPr id="38" name="Shape 36"/>
-          <p:cNvSpPr/>
-          <p:nvPr/>
-        </p:nvSpPr>
-        <p:spPr>
-          <a:xfrm>
-            <a:off x="5577840" y="4169664"/>
+          <p:cNvPr id="37" name="Shape 35"/>
+          <p:cNvSpPr/>
+          <p:nvPr/>
+        </p:nvSpPr>
+        <p:spPr>
+          <a:xfrm>
+            <a:off x="4331643" y="4169664"/>
             <a:ext cx="685800" cy="475488"/>
           </a:xfrm>
           <a:prstGeom prst="rect">
@@ -32389,13 +32287,13 @@
       </p:sp>
       <p:sp>
         <p:nvSpPr>
-          <p:cNvPr id="39" name="Text 37"/>
-          <p:cNvSpPr/>
-          <p:nvPr/>
-        </p:nvSpPr>
-        <p:spPr>
-          <a:xfrm>
-            <a:off x="5577840" y="4169664"/>
+          <p:cNvPr id="38" name="Text 36"/>
+          <p:cNvSpPr/>
+          <p:nvPr/>
+        </p:nvSpPr>
+        <p:spPr>
+          <a:xfrm>
+            <a:off x="4331643" y="4169664"/>
             <a:ext cx="685800" cy="475488"/>
           </a:xfrm>
           <a:prstGeom prst="rect">
@@ -32420,7 +32318,7 @@
                 <a:ea typeface="Trebuchet MS" pitchFamily="34" charset="-122"/>
                 <a:cs typeface="Trebuchet MS" pitchFamily="34" charset="-120"/>
               </a:rPr>
-              <a:t>e</a:t>
+              <a:t>s</a:t>
             </a:r>
             <a:endParaRPr lang="en-US" sz="900" dirty="0"/>
           </a:p>
@@ -32428,13 +32326,13 @@
       </p:sp>
       <p:sp>
         <p:nvSpPr>
-          <p:cNvPr id="40" name="Shape 38"/>
-          <p:cNvSpPr/>
-          <p:nvPr/>
-        </p:nvSpPr>
-        <p:spPr>
-          <a:xfrm>
-            <a:off x="7031736" y="4169664"/>
+          <p:cNvPr id="39" name="Shape 37"/>
+          <p:cNvSpPr/>
+          <p:nvPr/>
+        </p:nvSpPr>
+        <p:spPr>
+          <a:xfrm>
+            <a:off x="5370141" y="4169664"/>
             <a:ext cx="685800" cy="475488"/>
           </a:xfrm>
           <a:prstGeom prst="rect">
@@ -32455,13 +32353,145 @@
       </p:sp>
       <p:sp>
         <p:nvSpPr>
-          <p:cNvPr id="41" name="Text 39"/>
-          <p:cNvSpPr/>
-          <p:nvPr/>
-        </p:nvSpPr>
-        <p:spPr>
-          <a:xfrm>
-            <a:off x="7031736" y="4169664"/>
+          <p:cNvPr id="40" name="Text 38"/>
+          <p:cNvSpPr/>
+          <p:nvPr/>
+        </p:nvSpPr>
+        <p:spPr>
+          <a:xfrm>
+            <a:off x="5370141" y="4169664"/>
+            <a:ext cx="685800" cy="475488"/>
+          </a:xfrm>
+          <a:prstGeom prst="rect">
+            <a:avLst/>
+          </a:prstGeom>
+          <a:noFill/>
+          <a:ln/>
+        </p:spPr>
+        <p:txBody>
+          <a:bodyPr wrap="square" lIns="0" tIns="0" rIns="0" bIns="0" rtlCol="0" anchor="ctr"/>
+          <a:lstStyle/>
+          <a:p>
+            <a:pPr algn="ctr" indent="0" marL="0">
+              <a:buNone/>
+            </a:pPr>
+            <a:r>
+              <a:rPr lang="en-US" sz="900" b="1" dirty="0">
+                <a:solidFill>
+                  <a:srgbClr val="9D174D"/>
+                </a:solidFill>
+                <a:latin typeface="Trebuchet MS" pitchFamily="34" charset="0"/>
+                <a:ea typeface="Trebuchet MS" pitchFamily="34" charset="-122"/>
+                <a:cs typeface="Trebuchet MS" pitchFamily="34" charset="-120"/>
+              </a:rPr>
+              <a:t>p</a:t>
+            </a:r>
+            <a:endParaRPr lang="en-US" sz="900" dirty="0"/>
+          </a:p>
+        </p:txBody>
+      </p:sp>
+      <p:sp>
+        <p:nvSpPr>
+          <p:cNvPr id="41" name="Shape 39"/>
+          <p:cNvSpPr/>
+          <p:nvPr/>
+        </p:nvSpPr>
+        <p:spPr>
+          <a:xfrm>
+            <a:off x="6408638" y="4169664"/>
+            <a:ext cx="685800" cy="475488"/>
+          </a:xfrm>
+          <a:prstGeom prst="rect">
+            <a:avLst>
+              <a:gd name="adj" fmla="val 7692"/>
+            </a:avLst>
+          </a:prstGeom>
+          <a:solidFill>
+            <a:srgbClr val="FFFFFF"/>
+          </a:solidFill>
+          <a:ln w="12700">
+            <a:solidFill>
+              <a:srgbClr val="DB2777"/>
+            </a:solidFill>
+            <a:prstDash val="solid"/>
+          </a:ln>
+        </p:spPr>
+      </p:sp>
+      <p:sp>
+        <p:nvSpPr>
+          <p:cNvPr id="42" name="Text 40"/>
+          <p:cNvSpPr/>
+          <p:nvPr/>
+        </p:nvSpPr>
+        <p:spPr>
+          <a:xfrm>
+            <a:off x="6408638" y="4169664"/>
+            <a:ext cx="685800" cy="475488"/>
+          </a:xfrm>
+          <a:prstGeom prst="rect">
+            <a:avLst/>
+          </a:prstGeom>
+          <a:noFill/>
+          <a:ln/>
+        </p:spPr>
+        <p:txBody>
+          <a:bodyPr wrap="square" lIns="0" tIns="0" rIns="0" bIns="0" rtlCol="0" anchor="ctr"/>
+          <a:lstStyle/>
+          <a:p>
+            <a:pPr algn="ctr" indent="0" marL="0">
+              <a:buNone/>
+            </a:pPr>
+            <a:r>
+              <a:rPr lang="en-US" sz="900" b="1" dirty="0">
+                <a:solidFill>
+                  <a:srgbClr val="9D174D"/>
+                </a:solidFill>
+                <a:latin typeface="Trebuchet MS" pitchFamily="34" charset="0"/>
+                <a:ea typeface="Trebuchet MS" pitchFamily="34" charset="-122"/>
+                <a:cs typeface="Trebuchet MS" pitchFamily="34" charset="-120"/>
+              </a:rPr>
+              <a:t>e</a:t>
+            </a:r>
+            <a:endParaRPr lang="en-US" sz="900" dirty="0"/>
+          </a:p>
+        </p:txBody>
+      </p:sp>
+      <p:sp>
+        <p:nvSpPr>
+          <p:cNvPr id="43" name="Shape 41"/>
+          <p:cNvSpPr/>
+          <p:nvPr/>
+        </p:nvSpPr>
+        <p:spPr>
+          <a:xfrm>
+            <a:off x="7447135" y="4169664"/>
+            <a:ext cx="685800" cy="475488"/>
+          </a:xfrm>
+          <a:prstGeom prst="rect">
+            <a:avLst>
+              <a:gd name="adj" fmla="val 7692"/>
+            </a:avLst>
+          </a:prstGeom>
+          <a:solidFill>
+            <a:srgbClr val="FFFFFF"/>
+          </a:solidFill>
+          <a:ln w="12700">
+            <a:solidFill>
+              <a:srgbClr val="DB2777"/>
+            </a:solidFill>
+            <a:prstDash val="solid"/>
+          </a:ln>
+        </p:spPr>
+      </p:sp>
+      <p:sp>
+        <p:nvSpPr>
+          <p:cNvPr id="44" name="Text 42"/>
+          <p:cNvSpPr/>
+          <p:nvPr/>
+        </p:nvSpPr>
+        <p:spPr>
+          <a:xfrm>
+            <a:off x="7447135" y="4169664"/>
             <a:ext cx="685800" cy="475488"/>
           </a:xfrm>
           <a:prstGeom prst="rect">
@@ -32778,7 +32808,7 @@
                 <a:ea typeface="Calibri" pitchFamily="34" charset="-122"/>
                 <a:cs typeface="Calibri" pitchFamily="34" charset="-120"/>
               </a:rPr>
-              <a:t>Word Labs  •  wordlabs.app  •  Root: 'pend' = to hang, hang down</a:t>
+              <a:t>Word Labs  •  wordlabs.app  •  Root: 'pend' = hang, hang down, weigh</a:t>
             </a:r>
             <a:endParaRPr lang="en-US" sz="800" dirty="0"/>
           </a:p>
@@ -33947,7 +33977,7 @@
                 <a:ea typeface="Calibri" pitchFamily="34" charset="-122"/>
                 <a:cs typeface="Calibri" pitchFamily="34" charset="-120"/>
               </a:rPr>
-              <a:t>Word Labs  •  wordlabs.app  •  Root: 'pend' = to hang, hang down</a:t>
+              <a:t>Word Labs  •  wordlabs.app  •  Root: 'pend' = hang, hang down, weigh</a:t>
             </a:r>
             <a:endParaRPr lang="en-US" sz="800" dirty="0"/>
           </a:p>
@@ -34682,7 +34712,7 @@
                 <a:ea typeface="Trebuchet MS" pitchFamily="34" charset="-122"/>
                 <a:cs typeface="Trebuchet MS" pitchFamily="34" charset="-120"/>
               </a:rPr>
-              <a:t>-ulum</a:t>
+              <a:t>-ent</a:t>
             </a:r>
             <a:endParaRPr lang="en-US" sz="1300" dirty="0"/>
           </a:p>
@@ -34746,7 +34776,7 @@
                 <a:ea typeface="Trebuchet MS" pitchFamily="34" charset="-122"/>
                 <a:cs typeface="Trebuchet MS" pitchFamily="34" charset="-120"/>
               </a:rPr>
-              <a:t>im-</a:t>
+              <a:t>ex-</a:t>
             </a:r>
             <a:endParaRPr lang="en-US" sz="1300" dirty="0"/>
           </a:p>
@@ -34835,7 +34865,7 @@
                 <a:ea typeface="Trebuchet MS" pitchFamily="34" charset="-122"/>
                 <a:cs typeface="Trebuchet MS" pitchFamily="34" charset="-120"/>
               </a:rPr>
-              <a:t>-ent</a:t>
+              <a:t>-ance</a:t>
             </a:r>
             <a:endParaRPr lang="en-US" sz="1300" dirty="0"/>
           </a:p>
@@ -34899,7 +34929,7 @@
                 <a:ea typeface="Trebuchet MS" pitchFamily="34" charset="-122"/>
                 <a:cs typeface="Trebuchet MS" pitchFamily="34" charset="-120"/>
               </a:rPr>
-              <a:t>com-</a:t>
+              <a:t>im-</a:t>
             </a:r>
             <a:endParaRPr lang="en-US" sz="1300" dirty="0"/>
           </a:p>
@@ -34988,7 +35018,7 @@
                 <a:ea typeface="Trebuchet MS" pitchFamily="34" charset="-122"/>
                 <a:cs typeface="Trebuchet MS" pitchFamily="34" charset="-120"/>
               </a:rPr>
-              <a:t>-ance</a:t>
+              <a:t>-ulum</a:t>
             </a:r>
             <a:endParaRPr lang="en-US" sz="1300" dirty="0"/>
           </a:p>
@@ -35093,7 +35123,7 @@
                 <a:ea typeface="Trebuchet MS" pitchFamily="34" charset="-122"/>
                 <a:cs typeface="Trebuchet MS" pitchFamily="34" charset="-120"/>
               </a:rPr>
-              <a:t>pendant</a:t>
+              <a:t>depend</a:t>
             </a:r>
             <a:endParaRPr lang="en-US" sz="1200" dirty="0"/>
           </a:p>
@@ -35159,7 +35189,7 @@
                 <a:ea typeface="Trebuchet MS" pitchFamily="34" charset="-122"/>
                 <a:cs typeface="Trebuchet MS" pitchFamily="34" charset="-120"/>
               </a:rPr>
-              <a:t>pendulum</a:t>
+              <a:t>suspend</a:t>
             </a:r>
             <a:endParaRPr lang="en-US" sz="1200" dirty="0"/>
           </a:p>
@@ -35225,7 +35255,7 @@
                 <a:ea typeface="Trebuchet MS" pitchFamily="34" charset="-122"/>
                 <a:cs typeface="Trebuchet MS" pitchFamily="34" charset="-120"/>
               </a:rPr>
-              <a:t>suspend</a:t>
+              <a:t>append</a:t>
             </a:r>
             <a:endParaRPr lang="en-US" sz="1200" dirty="0"/>
           </a:p>
@@ -35291,7 +35321,7 @@
                 <a:ea typeface="Trebuchet MS" pitchFamily="34" charset="-122"/>
                 <a:cs typeface="Trebuchet MS" pitchFamily="34" charset="-120"/>
               </a:rPr>
-              <a:t>depend</a:t>
+              <a:t>expend</a:t>
             </a:r>
             <a:endParaRPr lang="en-US" sz="1200" dirty="0"/>
           </a:p>
@@ -35357,7 +35387,7 @@
                 <a:ea typeface="Trebuchet MS" pitchFamily="34" charset="-122"/>
                 <a:cs typeface="Trebuchet MS" pitchFamily="34" charset="-120"/>
               </a:rPr>
-              <a:t>append</a:t>
+              <a:t>pending</a:t>
             </a:r>
             <a:endParaRPr lang="en-US" sz="1200" dirty="0"/>
           </a:p>
@@ -35423,7 +35453,7 @@
                 <a:ea typeface="Trebuchet MS" pitchFamily="34" charset="-122"/>
                 <a:cs typeface="Trebuchet MS" pitchFamily="34" charset="-120"/>
               </a:rPr>
-              <a:t>impending</a:t>
+              <a:t>pendant</a:t>
             </a:r>
             <a:endParaRPr lang="en-US" sz="1200" dirty="0"/>
           </a:p>
@@ -35489,7 +35519,7 @@
                 <a:ea typeface="Trebuchet MS" pitchFamily="34" charset="-122"/>
                 <a:cs typeface="Trebuchet MS" pitchFamily="34" charset="-120"/>
               </a:rPr>
-              <a:t>pending</a:t>
+              <a:t>pendulum</a:t>
             </a:r>
             <a:endParaRPr lang="en-US" sz="1200" dirty="0"/>
           </a:p>
@@ -35555,7 +35585,7 @@
                 <a:ea typeface="Trebuchet MS" pitchFamily="34" charset="-122"/>
                 <a:cs typeface="Trebuchet MS" pitchFamily="34" charset="-120"/>
               </a:rPr>
-              <a:t>appendix</a:t>
+              <a:t>independent</a:t>
             </a:r>
             <a:endParaRPr lang="en-US" sz="1200" dirty="0"/>
           </a:p>
@@ -35847,7 +35877,7 @@
                 <a:ea typeface="Calibri" pitchFamily="34" charset="-122"/>
                 <a:cs typeface="Calibri" pitchFamily="34" charset="-120"/>
               </a:rPr>
-              <a:t>Word Labs  •  wordlabs.app  •  Root: 'pend' = to hang, hang down</a:t>
+              <a:t>Word Labs  •  wordlabs.app  •  Root: 'pend' = hang, hang down, weigh</a:t>
             </a:r>
             <a:endParaRPr lang="en-US" sz="800" dirty="0"/>
           </a:p>
@@ -36011,7 +36041,7 @@
                 <a:ea typeface="Calibri" pitchFamily="34" charset="-122"/>
                 <a:cs typeface="Calibri" pitchFamily="34" charset="-120"/>
               </a:rPr>
-              <a:t>The core part of a word carrying its basic meaning. For example, 'pend' means 'to hang, hang down'.</a:t>
+              <a:t>The core part of a word carrying its basic meaning. For example, 'pend' means 'hang, hang down, weigh'.</a:t>
             </a:r>
             <a:endParaRPr lang="en-US" sz="1350" dirty="0"/>
           </a:p>
@@ -36631,7 +36661,7 @@
                 <a:ea typeface="Calibri" pitchFamily="34" charset="-122"/>
                 <a:cs typeface="Calibri" pitchFamily="34" charset="-120"/>
               </a:rPr>
-              <a:t>Word Labs  •  wordlabs.app  •  Root: 'pend' = to hang, hang down</a:t>
+              <a:t>Word Labs  •  wordlabs.app  •  Root: 'pend' = hang, hang down, weigh</a:t>
             </a:r>
             <a:endParaRPr lang="en-US" sz="800" dirty="0"/>
           </a:p>
@@ -36743,7 +36773,7 @@
                 <a:ea typeface="Calibri" pitchFamily="34" charset="-122"/>
                 <a:cs typeface="Calibri" pitchFamily="34" charset="-120"/>
               </a:rPr>
-              <a:t>1.  The root 'pend' comes from a Latin word meaning to hang.</a:t>
+              <a:t>1.  The prefix 'in' in 'independent' means 'not', so independent means not dependent on others.</a:t>
             </a:r>
             <a:endParaRPr lang="en-US" sz="1300" dirty="0"/>
           </a:p>
@@ -36882,7 +36912,7 @@
                 <a:ea typeface="Calibri" pitchFamily="34" charset="-122"/>
                 <a:cs typeface="Calibri" pitchFamily="34" charset="-120"/>
               </a:rPr>
-              <a:t>2.  A pendulum moves in a straight line without swinging.</a:t>
+              <a:t>2.  A pendulum hangs and swings, which connects to the meaning of 'pend'.</a:t>
             </a:r>
             <a:endParaRPr lang="en-US" sz="1300" dirty="0"/>
           </a:p>
@@ -36905,11 +36935,11 @@
             </a:avLst>
           </a:prstGeom>
           <a:solidFill>
-            <a:srgbClr val="FEE2E2"/>
-          </a:solidFill>
-          <a:ln w="12700">
-            <a:solidFill>
-              <a:srgbClr val="DC2626"/>
+            <a:srgbClr val="DCFCE7"/>
+          </a:solidFill>
+          <a:ln w="12700">
+            <a:solidFill>
+              <a:srgbClr val="16A34A"/>
             </a:solidFill>
             <a:prstDash val="solid"/>
           </a:ln>
@@ -36942,13 +36972,13 @@
             <a:r>
               <a:rPr lang="en-US" sz="1100" b="1" dirty="0">
                 <a:solidFill>
-                  <a:srgbClr val="DC2626"/>
+                  <a:srgbClr val="16A34A"/>
                 </a:solidFill>
                 <a:latin typeface="Trebuchet MS" pitchFamily="34" charset="0"/>
                 <a:ea typeface="Trebuchet MS" pitchFamily="34" charset="-122"/>
                 <a:cs typeface="Trebuchet MS" pitchFamily="34" charset="-120"/>
               </a:rPr>
-              <a:t>FALSE</a:t>
+              <a:t>TRUE</a:t>
             </a:r>
             <a:endParaRPr lang="en-US" sz="1100" dirty="0"/>
           </a:p>
@@ -37021,7 +37051,7 @@
                 <a:ea typeface="Calibri" pitchFamily="34" charset="-122"/>
                 <a:cs typeface="Calibri" pitchFamily="34" charset="-120"/>
               </a:rPr>
-              <a:t>3.  The word 'depend' contains the root 'pend' meaning to hang.</a:t>
+              <a:t>3.  The root 'pend' comes from a Greek word meaning to push.</a:t>
             </a:r>
             <a:endParaRPr lang="en-US" sz="1300" dirty="0"/>
           </a:p>
@@ -37044,11 +37074,11 @@
             </a:avLst>
           </a:prstGeom>
           <a:solidFill>
-            <a:srgbClr val="DCFCE7"/>
-          </a:solidFill>
-          <a:ln w="12700">
-            <a:solidFill>
-              <a:srgbClr val="16A34A"/>
+            <a:srgbClr val="FEE2E2"/>
+          </a:solidFill>
+          <a:ln w="12700">
+            <a:solidFill>
+              <a:srgbClr val="DC2626"/>
             </a:solidFill>
             <a:prstDash val="solid"/>
           </a:ln>
@@ -37081,13 +37111,13 @@
             <a:r>
               <a:rPr lang="en-US" sz="1100" b="1" dirty="0">
                 <a:solidFill>
-                  <a:srgbClr val="16A34A"/>
+                  <a:srgbClr val="DC2626"/>
                 </a:solidFill>
                 <a:latin typeface="Trebuchet MS" pitchFamily="34" charset="0"/>
                 <a:ea typeface="Trebuchet MS" pitchFamily="34" charset="-122"/>
                 <a:cs typeface="Trebuchet MS" pitchFamily="34" charset="-120"/>
               </a:rPr>
-              <a:t>TRUE</a:t>
+              <a:t>FALSE</a:t>
             </a:r>
             <a:endParaRPr lang="en-US" sz="1100" dirty="0"/>
           </a:p>
@@ -37160,7 +37190,7 @@
                 <a:ea typeface="Calibri" pitchFamily="34" charset="-122"/>
                 <a:cs typeface="Calibri" pitchFamily="34" charset="-120"/>
               </a:rPr>
-              <a:t>4.  Something described as 'impending' is about to happen very soon.</a:t>
+              <a:t>4.  The word 'pendant' has nothing to do with hanging.</a:t>
             </a:r>
             <a:endParaRPr lang="en-US" sz="1300" dirty="0"/>
           </a:p>
@@ -37183,11 +37213,11 @@
             </a:avLst>
           </a:prstGeom>
           <a:solidFill>
-            <a:srgbClr val="DCFCE7"/>
-          </a:solidFill>
-          <a:ln w="12700">
-            <a:solidFill>
-              <a:srgbClr val="16A34A"/>
+            <a:srgbClr val="FEE2E2"/>
+          </a:solidFill>
+          <a:ln w="12700">
+            <a:solidFill>
+              <a:srgbClr val="DC2626"/>
             </a:solidFill>
             <a:prstDash val="solid"/>
           </a:ln>
@@ -37220,13 +37250,13 @@
             <a:r>
               <a:rPr lang="en-US" sz="1100" b="1" dirty="0">
                 <a:solidFill>
-                  <a:srgbClr val="16A34A"/>
+                  <a:srgbClr val="DC2626"/>
                 </a:solidFill>
                 <a:latin typeface="Trebuchet MS" pitchFamily="34" charset="0"/>
                 <a:ea typeface="Trebuchet MS" pitchFamily="34" charset="-122"/>
                 <a:cs typeface="Trebuchet MS" pitchFamily="34" charset="-120"/>
               </a:rPr>
-              <a:t>TRUE</a:t>
+              <a:t>FALSE</a:t>
             </a:r>
             <a:endParaRPr lang="en-US" sz="1100" dirty="0"/>
           </a:p>
@@ -37299,7 +37329,7 @@
                 <a:ea typeface="Calibri" pitchFamily="34" charset="-122"/>
                 <a:cs typeface="Calibri" pitchFamily="34" charset="-120"/>
               </a:rPr>
-              <a:t>5.  The root 'pend' originally comes from a Greek word.</a:t>
+              <a:t>5.  The root 'pend' comes from a Latin word meaning to hang or weigh.</a:t>
             </a:r>
             <a:endParaRPr lang="en-US" sz="1300" dirty="0"/>
           </a:p>
@@ -37322,11 +37352,11 @@
             </a:avLst>
           </a:prstGeom>
           <a:solidFill>
-            <a:srgbClr val="FEE2E2"/>
-          </a:solidFill>
-          <a:ln w="12700">
-            <a:solidFill>
-              <a:srgbClr val="DC2626"/>
+            <a:srgbClr val="DCFCE7"/>
+          </a:solidFill>
+          <a:ln w="12700">
+            <a:solidFill>
+              <a:srgbClr val="16A34A"/>
             </a:solidFill>
             <a:prstDash val="solid"/>
           </a:ln>
@@ -37359,13 +37389,13 @@
             <a:r>
               <a:rPr lang="en-US" sz="1100" b="1" dirty="0">
                 <a:solidFill>
-                  <a:srgbClr val="DC2626"/>
+                  <a:srgbClr val="16A34A"/>
                 </a:solidFill>
                 <a:latin typeface="Trebuchet MS" pitchFamily="34" charset="0"/>
                 <a:ea typeface="Trebuchet MS" pitchFamily="34" charset="-122"/>
                 <a:cs typeface="Trebuchet MS" pitchFamily="34" charset="-120"/>
               </a:rPr>
-              <a:t>FALSE</a:t>
+              <a:t>TRUE</a:t>
             </a:r>
             <a:endParaRPr lang="en-US" sz="1100" dirty="0"/>
           </a:p>
@@ -37657,7 +37687,7 @@
                 <a:ea typeface="Calibri" pitchFamily="34" charset="-122"/>
                 <a:cs typeface="Calibri" pitchFamily="34" charset="-120"/>
               </a:rPr>
-              <a:t>Word Labs  •  wordlabs.app  •  Root: 'pend' = to hang, hang down</a:t>
+              <a:t>Word Labs  •  wordlabs.app  •  Root: 'pend' = hang, hang down, weigh</a:t>
             </a:r>
             <a:endParaRPr lang="en-US" sz="800" dirty="0"/>
           </a:p>
@@ -37794,7 +37824,7 @@
                 <a:ea typeface="Trebuchet MS" pitchFamily="34" charset="-122"/>
                 <a:cs typeface="Trebuchet MS" pitchFamily="34" charset="-120"/>
               </a:rPr>
-              <a:t>to hang, hang down</a:t>
+              <a:t>hang, hang down, weigh</a:t>
             </a:r>
             <a:endParaRPr lang="en-US" sz="2000" dirty="0"/>
           </a:p>
@@ -37938,7 +37968,7 @@
                 <a:ea typeface="Trebuchet MS" pitchFamily="34" charset="-122"/>
                 <a:cs typeface="Trebuchet MS" pitchFamily="34" charset="-120"/>
               </a:rPr>
-              <a:t>pendant</a:t>
+              <a:t>depend</a:t>
             </a:r>
             <a:endParaRPr lang="en-US" sz="1300" dirty="0"/>
           </a:p>
@@ -38004,7 +38034,7 @@
                 <a:ea typeface="Trebuchet MS" pitchFamily="34" charset="-122"/>
                 <a:cs typeface="Trebuchet MS" pitchFamily="34" charset="-120"/>
               </a:rPr>
-              <a:t>pendulum</a:t>
+              <a:t>suspend</a:t>
             </a:r>
             <a:endParaRPr lang="en-US" sz="1300" dirty="0"/>
           </a:p>
@@ -38070,7 +38100,7 @@
                 <a:ea typeface="Trebuchet MS" pitchFamily="34" charset="-122"/>
                 <a:cs typeface="Trebuchet MS" pitchFamily="34" charset="-120"/>
               </a:rPr>
-              <a:t>suspend</a:t>
+              <a:t>append</a:t>
             </a:r>
             <a:endParaRPr lang="en-US" sz="1300" dirty="0"/>
           </a:p>
@@ -38136,7 +38166,7 @@
                 <a:ea typeface="Trebuchet MS" pitchFamily="34" charset="-122"/>
                 <a:cs typeface="Trebuchet MS" pitchFamily="34" charset="-120"/>
               </a:rPr>
-              <a:t>depend</a:t>
+              <a:t>expend</a:t>
             </a:r>
             <a:endParaRPr lang="en-US" sz="1300" dirty="0"/>
           </a:p>
@@ -38202,7 +38232,7 @@
                 <a:ea typeface="Trebuchet MS" pitchFamily="34" charset="-122"/>
                 <a:cs typeface="Trebuchet MS" pitchFamily="34" charset="-120"/>
               </a:rPr>
-              <a:t>append</a:t>
+              <a:t>pending</a:t>
             </a:r>
             <a:endParaRPr lang="en-US" sz="1300" dirty="0"/>
           </a:p>
@@ -38268,7 +38298,7 @@
                 <a:ea typeface="Trebuchet MS" pitchFamily="34" charset="-122"/>
                 <a:cs typeface="Trebuchet MS" pitchFamily="34" charset="-120"/>
               </a:rPr>
-              <a:t>impending</a:t>
+              <a:t>pendant</a:t>
             </a:r>
             <a:endParaRPr lang="en-US" sz="1300" dirty="0"/>
           </a:p>
@@ -38334,7 +38364,7 @@
                 <a:ea typeface="Trebuchet MS" pitchFamily="34" charset="-122"/>
                 <a:cs typeface="Trebuchet MS" pitchFamily="34" charset="-120"/>
               </a:rPr>
-              <a:t>pending</a:t>
+              <a:t>pendulum</a:t>
             </a:r>
             <a:endParaRPr lang="en-US" sz="1300" dirty="0"/>
           </a:p>
@@ -38626,7 +38656,7 @@
                 <a:ea typeface="Calibri" pitchFamily="34" charset="-122"/>
                 <a:cs typeface="Calibri" pitchFamily="34" charset="-120"/>
               </a:rPr>
-              <a:t>Word Labs  •  wordlabs.app  •  Root: 'pend' = to hang, hang down</a:t>
+              <a:t>Word Labs  •  wordlabs.app  •  Root: 'pend' = hang, hang down, weigh</a:t>
             </a:r>
             <a:endParaRPr lang="en-US" sz="800" dirty="0"/>
           </a:p>
@@ -39361,7 +39391,7 @@
                 <a:ea typeface="Trebuchet MS" pitchFamily="34" charset="-122"/>
                 <a:cs typeface="Trebuchet MS" pitchFamily="34" charset="-120"/>
               </a:rPr>
-              <a:t>-ulum</a:t>
+              <a:t>-ent</a:t>
             </a:r>
             <a:endParaRPr lang="en-US" sz="1300" dirty="0"/>
           </a:p>
@@ -39425,7 +39455,7 @@
                 <a:ea typeface="Trebuchet MS" pitchFamily="34" charset="-122"/>
                 <a:cs typeface="Trebuchet MS" pitchFamily="34" charset="-120"/>
               </a:rPr>
-              <a:t>im-</a:t>
+              <a:t>ex-</a:t>
             </a:r>
             <a:endParaRPr lang="en-US" sz="1300" dirty="0"/>
           </a:p>
@@ -39514,7 +39544,7 @@
                 <a:ea typeface="Trebuchet MS" pitchFamily="34" charset="-122"/>
                 <a:cs typeface="Trebuchet MS" pitchFamily="34" charset="-120"/>
               </a:rPr>
-              <a:t>-ent</a:t>
+              <a:t>-ance</a:t>
             </a:r>
             <a:endParaRPr lang="en-US" sz="1300" dirty="0"/>
           </a:p>
@@ -39578,7 +39608,7 @@
                 <a:ea typeface="Trebuchet MS" pitchFamily="34" charset="-122"/>
                 <a:cs typeface="Trebuchet MS" pitchFamily="34" charset="-120"/>
               </a:rPr>
-              <a:t>com-</a:t>
+              <a:t>im-</a:t>
             </a:r>
             <a:endParaRPr lang="en-US" sz="1300" dirty="0"/>
           </a:p>
@@ -39667,7 +39697,7 @@
                 <a:ea typeface="Trebuchet MS" pitchFamily="34" charset="-122"/>
                 <a:cs typeface="Trebuchet MS" pitchFamily="34" charset="-120"/>
               </a:rPr>
-              <a:t>-ance</a:t>
+              <a:t>-ulum</a:t>
             </a:r>
             <a:endParaRPr lang="en-US" sz="1300" dirty="0"/>
           </a:p>
@@ -40108,7 +40138,7 @@
                 <a:ea typeface="Trebuchet MS" pitchFamily="34" charset="-122"/>
                 <a:cs typeface="Trebuchet MS" pitchFamily="34" charset="-120"/>
               </a:rPr>
-              <a:t>pendant</a:t>
+              <a:t>depend</a:t>
             </a:r>
             <a:endParaRPr lang="en-US" sz="1400" dirty="0"/>
           </a:p>
@@ -40400,7 +40430,7 @@
                 <a:ea typeface="Calibri" pitchFamily="34" charset="-122"/>
                 <a:cs typeface="Calibri" pitchFamily="34" charset="-120"/>
               </a:rPr>
-              <a:t>Word Labs  •  wordlabs.app  •  Root: 'pend' = to hang, hang down</a:t>
+              <a:t>Word Labs  •  wordlabs.app  •  Root: 'pend' = hang, hang down, weigh</a:t>
             </a:r>
             <a:endParaRPr lang="en-US" sz="800" dirty="0"/>
           </a:p>
@@ -40512,7 +40542,7 @@
                 <a:ea typeface="Trebuchet MS" pitchFamily="34" charset="-122"/>
                 <a:cs typeface="Trebuchet MS" pitchFamily="34" charset="-120"/>
               </a:rPr>
-              <a:t>pendant</a:t>
+              <a:t>depend</a:t>
             </a:r>
             <a:endParaRPr lang="en-US" sz="1200" dirty="0"/>
           </a:p>
@@ -40578,7 +40608,7 @@
                 <a:ea typeface="Calibri" pitchFamily="34" charset="-122"/>
                 <a:cs typeface="Calibri" pitchFamily="34" charset="-120"/>
               </a:rPr>
-              <a:t>To hang something from above, or to stop something for a period of time.</a:t>
+              <a:t>To add something extra onto the end of something.</a:t>
             </a:r>
             <a:endParaRPr lang="en-US" sz="1200" dirty="0"/>
           </a:p>
@@ -40651,7 +40681,7 @@
                 <a:ea typeface="Trebuchet MS" pitchFamily="34" charset="-122"/>
                 <a:cs typeface="Trebuchet MS" pitchFamily="34" charset="-120"/>
               </a:rPr>
-              <a:t>pendulum</a:t>
+              <a:t>suspend</a:t>
             </a:r>
             <a:endParaRPr lang="en-US" sz="1200" dirty="0"/>
           </a:p>
@@ -40717,7 +40747,7 @@
                 <a:ea typeface="Calibri" pitchFamily="34" charset="-122"/>
                 <a:cs typeface="Calibri" pitchFamily="34" charset="-120"/>
               </a:rPr>
-              <a:t>To attach or add something on to the end of something else.</a:t>
+              <a:t>Waiting to happen or be decided; not yet finished.</a:t>
             </a:r>
             <a:endParaRPr lang="en-US" sz="1200" dirty="0"/>
           </a:p>
@@ -40790,7 +40820,7 @@
                 <a:ea typeface="Trebuchet MS" pitchFamily="34" charset="-122"/>
                 <a:cs typeface="Trebuchet MS" pitchFamily="34" charset="-120"/>
               </a:rPr>
-              <a:t>suspend</a:t>
+              <a:t>append</a:t>
             </a:r>
             <a:endParaRPr lang="en-US" sz="1200" dirty="0"/>
           </a:p>
@@ -40856,7 +40886,7 @@
                 <a:ea typeface="Calibri" pitchFamily="34" charset="-122"/>
                 <a:cs typeface="Calibri" pitchFamily="34" charset="-120"/>
               </a:rPr>
-              <a:t>A piece of jewellery that hangs from a chain around your neck.</a:t>
+              <a:t>To rely on someone or something for help or support.</a:t>
             </a:r>
             <a:endParaRPr lang="en-US" sz="1200" dirty="0"/>
           </a:p>
@@ -40929,7 +40959,7 @@
                 <a:ea typeface="Trebuchet MS" pitchFamily="34" charset="-122"/>
                 <a:cs typeface="Trebuchet MS" pitchFamily="34" charset="-120"/>
               </a:rPr>
-              <a:t>depend</a:t>
+              <a:t>expend</a:t>
             </a:r>
             <a:endParaRPr lang="en-US" sz="1200" dirty="0"/>
           </a:p>
@@ -40995,7 +41025,7 @@
                 <a:ea typeface="Calibri" pitchFamily="34" charset="-122"/>
                 <a:cs typeface="Calibri" pitchFamily="34" charset="-120"/>
               </a:rPr>
-              <a:t>Something that is about to happen very soon, like it is hanging over you.</a:t>
+              <a:t>A piece of jewellery that hangs from a chain around your neck.</a:t>
             </a:r>
             <a:endParaRPr lang="en-US" sz="1200" dirty="0"/>
           </a:p>
@@ -41068,7 +41098,7 @@
                 <a:ea typeface="Trebuchet MS" pitchFamily="34" charset="-122"/>
                 <a:cs typeface="Trebuchet MS" pitchFamily="34" charset="-120"/>
               </a:rPr>
-              <a:t>append</a:t>
+              <a:t>pending</a:t>
             </a:r>
             <a:endParaRPr lang="en-US" sz="1200" dirty="0"/>
           </a:p>
@@ -41134,7 +41164,7 @@
                 <a:ea typeface="Calibri" pitchFamily="34" charset="-122"/>
                 <a:cs typeface="Calibri" pitchFamily="34" charset="-120"/>
               </a:rPr>
-              <a:t>Waiting to happen or be decided — like it is still hanging in the air.</a:t>
+              <a:t>A weight that hangs and swings from side to side, like in a grandfather clock.</a:t>
             </a:r>
             <a:endParaRPr lang="en-US" sz="1200" dirty="0"/>
           </a:p>
@@ -41207,7 +41237,7 @@
                 <a:ea typeface="Trebuchet MS" pitchFamily="34" charset="-122"/>
                 <a:cs typeface="Trebuchet MS" pitchFamily="34" charset="-120"/>
               </a:rPr>
-              <a:t>impending</a:t>
+              <a:t>pendant</a:t>
             </a:r>
             <a:endParaRPr lang="en-US" sz="1200" dirty="0"/>
           </a:p>
@@ -41273,7 +41303,7 @@
                 <a:ea typeface="Calibri" pitchFamily="34" charset="-122"/>
                 <a:cs typeface="Calibri" pitchFamily="34" charset="-120"/>
               </a:rPr>
-              <a:t>To rely on someone or something, like hanging on them for support.</a:t>
+              <a:t>To use up energy, money, or effort on something.</a:t>
             </a:r>
             <a:endParaRPr lang="en-US" sz="1200" dirty="0"/>
           </a:p>
@@ -41346,7 +41376,7 @@
                 <a:ea typeface="Trebuchet MS" pitchFamily="34" charset="-122"/>
                 <a:cs typeface="Trebuchet MS" pitchFamily="34" charset="-120"/>
               </a:rPr>
-              <a:t>pending</a:t>
+              <a:t>pendulum</a:t>
             </a:r>
             <a:endParaRPr lang="en-US" sz="1200" dirty="0"/>
           </a:p>
@@ -41412,7 +41442,7 @@
                 <a:ea typeface="Calibri" pitchFamily="34" charset="-122"/>
                 <a:cs typeface="Calibri" pitchFamily="34" charset="-120"/>
               </a:rPr>
-              <a:t>A weight that hangs and swings back and forth, often used in clocks.</a:t>
+              <a:t>To hang something from above, or to stop something for a period of time.</a:t>
             </a:r>
             <a:endParaRPr lang="en-US" sz="1200" dirty="0"/>
           </a:p>
@@ -41704,7 +41734,7 @@
                 <a:ea typeface="Calibri" pitchFamily="34" charset="-122"/>
                 <a:cs typeface="Calibri" pitchFamily="34" charset="-120"/>
               </a:rPr>
-              <a:t>Word Labs  •  wordlabs.app  •  Root: 'pend' = to hang, hang down</a:t>
+              <a:t>Word Labs  •  wordlabs.app  •  Root: 'pend' = hang, hang down, weigh</a:t>
             </a:r>
             <a:endParaRPr lang="en-US" sz="800" dirty="0"/>
           </a:p>
@@ -41907,7 +41937,7 @@
                 <a:ea typeface="Calibri" pitchFamily="34" charset="-122"/>
                 <a:cs typeface="Calibri" pitchFamily="34" charset="-120"/>
               </a:rPr>
-              <a:t>The scientist watched the pendulum swing slowly back and forth inside the old grandfather clock.</a:t>
+              <a:t>The outcome of the school carnival will depend on whether it rains tomorrow.</a:t>
             </a:r>
             <a:endParaRPr lang="en-US" sz="1500" dirty="0"/>
           </a:p>
@@ -42071,7 +42101,7 @@
                 <a:ea typeface="Calibri" pitchFamily="34" charset="-122"/>
                 <a:cs typeface="Calibri" pitchFamily="34" charset="-120"/>
               </a:rPr>
-              <a:t>We depend on the rain to fill our water tanks during dry summers in Australia.</a:t>
+              <a:t>The teacher decided to suspend the activity until everyone was ready to listen.</a:t>
             </a:r>
             <a:endParaRPr lang="en-US" sz="1500" dirty="0"/>
           </a:p>
@@ -42235,7 +42265,7 @@
                 <a:ea typeface="Calibri" pitchFamily="34" charset="-122"/>
                 <a:cs typeface="Calibri" pitchFamily="34" charset="-120"/>
               </a:rPr>
-              <a:t>The teacher told us that our excursion approval was still pending because she hadn't heard back from the office.</a:t>
+              <a:t>The scientist had to expend a lot of energy testing each experiment carefully.</a:t>
             </a:r>
             <a:endParaRPr lang="en-US" sz="1500" dirty="0"/>
           </a:p>
